--- a/AI競賽.pptx
+++ b/AI競賽.pptx
@@ -6,7 +6,7 @@
     <p:sldMasterId id="2147483675" r:id="rId2"/>
   </p:sldMasterIdLst>
   <p:notesMasterIdLst>
-    <p:notesMasterId r:id="rId10"/>
+    <p:notesMasterId r:id="rId11"/>
   </p:notesMasterIdLst>
   <p:sldIdLst>
     <p:sldId id="2147482890" r:id="rId3"/>
@@ -16,6 +16,7 @@
     <p:sldId id="261" r:id="rId7"/>
     <p:sldId id="2147482904" r:id="rId8"/>
     <p:sldId id="2147482905" r:id="rId9"/>
+    <p:sldId id="2147482906" r:id="rId10"/>
   </p:sldIdLst>
   <p:sldSz cx="12192000" cy="6858000"/>
   <p:notesSz cx="6858000" cy="9144000"/>
@@ -122,8 +123,204 @@
 </p:presentation>
 </file>
 
+<file path=ppt/revisionInfo.xml><?xml version="1.0" encoding="utf-8"?>
+<p1510:revInfo xmlns:a="http://schemas.openxmlformats.org/drawingml/2006/main" xmlns:r="http://schemas.openxmlformats.org/officeDocument/2006/relationships" xmlns:p1510="http://schemas.microsoft.com/office/powerpoint/2015/10/main">
+  <p1510:revLst>
+    <p1510:client id="{5B877692-0C70-4597-9C0D-3750B1559B91}" v="36" dt="2026-07-10T08:11:54.126"/>
+  </p1510:revLst>
+</p1510:revInfo>
+</file>
+
 <file path=ppt/changesInfos/changesInfo1.xml><?xml version="1.0" encoding="utf-8"?>
 <pc:chgInfo xmlns:a="http://schemas.openxmlformats.org/drawingml/2006/main" xmlns:r="http://schemas.openxmlformats.org/officeDocument/2006/relationships" xmlns:ac="http://schemas.microsoft.com/office/drawing/2013/main/command" xmlns:pc="http://schemas.microsoft.com/office/powerpoint/2013/main/command">
+  <pc:docChgLst>
+    <pc:chgData name="文浩 郭" userId="6ccc17ab3add3069" providerId="LiveId" clId="{A16DFF17-4FF3-4109-A435-57F25017F4B7}"/>
+    <pc:docChg chg="custSel addSld modSld sldOrd">
+      <pc:chgData name="文浩 郭" userId="6ccc17ab3add3069" providerId="LiveId" clId="{A16DFF17-4FF3-4109-A435-57F25017F4B7}" dt="2026-07-10T08:26:09.911" v="684" actId="207"/>
+      <pc:docMkLst>
+        <pc:docMk/>
+      </pc:docMkLst>
+      <pc:sldChg chg="addSp delSp modSp mod">
+        <pc:chgData name="文浩 郭" userId="6ccc17ab3add3069" providerId="LiveId" clId="{A16DFF17-4FF3-4109-A435-57F25017F4B7}" dt="2026-07-10T08:04:40.141" v="175"/>
+        <pc:sldMkLst>
+          <pc:docMk/>
+          <pc:sldMk cId="0" sldId="261"/>
+        </pc:sldMkLst>
+        <pc:picChg chg="add del mod">
+          <ac:chgData name="文浩 郭" userId="6ccc17ab3add3069" providerId="LiveId" clId="{A16DFF17-4FF3-4109-A435-57F25017F4B7}" dt="2026-07-10T08:04:40.125" v="173"/>
+          <ac:picMkLst>
+            <pc:docMk/>
+            <pc:sldMk cId="0" sldId="261"/>
+            <ac:picMk id="3" creationId="{DD65562E-76EA-4365-D337-7AA4F57F6E2B}"/>
+          </ac:picMkLst>
+        </pc:picChg>
+        <pc:picChg chg="add mod">
+          <ac:chgData name="文浩 郭" userId="6ccc17ab3add3069" providerId="LiveId" clId="{A16DFF17-4FF3-4109-A435-57F25017F4B7}" dt="2026-07-10T08:04:40.141" v="175"/>
+          <ac:picMkLst>
+            <pc:docMk/>
+            <pc:sldMk cId="0" sldId="261"/>
+            <ac:picMk id="5" creationId="{CAC8AE35-85B8-0287-3CB0-6CAD64160FB4}"/>
+          </ac:picMkLst>
+        </pc:picChg>
+        <pc:picChg chg="del">
+          <ac:chgData name="文浩 郭" userId="6ccc17ab3add3069" providerId="LiveId" clId="{A16DFF17-4FF3-4109-A435-57F25017F4B7}" dt="2026-07-10T07:50:54.385" v="5"/>
+          <ac:picMkLst>
+            <pc:docMk/>
+            <pc:sldMk cId="0" sldId="261"/>
+            <ac:picMk id="77" creationId="{00000000-0000-0000-0000-000000000000}"/>
+          </ac:picMkLst>
+        </pc:picChg>
+      </pc:sldChg>
+      <pc:sldChg chg="modSp mod">
+        <pc:chgData name="文浩 郭" userId="6ccc17ab3add3069" providerId="LiveId" clId="{A16DFF17-4FF3-4109-A435-57F25017F4B7}" dt="2026-07-10T07:02:16.318" v="0" actId="20577"/>
+        <pc:sldMkLst>
+          <pc:docMk/>
+          <pc:sldMk cId="0" sldId="2147482901"/>
+        </pc:sldMkLst>
+        <pc:spChg chg="mod">
+          <ac:chgData name="文浩 郭" userId="6ccc17ab3add3069" providerId="LiveId" clId="{A16DFF17-4FF3-4109-A435-57F25017F4B7}" dt="2026-07-10T07:02:16.318" v="0" actId="20577"/>
+          <ac:spMkLst>
+            <pc:docMk/>
+            <pc:sldMk cId="0" sldId="2147482901"/>
+            <ac:spMk id="52" creationId="{00000000-0000-0000-0000-000000000000}"/>
+          </ac:spMkLst>
+        </pc:spChg>
+      </pc:sldChg>
+      <pc:sldChg chg="addSp delSp modSp mod">
+        <pc:chgData name="文浩 郭" userId="6ccc17ab3add3069" providerId="LiveId" clId="{A16DFF17-4FF3-4109-A435-57F25017F4B7}" dt="2026-07-10T08:17:56.610" v="559" actId="14100"/>
+        <pc:sldMkLst>
+          <pc:docMk/>
+          <pc:sldMk cId="0" sldId="2147482903"/>
+        </pc:sldMkLst>
+        <pc:spChg chg="add del mod">
+          <ac:chgData name="文浩 郭" userId="6ccc17ab3add3069" providerId="LiveId" clId="{A16DFF17-4FF3-4109-A435-57F25017F4B7}" dt="2026-07-10T08:00:20.824" v="61"/>
+          <ac:spMkLst>
+            <pc:docMk/>
+            <pc:sldMk cId="0" sldId="2147482903"/>
+            <ac:spMk id="2" creationId="{95791444-F11A-2D57-F4AB-303B9089F8C3}"/>
+          </ac:spMkLst>
+        </pc:spChg>
+        <pc:spChg chg="add del mod">
+          <ac:chgData name="文浩 郭" userId="6ccc17ab3add3069" providerId="LiveId" clId="{A16DFF17-4FF3-4109-A435-57F25017F4B7}" dt="2026-07-10T08:00:20.838" v="63"/>
+          <ac:spMkLst>
+            <pc:docMk/>
+            <pc:sldMk cId="0" sldId="2147482903"/>
+            <ac:spMk id="3" creationId="{6D44538B-2F56-49DF-FA0D-BF81ECEF2200}"/>
+          </ac:spMkLst>
+        </pc:spChg>
+        <pc:spChg chg="add del mod">
+          <ac:chgData name="文浩 郭" userId="6ccc17ab3add3069" providerId="LiveId" clId="{A16DFF17-4FF3-4109-A435-57F25017F4B7}" dt="2026-07-10T08:01:45.705" v="115"/>
+          <ac:spMkLst>
+            <pc:docMk/>
+            <pc:sldMk cId="0" sldId="2147482903"/>
+            <ac:spMk id="4" creationId="{4E678D3F-C957-8FE4-3D19-B74937E2EC9D}"/>
+          </ac:spMkLst>
+        </pc:spChg>
+        <pc:spChg chg="add del mod">
+          <ac:chgData name="文浩 郭" userId="6ccc17ab3add3069" providerId="LiveId" clId="{A16DFF17-4FF3-4109-A435-57F25017F4B7}" dt="2026-07-10T08:01:45.710" v="117"/>
+          <ac:spMkLst>
+            <pc:docMk/>
+            <pc:sldMk cId="0" sldId="2147482903"/>
+            <ac:spMk id="5" creationId="{A0FE132D-2352-7F97-B1E1-F579257EFDD1}"/>
+          </ac:spMkLst>
+        </pc:spChg>
+        <pc:spChg chg="add mod">
+          <ac:chgData name="文浩 郭" userId="6ccc17ab3add3069" providerId="LiveId" clId="{A16DFF17-4FF3-4109-A435-57F25017F4B7}" dt="2026-07-10T08:16:52.640" v="552" actId="108"/>
+          <ac:spMkLst>
+            <pc:docMk/>
+            <pc:sldMk cId="0" sldId="2147482903"/>
+            <ac:spMk id="6" creationId="{DE799AA1-389D-9CF3-1660-129B50C70817}"/>
+          </ac:spMkLst>
+        </pc:spChg>
+        <pc:spChg chg="add mod">
+          <ac:chgData name="文浩 郭" userId="6ccc17ab3add3069" providerId="LiveId" clId="{A16DFF17-4FF3-4109-A435-57F25017F4B7}" dt="2026-07-10T08:17:56.610" v="559" actId="14100"/>
+          <ac:spMkLst>
+            <pc:docMk/>
+            <pc:sldMk cId="0" sldId="2147482903"/>
+            <ac:spMk id="7" creationId="{7C1EAB8D-5060-CFF2-DC40-CC447D8CA772}"/>
+          </ac:spMkLst>
+        </pc:spChg>
+        <pc:spChg chg="add mod ord">
+          <ac:chgData name="文浩 郭" userId="6ccc17ab3add3069" providerId="LiveId" clId="{A16DFF17-4FF3-4109-A435-57F25017F4B7}" dt="2026-07-10T08:17:45.642" v="558" actId="14100"/>
+          <ac:spMkLst>
+            <pc:docMk/>
+            <pc:sldMk cId="0" sldId="2147482903"/>
+            <ac:spMk id="8" creationId="{03584C9E-544C-1A9D-E66E-1496712C5394}"/>
+          </ac:spMkLst>
+        </pc:spChg>
+        <pc:spChg chg="del mod">
+          <ac:chgData name="文浩 郭" userId="6ccc17ab3add3069" providerId="LiveId" clId="{A16DFF17-4FF3-4109-A435-57F25017F4B7}" dt="2026-07-10T07:58:44.064" v="9"/>
+          <ac:spMkLst>
+            <pc:docMk/>
+            <pc:sldMk cId="0" sldId="2147482903"/>
+            <ac:spMk id="71" creationId="{00000000-0000-0000-0000-000000000000}"/>
+          </ac:spMkLst>
+        </pc:spChg>
+      </pc:sldChg>
+      <pc:sldChg chg="addSp delSp modSp mod">
+        <pc:chgData name="文浩 郭" userId="6ccc17ab3add3069" providerId="LiveId" clId="{A16DFF17-4FF3-4109-A435-57F25017F4B7}" dt="2026-07-10T08:26:09.911" v="684" actId="207"/>
+        <pc:sldMkLst>
+          <pc:docMk/>
+          <pc:sldMk cId="0" sldId="2147482904"/>
+        </pc:sldMkLst>
+        <pc:spChg chg="add mod">
+          <ac:chgData name="文浩 郭" userId="6ccc17ab3add3069" providerId="LiveId" clId="{A16DFF17-4FF3-4109-A435-57F25017F4B7}" dt="2026-07-10T08:26:09.911" v="684" actId="207"/>
+          <ac:spMkLst>
+            <pc:docMk/>
+            <pc:sldMk cId="0" sldId="2147482904"/>
+            <ac:spMk id="3" creationId="{C61512A1-1763-8480-3EA1-20EDCC258513}"/>
+          </ac:spMkLst>
+        </pc:spChg>
+        <pc:spChg chg="mod">
+          <ac:chgData name="文浩 郭" userId="6ccc17ab3add3069" providerId="LiveId" clId="{A16DFF17-4FF3-4109-A435-57F25017F4B7}" dt="2026-07-10T08:11:05.981" v="179" actId="947"/>
+          <ac:spMkLst>
+            <pc:docMk/>
+            <pc:sldMk cId="0" sldId="2147482904"/>
+            <ac:spMk id="85" creationId="{00000000-0000-0000-0000-000000000000}"/>
+          </ac:spMkLst>
+        </pc:spChg>
+        <pc:spChg chg="mod">
+          <ac:chgData name="文浩 郭" userId="6ccc17ab3add3069" providerId="LiveId" clId="{A16DFF17-4FF3-4109-A435-57F25017F4B7}" dt="2026-07-10T08:11:54.126" v="466"/>
+          <ac:spMkLst>
+            <pc:docMk/>
+            <pc:sldMk cId="0" sldId="2147482904"/>
+            <ac:spMk id="86" creationId="{00000000-0000-0000-0000-000000000000}"/>
+          </ac:spMkLst>
+        </pc:spChg>
+        <pc:graphicFrameChg chg="add mod modGraphic">
+          <ac:chgData name="文浩 郭" userId="6ccc17ab3add3069" providerId="LiveId" clId="{A16DFF17-4FF3-4109-A435-57F25017F4B7}" dt="2026-07-10T08:26:09.816" v="678" actId="948"/>
+          <ac:graphicFrameMkLst>
+            <pc:docMk/>
+            <pc:sldMk cId="0" sldId="2147482904"/>
+            <ac:graphicFrameMk id="2" creationId="{3E0355A8-9D93-E87D-80AD-AF4B413A3B53}"/>
+          </ac:graphicFrameMkLst>
+        </pc:graphicFrameChg>
+        <pc:graphicFrameChg chg="del">
+          <ac:chgData name="文浩 郭" userId="6ccc17ab3add3069" providerId="LiveId" clId="{A16DFF17-4FF3-4109-A435-57F25017F4B7}" dt="2026-07-10T08:11:06.005" v="181"/>
+          <ac:graphicFrameMkLst>
+            <pc:docMk/>
+            <pc:sldMk cId="0" sldId="2147482904"/>
+            <ac:graphicFrameMk id="87" creationId="{00000000-0000-0000-0000-000000000000}"/>
+          </ac:graphicFrameMkLst>
+        </pc:graphicFrameChg>
+      </pc:sldChg>
+      <pc:sldChg chg="modSp add mod ord">
+        <pc:chgData name="文浩 郭" userId="6ccc17ab3add3069" providerId="LiveId" clId="{A16DFF17-4FF3-4109-A435-57F25017F4B7}" dt="2026-07-10T08:04:40.105" v="171" actId="20577"/>
+        <pc:sldMkLst>
+          <pc:docMk/>
+          <pc:sldMk cId="2521080309" sldId="2147482906"/>
+        </pc:sldMkLst>
+        <pc:spChg chg="mod">
+          <ac:chgData name="文浩 郭" userId="6ccc17ab3add3069" providerId="LiveId" clId="{A16DFF17-4FF3-4109-A435-57F25017F4B7}" dt="2026-07-10T08:04:40.105" v="171" actId="20577"/>
+          <ac:spMkLst>
+            <pc:docMk/>
+            <pc:sldMk cId="2521080309" sldId="2147482906"/>
+            <ac:spMk id="76" creationId="{00000000-0000-0000-0000-000000000000}"/>
+          </ac:spMkLst>
+        </pc:spChg>
+      </pc:sldChg>
+    </pc:docChg>
+  </pc:docChgLst>
   <pc:docChgLst>
     <pc:chgData name="郭文浩-數位經營部-永豐金證券" userId="274e1ecc-273d-4e1f-a4ac-0f2f0565666d" providerId="ADAL" clId="{40D049B3-D0A6-43DB-8827-ED15BABCAA6A}"/>
     <pc:docChg chg="custSel modSld">
@@ -241,7 +438,7 @@
           <a:p>
             <a:fld id="{602A1B36-CF89-4CE4-A8DF-FD84EF87482D}" type="datetimeFigureOut">
               <a:rPr lang="zh-TW" altLang="en-US" smtClean="0"/>
-              <a:t>2026/7/9</a:t>
+              <a:t>2026/7/10</a:t>
             </a:fld>
             <a:endParaRPr lang="zh-TW" altLang="en-US"/>
           </a:p>
@@ -1831,6 +2028,231 @@
                 <a:defRPr/>
               </a:pPr>
               <a:t>7</a:t>
+            </a:fld>
+            <a:endParaRPr kumimoji="0" sz="1200" b="0" i="0" u="none" strike="noStrike" kern="0" cap="none" spc="0" normalizeH="0" baseline="0" noProof="0">
+              <a:ln>
+                <a:noFill/>
+              </a:ln>
+              <a:solidFill>
+                <a:srgbClr val="000000"/>
+              </a:solidFill>
+              <a:effectLst/>
+              <a:uLnTx/>
+              <a:uFillTx/>
+              <a:latin typeface="Calibri"/>
+              <a:ea typeface="Calibri"/>
+              <a:cs typeface="Calibri"/>
+              <a:sym typeface="Calibri"/>
+            </a:endParaRPr>
+          </a:p>
+        </p:txBody>
+      </p:sp>
+    </p:spTree>
+  </p:cSld>
+  <p:clrMapOvr>
+    <a:masterClrMapping/>
+  </p:clrMapOvr>
+</p:notes>
+</file>
+
+<file path=ppt/notesSlides/notesSlide7.xml><?xml version="1.0" encoding="utf-8"?>
+<p:notes xmlns:a="http://schemas.openxmlformats.org/drawingml/2006/main" xmlns:r="http://schemas.openxmlformats.org/officeDocument/2006/relationships" xmlns:p="http://schemas.openxmlformats.org/presentationml/2006/main" showMasterSp="0" showMasterPhAnim="0">
+  <p:cSld>
+    <p:spTree>
+      <p:nvGrpSpPr>
+        <p:cNvPr id="1" name="Shape 71"/>
+        <p:cNvGrpSpPr/>
+        <p:nvPr/>
+      </p:nvGrpSpPr>
+      <p:grpSpPr>
+        <a:xfrm>
+          <a:off x="0" y="0"/>
+          <a:ext cx="0" cy="0"/>
+          <a:chOff x="0" y="0"/>
+          <a:chExt cx="0" cy="0"/>
+        </a:xfrm>
+      </p:grpSpPr>
+      <p:sp>
+        <p:nvSpPr>
+          <p:cNvPr id="72" name="Google Shape;72;p8:notes"/>
+          <p:cNvSpPr>
+            <a:spLocks noGrp="1" noRot="1" noChangeAspect="1"/>
+          </p:cNvSpPr>
+          <p:nvPr>
+            <p:ph type="sldImg" idx="2"/>
+          </p:nvPr>
+        </p:nvSpPr>
+        <p:spPr>
+          <a:xfrm>
+            <a:off x="422275" y="1241425"/>
+            <a:ext cx="5953125" cy="3349625"/>
+          </a:xfrm>
+          <a:custGeom>
+            <a:avLst/>
+            <a:gdLst/>
+            <a:ahLst/>
+            <a:cxnLst/>
+            <a:rect l="l" t="t" r="r" b="b"/>
+            <a:pathLst>
+              <a:path w="120000" h="120000" extrusionOk="0">
+                <a:moveTo>
+                  <a:pt x="0" y="0"/>
+                </a:moveTo>
+                <a:lnTo>
+                  <a:pt x="120000" y="0"/>
+                </a:lnTo>
+                <a:lnTo>
+                  <a:pt x="120000" y="120000"/>
+                </a:lnTo>
+                <a:lnTo>
+                  <a:pt x="0" y="120000"/>
+                </a:lnTo>
+                <a:close/>
+              </a:path>
+            </a:pathLst>
+          </a:custGeom>
+          <a:noFill/>
+          <a:ln w="12700" cap="flat" cmpd="sng">
+            <a:solidFill>
+              <a:srgbClr val="000000"/>
+            </a:solidFill>
+            <a:prstDash val="solid"/>
+            <a:round/>
+            <a:headEnd type="none" w="sm" len="sm"/>
+            <a:tailEnd type="none" w="sm" len="sm"/>
+          </a:ln>
+        </p:spPr>
+      </p:sp>
+      <p:sp>
+        <p:nvSpPr>
+          <p:cNvPr id="73" name="Google Shape;73;p8:notes"/>
+          <p:cNvSpPr txBox="1">
+            <a:spLocks noGrp="1"/>
+          </p:cNvSpPr>
+          <p:nvPr>
+            <p:ph type="body" idx="1"/>
+          </p:nvPr>
+        </p:nvSpPr>
+        <p:spPr>
+          <a:xfrm>
+            <a:off x="679768" y="4777194"/>
+            <a:ext cx="5438140" cy="3908614"/>
+          </a:xfrm>
+          <a:prstGeom prst="rect">
+            <a:avLst/>
+          </a:prstGeom>
+          <a:noFill/>
+          <a:ln>
+            <a:noFill/>
+          </a:ln>
+        </p:spPr>
+        <p:txBody>
+          <a:bodyPr spcFirstLastPara="1" wrap="square" lIns="91425" tIns="45700" rIns="91425" bIns="45700" anchor="t" anchorCtr="0">
+            <a:noAutofit/>
+          </a:bodyPr>
+          <a:lstStyle/>
+          <a:p>
+            <a:pPr marL="457200" marR="0" lvl="0" indent="-228600" algn="l" rtl="0">
+              <a:lnSpc>
+                <a:spcPct val="100000"/>
+              </a:lnSpc>
+              <a:spcBef>
+                <a:spcPts val="0"/>
+              </a:spcBef>
+              <a:spcAft>
+                <a:spcPts val="0"/>
+              </a:spcAft>
+              <a:buSzPts val="1400"/>
+              <a:buNone/>
+            </a:pPr>
+            <a:endParaRPr/>
+          </a:p>
+        </p:txBody>
+      </p:sp>
+      <p:sp>
+        <p:nvSpPr>
+          <p:cNvPr id="74" name="Google Shape;74;p8:notes"/>
+          <p:cNvSpPr txBox="1">
+            <a:spLocks noGrp="1"/>
+          </p:cNvSpPr>
+          <p:nvPr>
+            <p:ph type="sldNum" idx="12"/>
+          </p:nvPr>
+        </p:nvSpPr>
+        <p:spPr>
+          <a:xfrm>
+            <a:off x="3850443" y="9428584"/>
+            <a:ext cx="2945659" cy="498055"/>
+          </a:xfrm>
+          <a:prstGeom prst="rect">
+            <a:avLst/>
+          </a:prstGeom>
+          <a:noFill/>
+          <a:ln>
+            <a:noFill/>
+          </a:ln>
+        </p:spPr>
+        <p:txBody>
+          <a:bodyPr spcFirstLastPara="1" wrap="square" lIns="91425" tIns="45700" rIns="91425" bIns="45700" anchor="b" anchorCtr="0">
+            <a:noAutofit/>
+          </a:bodyPr>
+          <a:lstStyle/>
+          <a:p>
+            <a:pPr marL="0" marR="0" lvl="0" indent="0" algn="r" defTabSz="914400" rtl="0" eaLnBrk="1" fontAlgn="auto" latinLnBrk="0" hangingPunct="1">
+              <a:lnSpc>
+                <a:spcPct val="100000"/>
+              </a:lnSpc>
+              <a:spcBef>
+                <a:spcPts val="0"/>
+              </a:spcBef>
+              <a:spcAft>
+                <a:spcPts val="0"/>
+              </a:spcAft>
+              <a:buClr>
+                <a:srgbClr val="000000"/>
+              </a:buClr>
+              <a:buSzPts val="1200"/>
+              <a:buFont typeface="Arial"/>
+              <a:buNone/>
+              <a:tabLst/>
+              <a:defRPr/>
+            </a:pPr>
+            <a:fld id="{00000000-1234-1234-1234-123412341234}" type="slidenum">
+              <a:rPr kumimoji="0" lang="en-US" altLang="zh-TW" sz="1200" b="0" i="0" u="none" strike="noStrike" kern="0" cap="none" spc="0" normalizeH="0" baseline="0" noProof="0">
+                <a:ln>
+                  <a:noFill/>
+                </a:ln>
+                <a:solidFill>
+                  <a:srgbClr val="000000"/>
+                </a:solidFill>
+                <a:effectLst/>
+                <a:uLnTx/>
+                <a:uFillTx/>
+                <a:latin typeface="Calibri"/>
+                <a:ea typeface="Calibri"/>
+                <a:cs typeface="Calibri"/>
+                <a:sym typeface="Calibri"/>
+              </a:rPr>
+              <a:pPr marL="0" marR="0" lvl="0" indent="0" algn="r" defTabSz="914400" rtl="0" eaLnBrk="1" fontAlgn="auto" latinLnBrk="0" hangingPunct="1">
+                <a:lnSpc>
+                  <a:spcPct val="100000"/>
+                </a:lnSpc>
+                <a:spcBef>
+                  <a:spcPts val="0"/>
+                </a:spcBef>
+                <a:spcAft>
+                  <a:spcPts val="0"/>
+                </a:spcAft>
+                <a:buClr>
+                  <a:srgbClr val="000000"/>
+                </a:buClr>
+                <a:buSzPts val="1200"/>
+                <a:buFont typeface="Arial"/>
+                <a:buNone/>
+                <a:tabLst/>
+                <a:defRPr/>
+              </a:pPr>
+              <a:t>8</a:t>
             </a:fld>
             <a:endParaRPr kumimoji="0" sz="1200" b="0" i="0" u="none" strike="noStrike" kern="0" cap="none" spc="0" normalizeH="0" baseline="0" noProof="0">
               <a:ln>
@@ -6563,7 +6985,7 @@
                 <a:ea typeface="Microsoft JhengHei"/>
                 <a:cs typeface="+mn-cs"/>
               </a:rPr>
-              <a:t>學員：請填入中文全名</a:t>
+              <a:t>學員：曹家瑜、郭文浩、王瑀軒</a:t>
             </a:r>
           </a:p>
           <a:p>
@@ -6599,7 +7021,7 @@
                 <a:ea typeface="Microsoft JhengHei"/>
                 <a:cs typeface="+mn-cs"/>
               </a:rPr>
-              <a:t>部門：請填入所屬部門全名</a:t>
+              <a:t>部門：數位經營部</a:t>
             </a:r>
           </a:p>
         </p:txBody>
@@ -6836,43 +7258,7 @@
                 <a:cs typeface="Microsoft JhengHei"/>
                 <a:sym typeface="Microsoft JhengHei"/>
               </a:rPr>
-              <a:t>[</a:t>
-            </a:r>
-            <a:r>
-              <a:rPr kumimoji="0" lang="zh-TW" altLang="en-US" sz="1400" b="0" i="0" u="none" strike="noStrike" kern="0" cap="none" spc="0" normalizeH="0" baseline="0" noProof="0">
-                <a:ln>
-                  <a:noFill/>
-                </a:ln>
-                <a:solidFill>
-                  <a:srgbClr val="000000"/>
-                </a:solidFill>
-                <a:effectLst/>
-                <a:uLnTx/>
-                <a:uFillTx/>
-                <a:latin typeface="Microsoft JhengHei"/>
-                <a:ea typeface="Microsoft JhengHei"/>
-                <a:cs typeface="Microsoft JhengHei"/>
-                <a:sym typeface="Microsoft JhengHei"/>
-              </a:rPr>
-              <a:t>請透過一句話，說明這個專題解決的工作問題</a:t>
-            </a:r>
-            <a:r>
-              <a:rPr kumimoji="0" lang="en-US" altLang="zh-TW" sz="1400" b="0" i="0" u="none" strike="noStrike" kern="0" cap="none" spc="0" normalizeH="0" baseline="0" noProof="0">
-                <a:ln>
-                  <a:noFill/>
-                </a:ln>
-                <a:solidFill>
-                  <a:srgbClr val="000000"/>
-                </a:solidFill>
-                <a:effectLst/>
-                <a:uLnTx/>
-                <a:uFillTx/>
-                <a:latin typeface="Microsoft JhengHei"/>
-                <a:ea typeface="Microsoft JhengHei"/>
-                <a:cs typeface="Microsoft JhengHei"/>
-                <a:sym typeface="Microsoft JhengHei"/>
-              </a:rPr>
-              <a:t>]</a:t>
+              <a:t>專案經理每天要橫跨會議、看板、內部數據與 KPI，追「誰該做什麼、做到哪、數字達標了沒」，資訊分散、人工彙整既耗時又容易漏。</a:t>
             </a:r>
             <a:endParaRPr kumimoji="0" sz="1400" b="0" i="0" u="none" strike="noStrike" kern="0" cap="none" spc="0" normalizeH="0" baseline="0" noProof="0">
               <a:ln>
@@ -6891,7 +7277,7 @@
             </a:endParaRPr>
           </a:p>
           <a:p>
-            <a:pPr marL="457200" marR="0" lvl="0" indent="-317500" algn="l" defTabSz="914400" rtl="0" eaLnBrk="1" fontAlgn="auto" latinLnBrk="0" hangingPunct="1">
+            <a:pPr marL="0" marR="0" lvl="0" indent="0" algn="l" defTabSz="914400" rtl="0" eaLnBrk="1" fontAlgn="auto" latinLnBrk="0" hangingPunct="1">
               <a:lnSpc>
                 <a:spcPct val="150000"/>
               </a:lnSpc>
@@ -6905,8 +7291,8 @@
                 <a:srgbClr val="000000"/>
               </a:buClr>
               <a:buSzPts val="1400"/>
-              <a:buFont typeface="Noto Sans TC"/>
-              <a:buAutoNum type="arabicPeriod"/>
+              <a:buFont typeface="Arial"/>
+              <a:buNone/>
               <a:tabLst/>
               <a:defRPr/>
             </a:pPr>
@@ -6926,10 +7312,31 @@
                 <a:cs typeface="Microsoft JhengHei"/>
                 <a:sym typeface="Microsoft JhengHei"/>
               </a:rPr>
-              <a:t>[</a:t>
-            </a:r>
-            <a:r>
-              <a:rPr kumimoji="0" lang="zh-TW" altLang="en-US" sz="1400" b="0" i="0" u="none" strike="noStrike" kern="0" cap="none" spc="0" normalizeH="0" baseline="0" noProof="0">
+              <a:t>• 會議結論散在逐字稿裡，會後整理待辦、派單得從頭看一遍，很花時間</a:t>
+            </a:r>
+          </a:p>
+          <a:p>
+            <a:pPr marL="0" marR="0" lvl="0" indent="0" algn="l" defTabSz="914400" rtl="0" eaLnBrk="1" fontAlgn="auto" latinLnBrk="0" hangingPunct="1">
+              <a:lnSpc>
+                <a:spcPct val="150000"/>
+              </a:lnSpc>
+              <a:spcBef>
+                <a:spcPts val="0"/>
+              </a:spcBef>
+              <a:spcAft>
+                <a:spcPts val="0"/>
+              </a:spcAft>
+              <a:buClr>
+                <a:srgbClr val="000000"/>
+              </a:buClr>
+              <a:buSzPts val="1400"/>
+              <a:buFont typeface="Arial"/>
+              <a:buNone/>
+              <a:tabLst/>
+              <a:defRPr/>
+            </a:pPr>
+            <a:r>
+              <a:rPr kumimoji="0" lang="en-US" altLang="zh-TW" sz="1400" b="0" i="0" u="none" strike="noStrike" kern="0" cap="none" spc="0" normalizeH="0" baseline="0" noProof="0">
                 <a:ln>
                   <a:noFill/>
                 </a:ln>
@@ -6944,8 +7351,29 @@
                 <a:cs typeface="Microsoft JhengHei"/>
                 <a:sym typeface="Microsoft JhengHei"/>
               </a:rPr>
-              <a:t>例如：文件類型多，人工比對耗時</a:t>
-            </a:r>
+              <a:t>• 進度分散在 Planner／Teams，逾期靠人工追、常常漏催，也缺一眼看懂的甘特圖</a:t>
+            </a:r>
+          </a:p>
+          <a:p>
+            <a:pPr marL="0" marR="0" lvl="0" indent="0" algn="l" defTabSz="914400" rtl="0" eaLnBrk="1" fontAlgn="auto" latinLnBrk="0" hangingPunct="1">
+              <a:lnSpc>
+                <a:spcPct val="150000"/>
+              </a:lnSpc>
+              <a:spcBef>
+                <a:spcPts val="0"/>
+              </a:spcBef>
+              <a:spcAft>
+                <a:spcPts val="0"/>
+              </a:spcAft>
+              <a:buClr>
+                <a:srgbClr val="000000"/>
+              </a:buClr>
+              <a:buSzPts val="1400"/>
+              <a:buFont typeface="Arial"/>
+              <a:buNone/>
+              <a:tabLst/>
+              <a:defRPr/>
+            </a:pPr>
             <a:r>
               <a:rPr kumimoji="0" lang="en-US" altLang="zh-TW" sz="1400" b="0" i="0" u="none" strike="noStrike" kern="0" cap="none" spc="0" normalizeH="0" baseline="0" noProof="0">
                 <a:ln>
@@ -6962,26 +7390,11 @@
                 <a:cs typeface="Microsoft JhengHei"/>
                 <a:sym typeface="Microsoft JhengHei"/>
               </a:rPr>
-              <a:t>]</a:t>
-            </a:r>
-            <a:endParaRPr kumimoji="0" sz="1400" b="0" i="0" u="none" strike="noStrike" kern="0" cap="none" spc="0" normalizeH="0" baseline="0" noProof="0">
-              <a:ln>
-                <a:noFill/>
-              </a:ln>
-              <a:solidFill>
-                <a:srgbClr val="000000"/>
-              </a:solidFill>
-              <a:effectLst/>
-              <a:uLnTx/>
-              <a:uFillTx/>
-              <a:latin typeface="Microsoft JhengHei"/>
-              <a:ea typeface="Microsoft JhengHei"/>
-              <a:cs typeface="Microsoft JhengHei"/>
-              <a:sym typeface="Microsoft JhengHei"/>
-            </a:endParaRPr>
+              <a:t>• 成效要自己進 CUBE／神策一頁頁撈數，再人工對 KPI 目標算缺口，慢又容易出錯</a:t>
+            </a:r>
           </a:p>
           <a:p>
-            <a:pPr marL="457200" marR="0" lvl="0" indent="-317500" algn="l" defTabSz="914400" rtl="0" eaLnBrk="1" fontAlgn="auto" latinLnBrk="0" hangingPunct="1">
+            <a:pPr marL="0" marR="0" lvl="0" indent="0" algn="l" defTabSz="914400" rtl="0" eaLnBrk="1" fontAlgn="auto" latinLnBrk="0" hangingPunct="1">
               <a:lnSpc>
                 <a:spcPct val="150000"/>
               </a:lnSpc>
@@ -6995,8 +7408,8 @@
                 <a:srgbClr val="000000"/>
               </a:buClr>
               <a:buSzPts val="1400"/>
-              <a:buFont typeface="Noto Sans TC"/>
-              <a:buAutoNum type="arabicPeriod"/>
+              <a:buFont typeface="Arial"/>
+              <a:buNone/>
               <a:tabLst/>
               <a:defRPr/>
             </a:pPr>
@@ -7016,149 +7429,8 @@
                 <a:cs typeface="Microsoft JhengHei"/>
                 <a:sym typeface="Microsoft JhengHei"/>
               </a:rPr>
-              <a:t>[</a:t>
-            </a:r>
-            <a:r>
-              <a:rPr kumimoji="0" lang="zh-TW" altLang="en-US" sz="1400" b="0" i="0" u="none" strike="noStrike" kern="0" cap="none" spc="0" normalizeH="0" baseline="0" noProof="0">
-                <a:ln>
-                  <a:noFill/>
-                </a:ln>
-                <a:solidFill>
-                  <a:srgbClr val="000000"/>
-                </a:solidFill>
-                <a:effectLst/>
-                <a:uLnTx/>
-                <a:uFillTx/>
-                <a:latin typeface="Microsoft JhengHei"/>
-                <a:ea typeface="Microsoft JhengHei"/>
-                <a:cs typeface="Microsoft JhengHei"/>
-                <a:sym typeface="Microsoft JhengHei"/>
-              </a:rPr>
-              <a:t>例如：不同同仁檢查標準不一致</a:t>
-            </a:r>
-            <a:r>
-              <a:rPr kumimoji="0" lang="en-US" altLang="zh-TW" sz="1400" b="0" i="0" u="none" strike="noStrike" kern="0" cap="none" spc="0" normalizeH="0" baseline="0" noProof="0">
-                <a:ln>
-                  <a:noFill/>
-                </a:ln>
-                <a:solidFill>
-                  <a:srgbClr val="000000"/>
-                </a:solidFill>
-                <a:effectLst/>
-                <a:uLnTx/>
-                <a:uFillTx/>
-                <a:latin typeface="Microsoft JhengHei"/>
-                <a:ea typeface="Microsoft JhengHei"/>
-                <a:cs typeface="Microsoft JhengHei"/>
-                <a:sym typeface="Microsoft JhengHei"/>
-              </a:rPr>
-              <a:t>]</a:t>
-            </a:r>
-            <a:endParaRPr kumimoji="0" sz="1400" b="0" i="0" u="none" strike="noStrike" kern="0" cap="none" spc="0" normalizeH="0" baseline="0" noProof="0">
-              <a:ln>
-                <a:noFill/>
-              </a:ln>
-              <a:solidFill>
-                <a:srgbClr val="000000"/>
-              </a:solidFill>
-              <a:effectLst/>
-              <a:uLnTx/>
-              <a:uFillTx/>
-              <a:latin typeface="Microsoft JhengHei"/>
-              <a:ea typeface="Microsoft JhengHei"/>
-              <a:cs typeface="Microsoft JhengHei"/>
-              <a:sym typeface="Microsoft JhengHei"/>
-            </a:endParaRPr>
-          </a:p>
-          <a:p>
-            <a:pPr marL="457200" marR="0" lvl="0" indent="-317500" algn="l" defTabSz="914400" rtl="0" eaLnBrk="1" fontAlgn="auto" latinLnBrk="0" hangingPunct="1">
-              <a:lnSpc>
-                <a:spcPct val="150000"/>
-              </a:lnSpc>
-              <a:spcBef>
-                <a:spcPts val="0"/>
-              </a:spcBef>
-              <a:spcAft>
-                <a:spcPts val="0"/>
-              </a:spcAft>
-              <a:buClr>
-                <a:srgbClr val="000000"/>
-              </a:buClr>
-              <a:buSzPts val="1400"/>
-              <a:buFont typeface="Noto Sans TC"/>
-              <a:buAutoNum type="arabicPeriod"/>
-              <a:tabLst/>
-              <a:defRPr/>
-            </a:pPr>
-            <a:r>
-              <a:rPr kumimoji="0" lang="en-US" altLang="zh-TW" sz="1400" b="0" i="0" u="none" strike="noStrike" kern="0" cap="none" spc="0" normalizeH="0" baseline="0" noProof="0">
-                <a:ln>
-                  <a:noFill/>
-                </a:ln>
-                <a:solidFill>
-                  <a:srgbClr val="000000"/>
-                </a:solidFill>
-                <a:effectLst/>
-                <a:uLnTx/>
-                <a:uFillTx/>
-                <a:latin typeface="Microsoft JhengHei"/>
-                <a:ea typeface="Microsoft JhengHei"/>
-                <a:cs typeface="Microsoft JhengHei"/>
-                <a:sym typeface="Microsoft JhengHei"/>
-              </a:rPr>
-              <a:t>[</a:t>
-            </a:r>
-            <a:r>
-              <a:rPr kumimoji="0" lang="zh-TW" altLang="en-US" sz="1400" b="0" i="0" u="none" strike="noStrike" kern="0" cap="none" spc="0" normalizeH="0" baseline="0" noProof="0">
-                <a:ln>
-                  <a:noFill/>
-                </a:ln>
-                <a:solidFill>
-                  <a:srgbClr val="000000"/>
-                </a:solidFill>
-                <a:effectLst/>
-                <a:uLnTx/>
-                <a:uFillTx/>
-                <a:latin typeface="Microsoft JhengHei"/>
-                <a:ea typeface="Microsoft JhengHei"/>
-                <a:cs typeface="Microsoft JhengHei"/>
-                <a:sym typeface="Microsoft JhengHei"/>
-              </a:rPr>
-              <a:t>例如：遇到缺件時，後續通知整理需額外花費時間</a:t>
-            </a:r>
-            <a:r>
-              <a:rPr kumimoji="0" lang="en-US" altLang="zh-TW" sz="1400" b="0" i="0" u="none" strike="noStrike" kern="0" cap="none" spc="0" normalizeH="0" baseline="0" noProof="0">
-                <a:ln>
-                  <a:noFill/>
-                </a:ln>
-                <a:solidFill>
-                  <a:srgbClr val="000000"/>
-                </a:solidFill>
-                <a:effectLst/>
-                <a:uLnTx/>
-                <a:uFillTx/>
-                <a:latin typeface="Microsoft JhengHei"/>
-                <a:ea typeface="Microsoft JhengHei"/>
-                <a:cs typeface="Microsoft JhengHei"/>
-                <a:sym typeface="Microsoft JhengHei"/>
-              </a:rPr>
-              <a:t>]</a:t>
-            </a:r>
-            <a:endParaRPr kumimoji="0" sz="1400" b="0" i="0" u="none" strike="noStrike" kern="0" cap="none" spc="0" normalizeH="0" baseline="0" noProof="0">
-              <a:ln>
-                <a:noFill/>
-              </a:ln>
-              <a:solidFill>
-                <a:srgbClr val="000000"/>
-              </a:solidFill>
-              <a:effectLst/>
-              <a:uLnTx/>
-              <a:uFillTx/>
-              <a:latin typeface="Microsoft JhengHei"/>
-              <a:ea typeface="Microsoft JhengHei"/>
-              <a:cs typeface="Microsoft JhengHei"/>
-              <a:sym typeface="Microsoft JhengHei"/>
-            </a:endParaRPr>
+              <a:t>• 催辦與追蹤靠 PM 記憶與人情，標準不一，重要的事說忘就忘</a:t>
+            </a:r>
           </a:p>
         </p:txBody>
       </p:sp>
@@ -7410,13 +7682,11 @@
               <a:defRPr/>
             </a:pPr>
             <a:r>
-              <a:rPr lang="zh-TW" altLang="en-US" sz="1400" b="1" kern="0" dirty="0">
+              <a:rPr sz="1400" b="1">
                 <a:latin typeface="Microsoft JhengHei"/>
                 <a:ea typeface="Microsoft JhengHei"/>
-                <a:cs typeface="Microsoft JhengHei"/>
-                <a:sym typeface="Microsoft JhengHei"/>
-              </a:rPr>
-              <a:t>提升專案經理控管各行動方案與專案成員之執行成效與執行效率。</a:t>
+              </a:rPr>
+              <a:t>核心解法：組一支「AIPM」多 Agent 團隊——會議記錄／時程／數據／KPI 共用 Planner＋SharePoint 資料層協作，PM 只需按確認。</a:t>
             </a:r>
             <a:endParaRPr kumimoji="0" sz="1400" b="1" i="0" u="none" strike="noStrike" kern="0" cap="none" spc="0" normalizeH="0" baseline="0" noProof="0" dirty="0">
               <a:ln>
@@ -7430,6 +7700,34 @@
               <a:cs typeface="Microsoft JhengHei"/>
               <a:sym typeface="Microsoft JhengHei"/>
             </a:endParaRPr>
+          </a:p>
+          <a:p>
+            <a:pPr marL="0" marR="0" lvl="0" indent="0" algn="l" defTabSz="914400" rtl="0" eaLnBrk="1" fontAlgn="auto" latinLnBrk="0" hangingPunct="1">
+              <a:lnSpc>
+                <a:spcPct val="150000"/>
+              </a:lnSpc>
+              <a:spcBef>
+                <a:spcPts val="0"/>
+              </a:spcBef>
+              <a:spcAft>
+                <a:spcPts val="0"/>
+              </a:spcAft>
+              <a:buClr>
+                <a:srgbClr val="000000"/>
+              </a:buClr>
+              <a:buSzPts val="1400"/>
+              <a:buFont typeface="Arial"/>
+              <a:buNone/>
+              <a:tabLst/>
+              <a:defRPr/>
+            </a:pPr>
+            <a:r>
+              <a:rPr sz="1400" b="1">
+                <a:latin typeface="Microsoft JhengHei"/>
+                <a:ea typeface="Microsoft JhengHei"/>
+              </a:rPr>
+              <a:t>目標對象：專案經理與跨部門專案成員；數位經營部約 5 位同性質 PM 可直接沿用同一套 Agent。</a:t>
+            </a:r>
           </a:p>
         </p:txBody>
       </p:sp>
@@ -7616,7 +7914,7 @@
                 <a:spcPts val="0"/>
               </a:spcBef>
               <a:spcAft>
-                <a:spcPts val="0"/>
+                <a:spcPts val="600"/>
               </a:spcAft>
               <a:buClr>
                 <a:srgbClr val="000000"/>
@@ -7628,94 +7926,24 @@
               <a:defRPr/>
             </a:pPr>
             <a:r>
-              <a:rPr kumimoji="0" lang="en-US" altLang="zh-TW" sz="1400" b="0" i="0" u="none" strike="noStrike" kern="0" cap="none" spc="0" normalizeH="0" baseline="0" noProof="0">
-                <a:ln>
-                  <a:noFill/>
-                </a:ln>
-                <a:solidFill>
-                  <a:srgbClr val="000000"/>
-                </a:solidFill>
-                <a:effectLst/>
-                <a:uLnTx/>
-                <a:uFillTx/>
+              <a:rPr sz="1400" b="1">
+                <a:solidFill>
+                  <a:srgbClr val="000000"/>
+                </a:solidFill>
                 <a:latin typeface="Microsoft JhengHei"/>
                 <a:ea typeface="Microsoft JhengHei"/>
-                <a:cs typeface="Microsoft JhengHei"/>
-                <a:sym typeface="Microsoft JhengHei"/>
-              </a:rPr>
-              <a:t>[</a:t>
-            </a:r>
-            <a:r>
-              <a:rPr kumimoji="0" lang="zh-TW" altLang="en-US" sz="1400" b="0" i="0" u="none" strike="noStrike" kern="0" cap="none" spc="0" normalizeH="0" baseline="0" noProof="0">
-                <a:ln>
-                  <a:noFill/>
-                </a:ln>
-                <a:solidFill>
-                  <a:srgbClr val="000000"/>
-                </a:solidFill>
-                <a:effectLst/>
-                <a:uLnTx/>
-                <a:uFillTx/>
+              </a:rPr>
+              <a:t>會議記錄</a:t>
+            </a:r>
+            <a:r>
+              <a:rPr sz="1400" b="0">
+                <a:solidFill>
+                  <a:srgbClr val="000000"/>
+                </a:solidFill>
                 <a:latin typeface="Microsoft JhengHei"/>
                 <a:ea typeface="Microsoft JhengHei"/>
-                <a:cs typeface="Microsoft JhengHei"/>
-                <a:sym typeface="Microsoft JhengHei"/>
-              </a:rPr>
-              <a:t>例如：由 </a:t>
-            </a:r>
-            <a:r>
-              <a:rPr kumimoji="0" lang="en-US" altLang="zh-TW" sz="1400" b="0" i="0" u="none" strike="noStrike" kern="0" cap="none" spc="0" normalizeH="0" baseline="0" noProof="0">
-                <a:ln>
-                  <a:noFill/>
-                </a:ln>
-                <a:solidFill>
-                  <a:srgbClr val="000000"/>
-                </a:solidFill>
-                <a:effectLst/>
-                <a:uLnTx/>
-                <a:uFillTx/>
-                <a:latin typeface="Microsoft JhengHei"/>
-                <a:ea typeface="Microsoft JhengHei"/>
-                <a:cs typeface="Microsoft JhengHei"/>
-                <a:sym typeface="Microsoft JhengHei"/>
-              </a:rPr>
-              <a:t>Copilot </a:t>
-            </a:r>
-            <a:r>
-              <a:rPr kumimoji="0" lang="zh-TW" altLang="en-US" sz="1400" b="0" i="0" u="none" strike="noStrike" kern="0" cap="none" spc="0" normalizeH="0" baseline="0" noProof="0">
-                <a:ln>
-                  <a:noFill/>
-                </a:ln>
-                <a:solidFill>
-                  <a:srgbClr val="000000"/>
-                </a:solidFill>
-                <a:effectLst/>
-                <a:uLnTx/>
-                <a:uFillTx/>
-                <a:latin typeface="Microsoft JhengHei"/>
-                <a:ea typeface="Microsoft JhengHei"/>
-                <a:cs typeface="Microsoft JhengHei"/>
-                <a:sym typeface="Microsoft JhengHei"/>
-              </a:rPr>
-              <a:t>協助比對並整理缺件項目</a:t>
-            </a:r>
-            <a:r>
-              <a:rPr kumimoji="0" lang="en-US" altLang="zh-TW" sz="1400" b="0" i="0" u="none" strike="noStrike" kern="0" cap="none" spc="0" normalizeH="0" baseline="0" noProof="0">
-                <a:ln>
-                  <a:noFill/>
-                </a:ln>
-                <a:solidFill>
-                  <a:srgbClr val="000000"/>
-                </a:solidFill>
-                <a:effectLst/>
-                <a:uLnTx/>
-                <a:uFillTx/>
-                <a:latin typeface="Microsoft JhengHei"/>
-                <a:ea typeface="Microsoft JhengHei"/>
-                <a:cs typeface="Microsoft JhengHei"/>
-                <a:sym typeface="Microsoft JhengHei"/>
-              </a:rPr>
-              <a:t>]</a:t>
+              </a:rPr>
+              <a:t>：抽結論與待辦、標「需確認」</a:t>
             </a:r>
             <a:endParaRPr kumimoji="0" sz="1400" b="0" i="0" u="none" strike="noStrike" kern="0" cap="none" spc="0" normalizeH="0" baseline="0" noProof="0">
               <a:ln>
@@ -7731,6 +7959,129 @@
               <a:cs typeface="Arial"/>
               <a:sym typeface="Arial"/>
             </a:endParaRPr>
+          </a:p>
+          <a:p>
+            <a:pPr marL="0" marR="0" lvl="0" indent="0" algn="l" defTabSz="914400" rtl="0" eaLnBrk="1" fontAlgn="auto" latinLnBrk="0" hangingPunct="1">
+              <a:lnSpc>
+                <a:spcPct val="150000"/>
+              </a:lnSpc>
+              <a:spcBef>
+                <a:spcPts val="0"/>
+              </a:spcBef>
+              <a:spcAft>
+                <a:spcPts val="600"/>
+              </a:spcAft>
+              <a:buClr>
+                <a:srgbClr val="000000"/>
+              </a:buClr>
+              <a:buSzPts val="1400"/>
+              <a:buFont typeface="Arial"/>
+              <a:buNone/>
+              <a:tabLst/>
+              <a:defRPr/>
+            </a:pPr>
+            <a:r>
+              <a:rPr sz="1400" b="1">
+                <a:solidFill>
+                  <a:srgbClr val="000000"/>
+                </a:solidFill>
+                <a:latin typeface="Microsoft JhengHei"/>
+                <a:ea typeface="Microsoft JhengHei"/>
+              </a:rPr>
+              <a:t>時程</a:t>
+            </a:r>
+            <a:r>
+              <a:rPr sz="1400" b="0">
+                <a:solidFill>
+                  <a:srgbClr val="000000"/>
+                </a:solidFill>
+                <a:latin typeface="Microsoft JhengHei"/>
+                <a:ea typeface="Microsoft JhengHei"/>
+              </a:rPr>
+              <a:t>：掃逾期／到期、生成催辦草稿</a:t>
+            </a:r>
+          </a:p>
+          <a:p>
+            <a:pPr marL="0" marR="0" lvl="0" indent="0" algn="l" defTabSz="914400" rtl="0" eaLnBrk="1" fontAlgn="auto" latinLnBrk="0" hangingPunct="1">
+              <a:lnSpc>
+                <a:spcPct val="150000"/>
+              </a:lnSpc>
+              <a:spcBef>
+                <a:spcPts val="0"/>
+              </a:spcBef>
+              <a:spcAft>
+                <a:spcPts val="600"/>
+              </a:spcAft>
+              <a:buClr>
+                <a:srgbClr val="000000"/>
+              </a:buClr>
+              <a:buSzPts val="1400"/>
+              <a:buFont typeface="Arial"/>
+              <a:buNone/>
+              <a:tabLst/>
+              <a:defRPr/>
+            </a:pPr>
+            <a:r>
+              <a:rPr sz="1400" b="1">
+                <a:solidFill>
+                  <a:srgbClr val="000000"/>
+                </a:solidFill>
+                <a:latin typeface="Microsoft JhengHei"/>
+                <a:ea typeface="Microsoft JhengHei"/>
+              </a:rPr>
+              <a:t>數據</a:t>
+            </a:r>
+            <a:r>
+              <a:rPr sz="1400" b="0">
+                <a:solidFill>
+                  <a:srgbClr val="000000"/>
+                </a:solidFill>
+                <a:latin typeface="Microsoft JhengHei"/>
+                <a:ea typeface="Microsoft JhengHei"/>
+              </a:rPr>
+              <a:t>：白名單範本查詢，LLM 只填參數</a:t>
+            </a:r>
+          </a:p>
+          <a:p>
+            <a:pPr marL="0" marR="0" lvl="0" indent="0" algn="l" defTabSz="914400" rtl="0" eaLnBrk="1" fontAlgn="auto" latinLnBrk="0" hangingPunct="1">
+              <a:lnSpc>
+                <a:spcPct val="150000"/>
+              </a:lnSpc>
+              <a:spcBef>
+                <a:spcPts val="0"/>
+              </a:spcBef>
+              <a:spcAft>
+                <a:spcPts val="600"/>
+              </a:spcAft>
+              <a:buClr>
+                <a:srgbClr val="000000"/>
+              </a:buClr>
+              <a:buSzPts val="1400"/>
+              <a:buFont typeface="Arial"/>
+              <a:buNone/>
+              <a:tabLst/>
+              <a:defRPr/>
+            </a:pPr>
+            <a:r>
+              <a:rPr sz="1400" b="1">
+                <a:solidFill>
+                  <a:srgbClr val="000000"/>
+                </a:solidFill>
+                <a:latin typeface="Microsoft JhengHei"/>
+                <a:ea typeface="Microsoft JhengHei"/>
+              </a:rPr>
+              <a:t>KPI</a:t>
+            </a:r>
+            <a:r>
+              <a:rPr sz="1400" b="0">
+                <a:solidFill>
+                  <a:srgbClr val="000000"/>
+                </a:solidFill>
+                <a:latin typeface="Microsoft JhengHei"/>
+                <a:ea typeface="Microsoft JhengHei"/>
+              </a:rPr>
+              <a:t>：Gap 純程式計算並附說明</a:t>
+            </a:r>
           </a:p>
         </p:txBody>
       </p:sp>
@@ -7893,7 +8244,7 @@
         <p:spPr>
           <a:xfrm>
             <a:off x="8059045" y="2835906"/>
-            <a:ext cx="2928245" cy="699102"/>
+            <a:ext cx="2928245" cy="2662227"/>
           </a:xfrm>
           <a:prstGeom prst="rect">
             <a:avLst/>
@@ -7917,7 +8268,7 @@
                 <a:spcPts val="0"/>
               </a:spcBef>
               <a:spcAft>
-                <a:spcPts val="0"/>
+                <a:spcPts val="600"/>
               </a:spcAft>
               <a:buClr>
                 <a:srgbClr val="000000"/>
@@ -7929,58 +8280,24 @@
               <a:defRPr/>
             </a:pPr>
             <a:r>
-              <a:rPr kumimoji="0" lang="en-US" altLang="zh-TW" sz="1400" b="0" i="0" u="none" strike="noStrike" kern="0" cap="none" spc="0" normalizeH="0" baseline="0" noProof="0">
-                <a:ln>
-                  <a:noFill/>
-                </a:ln>
-                <a:solidFill>
-                  <a:srgbClr val="000000"/>
-                </a:solidFill>
-                <a:effectLst/>
-                <a:uLnTx/>
-                <a:uFillTx/>
+              <a:rPr sz="1400" b="1">
+                <a:solidFill>
+                  <a:srgbClr val="000000"/>
+                </a:solidFill>
                 <a:latin typeface="Microsoft JhengHei"/>
                 <a:ea typeface="Microsoft JhengHei"/>
-                <a:cs typeface="Microsoft JhengHei"/>
-                <a:sym typeface="Microsoft JhengHei"/>
-              </a:rPr>
-              <a:t>[</a:t>
-            </a:r>
-            <a:r>
-              <a:rPr kumimoji="0" lang="zh-TW" altLang="en-US" sz="1400" b="0" i="0" u="none" strike="noStrike" kern="0" cap="none" spc="0" normalizeH="0" baseline="0" noProof="0">
-                <a:ln>
-                  <a:noFill/>
-                </a:ln>
-                <a:solidFill>
-                  <a:srgbClr val="000000"/>
-                </a:solidFill>
-                <a:effectLst/>
-                <a:uLnTx/>
-                <a:uFillTx/>
+              </a:rPr>
+              <a:t>會議記錄</a:t>
+            </a:r>
+            <a:r>
+              <a:rPr sz="1400" b="0">
+                <a:solidFill>
+                  <a:srgbClr val="000000"/>
+                </a:solidFill>
                 <a:latin typeface="Microsoft JhengHei"/>
                 <a:ea typeface="Microsoft JhengHei"/>
-                <a:cs typeface="Microsoft JhengHei"/>
-                <a:sym typeface="Microsoft JhengHei"/>
-              </a:rPr>
-              <a:t>例如：目前已完成缺件摘要產出流程</a:t>
-            </a:r>
-            <a:r>
-              <a:rPr kumimoji="0" lang="en-US" altLang="zh-TW" sz="1400" b="0" i="0" u="none" strike="noStrike" kern="0" cap="none" spc="0" normalizeH="0" baseline="0" noProof="0">
-                <a:ln>
-                  <a:noFill/>
-                </a:ln>
-                <a:solidFill>
-                  <a:srgbClr val="000000"/>
-                </a:solidFill>
-                <a:effectLst/>
-                <a:uLnTx/>
-                <a:uFillTx/>
-                <a:latin typeface="Microsoft JhengHei"/>
-                <a:ea typeface="Microsoft JhengHei"/>
-                <a:cs typeface="Microsoft JhengHei"/>
-                <a:sym typeface="Microsoft JhengHei"/>
-              </a:rPr>
-              <a:t>]</a:t>
+              </a:rPr>
+              <a:t>：待辦清單＋PM 確認後一鍵開單</a:t>
             </a:r>
             <a:endParaRPr kumimoji="0" sz="1400" b="0" i="0" u="none" strike="noStrike" kern="0" cap="none" spc="0" normalizeH="0" baseline="0" noProof="0">
               <a:ln>
@@ -7996,6 +8313,159 @@
               <a:cs typeface="Arial"/>
               <a:sym typeface="Arial"/>
             </a:endParaRPr>
+          </a:p>
+          <a:p>
+            <a:pPr marL="0" marR="0" lvl="0" indent="0" algn="l" defTabSz="914400" rtl="0" eaLnBrk="1" fontAlgn="auto" latinLnBrk="0" hangingPunct="1">
+              <a:lnSpc>
+                <a:spcPct val="150000"/>
+              </a:lnSpc>
+              <a:spcBef>
+                <a:spcPts val="0"/>
+              </a:spcBef>
+              <a:spcAft>
+                <a:spcPts val="600"/>
+              </a:spcAft>
+              <a:buClr>
+                <a:srgbClr val="000000"/>
+              </a:buClr>
+              <a:buSzTx/>
+              <a:buFont typeface="Arial"/>
+              <a:buNone/>
+              <a:tabLst/>
+              <a:defRPr/>
+            </a:pPr>
+            <a:r>
+              <a:rPr sz="1400" b="1">
+                <a:solidFill>
+                  <a:srgbClr val="000000"/>
+                </a:solidFill>
+                <a:latin typeface="Microsoft JhengHei"/>
+                <a:ea typeface="Microsoft JhengHei"/>
+              </a:rPr>
+              <a:t>時程</a:t>
+            </a:r>
+            <a:r>
+              <a:rPr sz="1400" b="0">
+                <a:solidFill>
+                  <a:srgbClr val="000000"/>
+                </a:solidFill>
+                <a:latin typeface="Microsoft JhengHei"/>
+                <a:ea typeface="Microsoft JhengHei"/>
+              </a:rPr>
+              <a:t>：</a:t>
+            </a:r>
+            <a:r>
+              <a:rPr lang="en-US" sz="1400" b="0">
+                <a:solidFill>
+                  <a:srgbClr val="000000"/>
+                </a:solidFill>
+                <a:latin typeface="Microsoft JhengHei"/>
+                <a:ea typeface="Microsoft JhengHei"/>
+              </a:rPr>
+              <a:t>Power BI </a:t>
+            </a:r>
+            <a:r>
+              <a:rPr lang="zh-TW" altLang="en-US" sz="1400" b="0">
+                <a:solidFill>
+                  <a:srgbClr val="000000"/>
+                </a:solidFill>
+                <a:latin typeface="Microsoft JhengHei"/>
+                <a:ea typeface="Microsoft JhengHei"/>
+              </a:rPr>
+              <a:t>甘特圖＋催辦草稿</a:t>
+            </a:r>
+            <a:r>
+              <a:rPr sz="1400" b="0">
+                <a:solidFill>
+                  <a:srgbClr val="000000"/>
+                </a:solidFill>
+                <a:latin typeface="Microsoft JhengHei"/>
+                <a:ea typeface="Microsoft JhengHei"/>
+              </a:rPr>
+              <a:t>（核可後發送）</a:t>
+            </a:r>
+          </a:p>
+          <a:p>
+            <a:pPr marL="0" marR="0" lvl="0" indent="0" algn="l" defTabSz="914400" rtl="0" eaLnBrk="1" fontAlgn="auto" latinLnBrk="0" hangingPunct="1">
+              <a:lnSpc>
+                <a:spcPct val="150000"/>
+              </a:lnSpc>
+              <a:spcBef>
+                <a:spcPts val="0"/>
+              </a:spcBef>
+              <a:spcAft>
+                <a:spcPts val="600"/>
+              </a:spcAft>
+              <a:buClr>
+                <a:srgbClr val="000000"/>
+              </a:buClr>
+              <a:buSzTx/>
+              <a:buFont typeface="Arial"/>
+              <a:buNone/>
+              <a:tabLst/>
+              <a:defRPr/>
+            </a:pPr>
+            <a:r>
+              <a:rPr sz="1400" b="1">
+                <a:solidFill>
+                  <a:srgbClr val="000000"/>
+                </a:solidFill>
+                <a:latin typeface="Microsoft JhengHei"/>
+                <a:ea typeface="Microsoft JhengHei"/>
+              </a:rPr>
+              <a:t>數據</a:t>
+            </a:r>
+            <a:r>
+              <a:rPr sz="1400" b="0">
+                <a:solidFill>
+                  <a:srgbClr val="000000"/>
+                </a:solidFill>
+                <a:latin typeface="Microsoft JhengHei"/>
+                <a:ea typeface="Microsoft JhengHei"/>
+              </a:rPr>
+              <a:t>：繁中摘要＋Markdown 表格</a:t>
+            </a:r>
+          </a:p>
+          <a:p>
+            <a:pPr marL="0" marR="0" lvl="0" indent="0" algn="l" defTabSz="914400" rtl="0" eaLnBrk="1" fontAlgn="auto" latinLnBrk="0" hangingPunct="1">
+              <a:lnSpc>
+                <a:spcPct val="150000"/>
+              </a:lnSpc>
+              <a:spcBef>
+                <a:spcPts val="0"/>
+              </a:spcBef>
+              <a:spcAft>
+                <a:spcPts val="600"/>
+              </a:spcAft>
+              <a:buClr>
+                <a:srgbClr val="000000"/>
+              </a:buClr>
+              <a:buSzTx/>
+              <a:buFont typeface="Arial"/>
+              <a:buNone/>
+              <a:tabLst/>
+              <a:defRPr/>
+            </a:pPr>
+            <a:r>
+              <a:rPr sz="1400" b="1">
+                <a:solidFill>
+                  <a:srgbClr val="000000"/>
+                </a:solidFill>
+                <a:latin typeface="Microsoft JhengHei"/>
+                <a:ea typeface="Microsoft JhengHei"/>
+              </a:rPr>
+              <a:t>KPI</a:t>
+            </a:r>
+            <a:r>
+              <a:rPr sz="1400" b="0">
+                <a:solidFill>
+                  <a:srgbClr val="000000"/>
+                </a:solidFill>
+                <a:latin typeface="Microsoft JhengHei"/>
+                <a:ea typeface="Microsoft JhengHei"/>
+              </a:rPr>
+              <a:t>：缺口警示與建議（標「參考」）</a:t>
+            </a:r>
           </a:p>
         </p:txBody>
       </p:sp>
@@ -8182,7 +8652,7 @@
                 <a:spcPts val="0"/>
               </a:spcBef>
               <a:spcAft>
-                <a:spcPts val="0"/>
+                <a:spcPts val="600"/>
               </a:spcAft>
               <a:buClr>
                 <a:srgbClr val="000000"/>
@@ -8194,58 +8664,44 @@
               <a:defRPr/>
             </a:pPr>
             <a:r>
-              <a:rPr kumimoji="0" lang="en-US" altLang="zh-TW" sz="1400" b="0" i="0" u="none" strike="noStrike" kern="0" cap="none" spc="0" normalizeH="0" baseline="0" noProof="0" dirty="0">
-                <a:ln>
-                  <a:noFill/>
-                </a:ln>
-                <a:solidFill>
-                  <a:srgbClr val="000000"/>
-                </a:solidFill>
-                <a:effectLst/>
-                <a:uLnTx/>
-                <a:uFillTx/>
+              <a:rPr sz="1400" b="1" dirty="0" err="1">
+                <a:solidFill>
+                  <a:srgbClr val="000000"/>
+                </a:solidFill>
                 <a:latin typeface="Microsoft JhengHei"/>
                 <a:ea typeface="Microsoft JhengHei"/>
-                <a:cs typeface="Microsoft JhengHei"/>
-                <a:sym typeface="Microsoft JhengHei"/>
-              </a:rPr>
-              <a:t>[</a:t>
-            </a:r>
-            <a:r>
-              <a:rPr kumimoji="0" lang="zh-TW" altLang="en-US" sz="1400" b="0" i="0" u="none" strike="noStrike" kern="0" cap="none" spc="0" normalizeH="0" baseline="0" noProof="0" dirty="0">
-                <a:ln>
-                  <a:noFill/>
-                </a:ln>
-                <a:solidFill>
-                  <a:srgbClr val="000000"/>
-                </a:solidFill>
-                <a:effectLst/>
-                <a:uLnTx/>
-                <a:uFillTx/>
+              </a:rPr>
+              <a:t>會議記錄</a:t>
+            </a:r>
+            <a:r>
+              <a:rPr sz="1400" b="0" dirty="0" err="1">
+                <a:solidFill>
+                  <a:srgbClr val="000000"/>
+                </a:solidFill>
                 <a:latin typeface="Microsoft JhengHei"/>
                 <a:ea typeface="Microsoft JhengHei"/>
-                <a:cs typeface="Microsoft JhengHei"/>
-                <a:sym typeface="Microsoft JhengHei"/>
-              </a:rPr>
-              <a:t>例如：開戶文件清單與應備文件規則</a:t>
-            </a:r>
-            <a:r>
-              <a:rPr kumimoji="0" lang="en-US" altLang="zh-TW" sz="1400" b="0" i="0" u="none" strike="noStrike" kern="0" cap="none" spc="0" normalizeH="0" baseline="0" noProof="0" dirty="0">
-                <a:ln>
-                  <a:noFill/>
-                </a:ln>
-                <a:solidFill>
-                  <a:srgbClr val="000000"/>
-                </a:solidFill>
-                <a:effectLst/>
-                <a:uLnTx/>
-                <a:uFillTx/>
+              </a:rPr>
+              <a:t>：會議逐字稿／Teams</a:t>
+            </a:r>
+            <a:r>
+              <a:rPr sz="1400" b="0" dirty="0">
+                <a:solidFill>
+                  <a:srgbClr val="000000"/>
+                </a:solidFill>
                 <a:latin typeface="Microsoft JhengHei"/>
                 <a:ea typeface="Microsoft JhengHei"/>
-                <a:cs typeface="Microsoft JhengHei"/>
-                <a:sym typeface="Microsoft JhengHei"/>
-              </a:rPr>
-              <a:t>]</a:t>
+              </a:rPr>
+              <a:t> </a:t>
+            </a:r>
+            <a:r>
+              <a:rPr sz="1400" b="0" dirty="0" err="1">
+                <a:solidFill>
+                  <a:srgbClr val="000000"/>
+                </a:solidFill>
+                <a:latin typeface="Microsoft JhengHei"/>
+                <a:ea typeface="Microsoft JhengHei"/>
+              </a:rPr>
+              <a:t>會議記錄</a:t>
             </a:r>
             <a:endParaRPr kumimoji="0" sz="1400" b="0" i="0" u="none" strike="noStrike" kern="0" cap="none" spc="0" normalizeH="0" baseline="0" noProof="0" dirty="0">
               <a:ln>
@@ -8261,6 +8717,186 @@
               <a:cs typeface="Arial"/>
               <a:sym typeface="Arial"/>
             </a:endParaRPr>
+          </a:p>
+          <a:p>
+            <a:pPr marL="0" marR="0" lvl="0" indent="0" algn="l" defTabSz="914400" rtl="0" eaLnBrk="1" fontAlgn="auto" latinLnBrk="0" hangingPunct="1">
+              <a:lnSpc>
+                <a:spcPct val="150000"/>
+              </a:lnSpc>
+              <a:spcBef>
+                <a:spcPts val="0"/>
+              </a:spcBef>
+              <a:spcAft>
+                <a:spcPts val="600"/>
+              </a:spcAft>
+              <a:buClr>
+                <a:srgbClr val="000000"/>
+              </a:buClr>
+              <a:buSzTx/>
+              <a:buFont typeface="Arial"/>
+              <a:buNone/>
+              <a:tabLst/>
+              <a:defRPr/>
+            </a:pPr>
+            <a:r>
+              <a:rPr sz="1400" b="1" dirty="0" err="1">
+                <a:solidFill>
+                  <a:srgbClr val="000000"/>
+                </a:solidFill>
+                <a:latin typeface="Microsoft JhengHei"/>
+                <a:ea typeface="Microsoft JhengHei"/>
+              </a:rPr>
+              <a:t>時程</a:t>
+            </a:r>
+            <a:r>
+              <a:rPr sz="1400" b="0" dirty="0" err="1">
+                <a:solidFill>
+                  <a:srgbClr val="000000"/>
+                </a:solidFill>
+                <a:latin typeface="Microsoft JhengHei"/>
+                <a:ea typeface="Microsoft JhengHei"/>
+              </a:rPr>
+              <a:t>：Planner</a:t>
+            </a:r>
+            <a:r>
+              <a:rPr sz="1400" b="0" dirty="0">
+                <a:solidFill>
+                  <a:srgbClr val="000000"/>
+                </a:solidFill>
+                <a:latin typeface="Microsoft JhengHei"/>
+                <a:ea typeface="Microsoft JhengHei"/>
+              </a:rPr>
+              <a:t> </a:t>
+            </a:r>
+            <a:r>
+              <a:rPr sz="1400" b="0" dirty="0" err="1">
+                <a:solidFill>
+                  <a:srgbClr val="000000"/>
+                </a:solidFill>
+                <a:latin typeface="Microsoft JhengHei"/>
+                <a:ea typeface="Microsoft JhengHei"/>
+              </a:rPr>
+              <a:t>任務看板</a:t>
+            </a:r>
+            <a:endParaRPr sz="1400" b="0" dirty="0">
+              <a:solidFill>
+                <a:srgbClr val="000000"/>
+              </a:solidFill>
+              <a:latin typeface="Microsoft JhengHei"/>
+              <a:ea typeface="Microsoft JhengHei"/>
+            </a:endParaRPr>
+          </a:p>
+          <a:p>
+            <a:pPr marL="0" marR="0" lvl="0" indent="0" algn="l" defTabSz="914400" rtl="0" eaLnBrk="1" fontAlgn="auto" latinLnBrk="0" hangingPunct="1">
+              <a:lnSpc>
+                <a:spcPct val="150000"/>
+              </a:lnSpc>
+              <a:spcBef>
+                <a:spcPts val="0"/>
+              </a:spcBef>
+              <a:spcAft>
+                <a:spcPts val="600"/>
+              </a:spcAft>
+              <a:buClr>
+                <a:srgbClr val="000000"/>
+              </a:buClr>
+              <a:buSzTx/>
+              <a:buFont typeface="Arial"/>
+              <a:buNone/>
+              <a:tabLst/>
+              <a:defRPr/>
+            </a:pPr>
+            <a:r>
+              <a:rPr sz="1400" b="1" dirty="0" err="1">
+                <a:solidFill>
+                  <a:srgbClr val="000000"/>
+                </a:solidFill>
+                <a:latin typeface="Microsoft JhengHei"/>
+                <a:ea typeface="Microsoft JhengHei"/>
+              </a:rPr>
+              <a:t>數據</a:t>
+            </a:r>
+            <a:r>
+              <a:rPr sz="1400" b="0" dirty="0" err="1">
+                <a:solidFill>
+                  <a:srgbClr val="000000"/>
+                </a:solidFill>
+                <a:latin typeface="Microsoft JhengHei"/>
+                <a:ea typeface="Microsoft JhengHei"/>
+              </a:rPr>
+              <a:t>：CUBE／神策內部數據（Phase</a:t>
+            </a:r>
+            <a:r>
+              <a:rPr sz="1400" b="0" dirty="0">
+                <a:solidFill>
+                  <a:srgbClr val="000000"/>
+                </a:solidFill>
+                <a:latin typeface="Microsoft JhengHei"/>
+                <a:ea typeface="Microsoft JhengHei"/>
+              </a:rPr>
+              <a:t> 2）</a:t>
+            </a:r>
+          </a:p>
+          <a:p>
+            <a:pPr marL="0" marR="0" lvl="0" indent="0" algn="l" defTabSz="914400" rtl="0" eaLnBrk="1" fontAlgn="auto" latinLnBrk="0" hangingPunct="1">
+              <a:lnSpc>
+                <a:spcPct val="150000"/>
+              </a:lnSpc>
+              <a:spcBef>
+                <a:spcPts val="0"/>
+              </a:spcBef>
+              <a:spcAft>
+                <a:spcPts val="600"/>
+              </a:spcAft>
+              <a:buClr>
+                <a:srgbClr val="000000"/>
+              </a:buClr>
+              <a:buSzTx/>
+              <a:buFont typeface="Arial"/>
+              <a:buNone/>
+              <a:tabLst/>
+              <a:defRPr/>
+            </a:pPr>
+            <a:r>
+              <a:rPr sz="1400" b="1" dirty="0">
+                <a:solidFill>
+                  <a:srgbClr val="000000"/>
+                </a:solidFill>
+                <a:latin typeface="Microsoft JhengHei"/>
+                <a:ea typeface="Microsoft JhengHei"/>
+              </a:rPr>
+              <a:t>KPI</a:t>
+            </a:r>
+            <a:r>
+              <a:rPr sz="1400" b="0" dirty="0">
+                <a:solidFill>
+                  <a:srgbClr val="000000"/>
+                </a:solidFill>
+                <a:latin typeface="Microsoft JhengHei"/>
+                <a:ea typeface="Microsoft JhengHei"/>
+              </a:rPr>
+              <a:t>：KPI </a:t>
+            </a:r>
+            <a:r>
+              <a:rPr sz="1400" b="0" dirty="0" err="1">
+                <a:solidFill>
+                  <a:srgbClr val="000000"/>
+                </a:solidFill>
+                <a:latin typeface="Microsoft JhengHei"/>
+                <a:ea typeface="Microsoft JhengHei"/>
+              </a:rPr>
+              <a:t>目標（SharePoint</a:t>
+            </a:r>
+            <a:r>
+              <a:rPr sz="1400" b="0" dirty="0">
+                <a:solidFill>
+                  <a:srgbClr val="000000"/>
+                </a:solidFill>
+                <a:latin typeface="Microsoft JhengHei"/>
+                <a:ea typeface="Microsoft JhengHei"/>
+              </a:rPr>
+              <a:t> Excel）</a:t>
+            </a:r>
           </a:p>
         </p:txBody>
       </p:sp>
@@ -8303,6 +8939,63 @@
       </p:grpSpPr>
       <p:sp>
         <p:nvSpPr>
+          <p:cNvPr id="8" name="矩形: 圓角 7">
+            <a:extLst>
+              <a:ext uri="{FF2B5EF4-FFF2-40B4-BE49-F238E27FC236}">
+                <a16:creationId xmlns:a16="http://schemas.microsoft.com/office/drawing/2014/main" id="{03584C9E-544C-1A9D-E66E-1496712C5394}"/>
+              </a:ext>
+            </a:extLst>
+          </p:cNvPr>
+          <p:cNvSpPr/>
+          <p:nvPr/>
+        </p:nvSpPr>
+        <p:spPr>
+          <a:xfrm>
+            <a:off x="332096" y="2643116"/>
+            <a:ext cx="6335404" cy="2456597"/>
+          </a:xfrm>
+          <a:prstGeom prst="roundRect">
+            <a:avLst>
+              <a:gd name="adj" fmla="val 9445"/>
+            </a:avLst>
+          </a:prstGeom>
+          <a:solidFill>
+            <a:schemeClr val="accent1">
+              <a:lumMod val="20000"/>
+              <a:lumOff val="80000"/>
+            </a:schemeClr>
+          </a:solidFill>
+          <a:ln>
+            <a:noFill/>
+          </a:ln>
+        </p:spPr>
+        <p:style>
+          <a:lnRef idx="2">
+            <a:schemeClr val="accent1">
+              <a:shade val="15000"/>
+            </a:schemeClr>
+          </a:lnRef>
+          <a:fillRef idx="1">
+            <a:schemeClr val="accent1"/>
+          </a:fillRef>
+          <a:effectRef idx="0">
+            <a:schemeClr val="accent1"/>
+          </a:effectRef>
+          <a:fontRef idx="minor">
+            <a:schemeClr val="lt1"/>
+          </a:fontRef>
+        </p:style>
+        <p:txBody>
+          <a:bodyPr rtlCol="0" anchor="ctr"/>
+          <a:lstStyle/>
+          <a:p>
+            <a:pPr algn="ctr"/>
+            <a:endParaRPr lang="zh-TW" altLang="en-US"/>
+          </a:p>
+        </p:txBody>
+      </p:sp>
+      <p:sp>
+        <p:nvSpPr>
           <p:cNvPr id="69" name="Google Shape;69;p7"/>
           <p:cNvSpPr txBox="1">
             <a:spLocks noGrp="1"/>
@@ -8446,6 +9139,1162 @@
               <a:cs typeface="Arial"/>
               <a:sym typeface="Arial"/>
             </a:endParaRPr>
+          </a:p>
+        </p:txBody>
+      </p:sp>
+      <p:sp>
+        <p:nvSpPr>
+          <p:cNvPr id="6" name="文字方塊 5">
+            <a:extLst>
+              <a:ext uri="{FF2B5EF4-FFF2-40B4-BE49-F238E27FC236}">
+                <a16:creationId xmlns:a16="http://schemas.microsoft.com/office/drawing/2014/main" id="{DE799AA1-389D-9CF3-1660-129B50C70817}"/>
+              </a:ext>
+            </a:extLst>
+          </p:cNvPr>
+          <p:cNvSpPr txBox="1"/>
+          <p:nvPr/>
+        </p:nvSpPr>
+        <p:spPr>
+          <a:xfrm>
+            <a:off x="368300" y="1524000"/>
+            <a:ext cx="6299200" cy="369332"/>
+          </a:xfrm>
+          <a:prstGeom prst="rect">
+            <a:avLst/>
+          </a:prstGeom>
+          <a:noFill/>
+        </p:spPr>
+        <p:txBody>
+          <a:bodyPr vert="horz" wrap="square" lIns="50800" tIns="25400" rIns="50800" bIns="25400" rtlCol="0" anchor="t">
+            <a:noAutofit/>
+          </a:bodyPr>
+          <a:lstStyle/>
+          <a:p>
+            <a:pPr>
+              <a:lnSpc>
+                <a:spcPct val="128000"/>
+              </a:lnSpc>
+              <a:spcBef>
+                <a:spcPts val="400"/>
+              </a:spcBef>
+            </a:pPr>
+            <a:r>
+              <a:rPr lang="zh-TW" altLang="en-US" sz="1400" b="1" dirty="0">
+                <a:solidFill>
+                  <a:srgbClr val="000000"/>
+                </a:solidFill>
+                <a:latin typeface="Microsoft YaHei" panose="020B0503020204020204" pitchFamily="34" charset="-122"/>
+                <a:ea typeface="Microsoft YaHei" panose="020B0503020204020204" pitchFamily="34" charset="-122"/>
+              </a:rPr>
+              <a:t>▌ </a:t>
+            </a:r>
+            <a:r>
+              <a:rPr lang="en-US" altLang="zh-TW" sz="1400" b="1" dirty="0">
+                <a:solidFill>
+                  <a:srgbClr val="000000"/>
+                </a:solidFill>
+                <a:latin typeface="Microsoft YaHei" panose="020B0503020204020204" pitchFamily="34" charset="-122"/>
+                <a:ea typeface="Microsoft YaHei" panose="020B0503020204020204" pitchFamily="34" charset="-122"/>
+              </a:rPr>
+              <a:t>1.</a:t>
+            </a:r>
+            <a:r>
+              <a:rPr lang="zh-TW" altLang="en-US" sz="1400" b="1" dirty="0">
+                <a:solidFill>
+                  <a:srgbClr val="000000"/>
+                </a:solidFill>
+                <a:latin typeface="Microsoft YaHei" panose="020B0503020204020204" pitchFamily="34" charset="-122"/>
+                <a:ea typeface="Microsoft YaHei" panose="020B0503020204020204" pitchFamily="34" charset="-122"/>
+              </a:rPr>
+              <a:t> 架構組成</a:t>
+            </a:r>
+          </a:p>
+          <a:p>
+            <a:pPr>
+              <a:lnSpc>
+                <a:spcPct val="128000"/>
+              </a:lnSpc>
+              <a:spcBef>
+                <a:spcPts val="400"/>
+              </a:spcBef>
+            </a:pPr>
+            <a:r>
+              <a:rPr lang="en-US" altLang="zh-TW" sz="1400" dirty="0">
+                <a:solidFill>
+                  <a:srgbClr val="000000"/>
+                </a:solidFill>
+                <a:latin typeface="Microsoft JhengHei" panose="020B0604030504040204" pitchFamily="34" charset="-120"/>
+                <a:ea typeface="Microsoft JhengHei" panose="020B0604030504040204" pitchFamily="34" charset="-120"/>
+              </a:rPr>
+              <a:t>AIPM </a:t>
+            </a:r>
+            <a:r>
+              <a:rPr lang="zh-TW" altLang="en-US" sz="1400" dirty="0">
+                <a:solidFill>
+                  <a:srgbClr val="000000"/>
+                </a:solidFill>
+                <a:latin typeface="Microsoft JhengHei" panose="020B0604030504040204" pitchFamily="34" charset="-120"/>
+                <a:ea typeface="Microsoft JhengHei" panose="020B0604030504040204" pitchFamily="34" charset="-120"/>
+              </a:rPr>
+              <a:t>建在 </a:t>
+            </a:r>
+            <a:r>
+              <a:rPr lang="en-US" altLang="zh-TW" sz="1400" dirty="0">
+                <a:solidFill>
+                  <a:srgbClr val="000000"/>
+                </a:solidFill>
+                <a:latin typeface="Microsoft JhengHei" panose="020B0604030504040204" pitchFamily="34" charset="-120"/>
+                <a:ea typeface="Microsoft JhengHei" panose="020B0604030504040204" pitchFamily="34" charset="-120"/>
+              </a:rPr>
+              <a:t>Microsoft Copilot Studio</a:t>
+            </a:r>
+            <a:r>
+              <a:rPr lang="zh-TW" altLang="en-US" sz="1400" dirty="0">
+                <a:solidFill>
+                  <a:srgbClr val="000000"/>
+                </a:solidFill>
+                <a:latin typeface="Microsoft JhengHei" panose="020B0604030504040204" pitchFamily="34" charset="-120"/>
+                <a:ea typeface="Microsoft JhengHei" panose="020B0604030504040204" pitchFamily="34" charset="-120"/>
+              </a:rPr>
+              <a:t>（</a:t>
+            </a:r>
+            <a:r>
+              <a:rPr lang="en-US" altLang="zh-TW" sz="1400" dirty="0">
+                <a:solidFill>
+                  <a:srgbClr val="000000"/>
+                </a:solidFill>
+                <a:latin typeface="Microsoft JhengHei" panose="020B0604030504040204" pitchFamily="34" charset="-120"/>
+                <a:ea typeface="Microsoft JhengHei" panose="020B0604030504040204" pitchFamily="34" charset="-120"/>
+              </a:rPr>
+              <a:t>Azure OpenAI</a:t>
+            </a:r>
+            <a:r>
+              <a:rPr lang="zh-TW" altLang="en-US" sz="1400" dirty="0">
+                <a:solidFill>
+                  <a:srgbClr val="000000"/>
+                </a:solidFill>
+                <a:latin typeface="Microsoft JhengHei" panose="020B0604030504040204" pitchFamily="34" charset="-120"/>
+                <a:ea typeface="Microsoft JhengHei" panose="020B0604030504040204" pitchFamily="34" charset="-120"/>
+              </a:rPr>
+              <a:t>）；主 </a:t>
+            </a:r>
+            <a:r>
+              <a:rPr lang="en-US" altLang="zh-TW" sz="1400" dirty="0">
+                <a:solidFill>
+                  <a:srgbClr val="000000"/>
+                </a:solidFill>
+                <a:latin typeface="Microsoft JhengHei" panose="020B0604030504040204" pitchFamily="34" charset="-120"/>
+                <a:ea typeface="Microsoft JhengHei" panose="020B0604030504040204" pitchFamily="34" charset="-120"/>
+              </a:rPr>
+              <a:t>Agent </a:t>
+            </a:r>
+            <a:r>
+              <a:rPr lang="zh-TW" altLang="en-US" sz="1400" dirty="0">
+                <a:solidFill>
+                  <a:srgbClr val="000000"/>
+                </a:solidFill>
+                <a:latin typeface="Microsoft JhengHei" panose="020B0604030504040204" pitchFamily="34" charset="-120"/>
+                <a:ea typeface="Microsoft JhengHei" panose="020B0604030504040204" pitchFamily="34" charset="-120"/>
+              </a:rPr>
+              <a:t>依意圖分流給四個子 </a:t>
+            </a:r>
+            <a:r>
+              <a:rPr lang="en-US" altLang="zh-TW" sz="1400" dirty="0">
+                <a:solidFill>
+                  <a:srgbClr val="000000"/>
+                </a:solidFill>
+                <a:latin typeface="Microsoft JhengHei" panose="020B0604030504040204" pitchFamily="34" charset="-120"/>
+                <a:ea typeface="Microsoft JhengHei" panose="020B0604030504040204" pitchFamily="34" charset="-120"/>
+              </a:rPr>
+              <a:t>Agent</a:t>
+            </a:r>
+            <a:r>
+              <a:rPr lang="zh-TW" altLang="en-US" sz="1400" dirty="0">
+                <a:solidFill>
+                  <a:srgbClr val="000000"/>
+                </a:solidFill>
+                <a:latin typeface="Microsoft JhengHei" panose="020B0604030504040204" pitchFamily="34" charset="-120"/>
+                <a:ea typeface="Microsoft JhengHei" panose="020B0604030504040204" pitchFamily="34" charset="-120"/>
+              </a:rPr>
+              <a:t>，經 </a:t>
+            </a:r>
+            <a:r>
+              <a:rPr lang="en-US" altLang="zh-TW" sz="1400" dirty="0">
+                <a:solidFill>
+                  <a:srgbClr val="000000"/>
+                </a:solidFill>
+                <a:latin typeface="Microsoft JhengHei" panose="020B0604030504040204" pitchFamily="34" charset="-120"/>
+                <a:ea typeface="Microsoft JhengHei" panose="020B0604030504040204" pitchFamily="34" charset="-120"/>
+              </a:rPr>
+              <a:t>Power Automate </a:t>
+            </a:r>
+            <a:r>
+              <a:rPr lang="zh-TW" altLang="en-US" sz="1400" dirty="0">
+                <a:solidFill>
+                  <a:srgbClr val="000000"/>
+                </a:solidFill>
+                <a:latin typeface="Microsoft JhengHei" panose="020B0604030504040204" pitchFamily="34" charset="-120"/>
+                <a:ea typeface="Microsoft JhengHei" panose="020B0604030504040204" pitchFamily="34" charset="-120"/>
+              </a:rPr>
+              <a:t>串接 </a:t>
+            </a:r>
+            <a:r>
+              <a:rPr lang="en-US" altLang="zh-TW" sz="1400" dirty="0">
+                <a:solidFill>
+                  <a:srgbClr val="000000"/>
+                </a:solidFill>
+                <a:latin typeface="Microsoft JhengHei" panose="020B0604030504040204" pitchFamily="34" charset="-120"/>
+                <a:ea typeface="Microsoft JhengHei" panose="020B0604030504040204" pitchFamily="34" charset="-120"/>
+              </a:rPr>
+              <a:t>Planner</a:t>
+            </a:r>
+            <a:r>
+              <a:rPr lang="zh-TW" altLang="en-US" sz="1400" dirty="0">
+                <a:solidFill>
+                  <a:srgbClr val="000000"/>
+                </a:solidFill>
+                <a:latin typeface="Microsoft JhengHei" panose="020B0604030504040204" pitchFamily="34" charset="-120"/>
+                <a:ea typeface="Microsoft JhengHei" panose="020B0604030504040204" pitchFamily="34" charset="-120"/>
+              </a:rPr>
+              <a:t>／</a:t>
+            </a:r>
+            <a:r>
+              <a:rPr lang="en-US" altLang="zh-TW" sz="1400" dirty="0">
+                <a:solidFill>
+                  <a:srgbClr val="000000"/>
+                </a:solidFill>
+                <a:latin typeface="Microsoft JhengHei" panose="020B0604030504040204" pitchFamily="34" charset="-120"/>
+                <a:ea typeface="Microsoft JhengHei" panose="020B0604030504040204" pitchFamily="34" charset="-120"/>
+              </a:rPr>
+              <a:t>Teams</a:t>
+            </a:r>
+            <a:r>
+              <a:rPr lang="zh-TW" altLang="en-US" sz="1400" dirty="0">
+                <a:solidFill>
+                  <a:srgbClr val="000000"/>
+                </a:solidFill>
+                <a:latin typeface="Microsoft JhengHei" panose="020B0604030504040204" pitchFamily="34" charset="-120"/>
+                <a:ea typeface="Microsoft JhengHei" panose="020B0604030504040204" pitchFamily="34" charset="-120"/>
+              </a:rPr>
+              <a:t>／</a:t>
+            </a:r>
+            <a:r>
+              <a:rPr lang="en-US" altLang="zh-TW" sz="1400" dirty="0">
+                <a:solidFill>
+                  <a:srgbClr val="000000"/>
+                </a:solidFill>
+                <a:latin typeface="Microsoft JhengHei" panose="020B0604030504040204" pitchFamily="34" charset="-120"/>
+                <a:ea typeface="Microsoft JhengHei" panose="020B0604030504040204" pitchFamily="34" charset="-120"/>
+              </a:rPr>
+              <a:t>SharePoint</a:t>
+            </a:r>
+            <a:r>
+              <a:rPr lang="zh-TW" altLang="en-US" sz="1400" dirty="0">
+                <a:solidFill>
+                  <a:srgbClr val="000000"/>
+                </a:solidFill>
+                <a:latin typeface="Microsoft JhengHei" panose="020B0604030504040204" pitchFamily="34" charset="-120"/>
+                <a:ea typeface="Microsoft JhengHei" panose="020B0604030504040204" pitchFamily="34" charset="-120"/>
+              </a:rPr>
+              <a:t>。</a:t>
+            </a:r>
+          </a:p>
+          <a:p>
+            <a:pPr>
+              <a:lnSpc>
+                <a:spcPct val="128000"/>
+              </a:lnSpc>
+            </a:pPr>
+            <a:endParaRPr lang="zh-TW" altLang="en-US" sz="600" dirty="0">
+              <a:solidFill>
+                <a:srgbClr val="000000"/>
+              </a:solidFill>
+              <a:latin typeface="Microsoft JhengHei" panose="020B0604030504040204" pitchFamily="34" charset="-120"/>
+              <a:ea typeface="Microsoft JhengHei" panose="020B0604030504040204" pitchFamily="34" charset="-120"/>
+            </a:endParaRPr>
+          </a:p>
+          <a:p>
+            <a:pPr>
+              <a:lnSpc>
+                <a:spcPct val="128000"/>
+              </a:lnSpc>
+              <a:spcBef>
+                <a:spcPts val="1600"/>
+              </a:spcBef>
+            </a:pPr>
+            <a:r>
+              <a:rPr lang="zh-TW" altLang="en-US" sz="1400" b="1" dirty="0">
+                <a:solidFill>
+                  <a:srgbClr val="000000"/>
+                </a:solidFill>
+                <a:latin typeface="Microsoft JhengHei" panose="020B0604030504040204" pitchFamily="34" charset="-120"/>
+                <a:ea typeface="Microsoft JhengHei" panose="020B0604030504040204" pitchFamily="34" charset="-120"/>
+              </a:rPr>
+              <a:t>主 </a:t>
+            </a:r>
+            <a:r>
+              <a:rPr lang="en-US" altLang="zh-TW" sz="1400" b="1" dirty="0">
+                <a:solidFill>
+                  <a:srgbClr val="000000"/>
+                </a:solidFill>
+                <a:latin typeface="Microsoft JhengHei" panose="020B0604030504040204" pitchFamily="34" charset="-120"/>
+                <a:ea typeface="Microsoft JhengHei" panose="020B0604030504040204" pitchFamily="34" charset="-120"/>
+              </a:rPr>
+              <a:t>Agent</a:t>
+            </a:r>
+            <a:r>
+              <a:rPr lang="zh-TW" altLang="en-US" sz="1400" dirty="0">
+                <a:solidFill>
+                  <a:srgbClr val="000000"/>
+                </a:solidFill>
+                <a:latin typeface="Microsoft JhengHei" panose="020B0604030504040204" pitchFamily="34" charset="-120"/>
+                <a:ea typeface="Microsoft JhengHei" panose="020B0604030504040204" pitchFamily="34" charset="-120"/>
+              </a:rPr>
+              <a:t>｜判斷 </a:t>
+            </a:r>
+            <a:r>
+              <a:rPr lang="en-US" altLang="zh-TW" sz="1400" dirty="0">
+                <a:solidFill>
+                  <a:srgbClr val="000000"/>
+                </a:solidFill>
+                <a:latin typeface="Microsoft JhengHei" panose="020B0604030504040204" pitchFamily="34" charset="-120"/>
+                <a:ea typeface="Microsoft JhengHei" panose="020B0604030504040204" pitchFamily="34" charset="-120"/>
+              </a:rPr>
+              <a:t>PM </a:t>
+            </a:r>
+            <a:r>
+              <a:rPr lang="zh-TW" altLang="en-US" sz="1400" dirty="0">
+                <a:solidFill>
+                  <a:srgbClr val="000000"/>
+                </a:solidFill>
+                <a:latin typeface="Microsoft JhengHei" panose="020B0604030504040204" pitchFamily="34" charset="-120"/>
+                <a:ea typeface="Microsoft JhengHei" panose="020B0604030504040204" pitchFamily="34" charset="-120"/>
+              </a:rPr>
+              <a:t>需求、意圖分流（</a:t>
+            </a:r>
+            <a:r>
+              <a:rPr lang="en-US" altLang="zh-TW" sz="1400" dirty="0">
+                <a:solidFill>
+                  <a:srgbClr val="000000"/>
+                </a:solidFill>
+                <a:latin typeface="Microsoft JhengHei" panose="020B0604030504040204" pitchFamily="34" charset="-120"/>
+                <a:ea typeface="Microsoft JhengHei" panose="020B0604030504040204" pitchFamily="34" charset="-120"/>
+              </a:rPr>
+              <a:t>connected agents</a:t>
+            </a:r>
+            <a:r>
+              <a:rPr lang="zh-TW" altLang="en-US" sz="1400" dirty="0">
+                <a:solidFill>
+                  <a:srgbClr val="000000"/>
+                </a:solidFill>
+                <a:latin typeface="Microsoft JhengHei" panose="020B0604030504040204" pitchFamily="34" charset="-120"/>
+                <a:ea typeface="Microsoft JhengHei" panose="020B0604030504040204" pitchFamily="34" charset="-120"/>
+              </a:rPr>
+              <a:t>）</a:t>
+            </a:r>
+          </a:p>
+          <a:p>
+            <a:pPr>
+              <a:lnSpc>
+                <a:spcPct val="128000"/>
+              </a:lnSpc>
+              <a:spcBef>
+                <a:spcPts val="1600"/>
+              </a:spcBef>
+            </a:pPr>
+            <a:r>
+              <a:rPr lang="zh-TW" altLang="en-US" sz="1400" b="1" dirty="0">
+                <a:solidFill>
+                  <a:srgbClr val="000000"/>
+                </a:solidFill>
+                <a:latin typeface="Microsoft JhengHei" panose="020B0604030504040204" pitchFamily="34" charset="-120"/>
+                <a:ea typeface="Microsoft JhengHei" panose="020B0604030504040204" pitchFamily="34" charset="-120"/>
+              </a:rPr>
+              <a:t>會議記錄</a:t>
+            </a:r>
+            <a:r>
+              <a:rPr lang="zh-TW" altLang="en-US" sz="1400" dirty="0">
+                <a:solidFill>
+                  <a:srgbClr val="000000"/>
+                </a:solidFill>
+                <a:latin typeface="Microsoft JhengHei" panose="020B0604030504040204" pitchFamily="34" charset="-120"/>
+                <a:ea typeface="Microsoft JhengHei" panose="020B0604030504040204" pitchFamily="34" charset="-120"/>
+              </a:rPr>
+              <a:t>｜逐字稿 → 結論＋待辦 → </a:t>
+            </a:r>
+            <a:r>
+              <a:rPr lang="en-US" altLang="zh-TW" sz="1400" dirty="0">
+                <a:solidFill>
+                  <a:srgbClr val="000000"/>
+                </a:solidFill>
+                <a:latin typeface="Microsoft JhengHei" panose="020B0604030504040204" pitchFamily="34" charset="-120"/>
+                <a:ea typeface="Microsoft JhengHei" panose="020B0604030504040204" pitchFamily="34" charset="-120"/>
+              </a:rPr>
+              <a:t>PM </a:t>
+            </a:r>
+            <a:r>
+              <a:rPr lang="zh-TW" altLang="en-US" sz="1400" dirty="0">
+                <a:solidFill>
+                  <a:srgbClr val="000000"/>
+                </a:solidFill>
+                <a:latin typeface="Microsoft JhengHei" panose="020B0604030504040204" pitchFamily="34" charset="-120"/>
+                <a:ea typeface="Microsoft JhengHei" panose="020B0604030504040204" pitchFamily="34" charset="-120"/>
+              </a:rPr>
+              <a:t>確認 → </a:t>
+            </a:r>
+            <a:r>
+              <a:rPr lang="en-US" altLang="zh-TW" sz="1400" b="1" dirty="0">
+                <a:solidFill>
+                  <a:schemeClr val="accent2"/>
+                </a:solidFill>
+                <a:latin typeface="Microsoft JhengHei" panose="020B0604030504040204" pitchFamily="34" charset="-120"/>
+                <a:ea typeface="Microsoft JhengHei" panose="020B0604030504040204" pitchFamily="34" charset="-120"/>
+              </a:rPr>
+              <a:t>Planner </a:t>
+            </a:r>
+            <a:r>
+              <a:rPr lang="zh-TW" altLang="en-US" sz="1400" b="1" dirty="0">
+                <a:solidFill>
+                  <a:schemeClr val="accent2"/>
+                </a:solidFill>
+                <a:latin typeface="Microsoft JhengHei" panose="020B0604030504040204" pitchFamily="34" charset="-120"/>
+                <a:ea typeface="Microsoft JhengHei" panose="020B0604030504040204" pitchFamily="34" charset="-120"/>
+              </a:rPr>
+              <a:t>開單</a:t>
+            </a:r>
+            <a:r>
+              <a:rPr lang="en-US" altLang="zh-TW" sz="1400" b="1" dirty="0">
+                <a:solidFill>
+                  <a:schemeClr val="accent2"/>
+                </a:solidFill>
+                <a:latin typeface="Microsoft JhengHei" panose="020B0604030504040204" pitchFamily="34" charset="-120"/>
+                <a:ea typeface="Microsoft JhengHei" panose="020B0604030504040204" pitchFamily="34" charset="-120"/>
+                <a:sym typeface="Wingdings" panose="05000000000000000000" pitchFamily="2" charset="2"/>
+              </a:rPr>
+              <a:t></a:t>
+            </a:r>
+            <a:r>
+              <a:rPr lang="zh-TW" altLang="en-US" sz="1400" b="1" dirty="0">
+                <a:solidFill>
+                  <a:schemeClr val="accent2"/>
+                </a:solidFill>
+                <a:latin typeface="Microsoft JhengHei" panose="020B0604030504040204" pitchFamily="34" charset="-120"/>
+                <a:ea typeface="Microsoft JhengHei" panose="020B0604030504040204" pitchFamily="34" charset="-120"/>
+                <a:sym typeface="Wingdings" panose="05000000000000000000" pitchFamily="2" charset="2"/>
+              </a:rPr>
+              <a:t>指派</a:t>
+            </a:r>
+            <a:endParaRPr lang="zh-TW" altLang="en-US" sz="1400" b="1" dirty="0">
+              <a:solidFill>
+                <a:schemeClr val="accent2"/>
+              </a:solidFill>
+              <a:latin typeface="Microsoft JhengHei" panose="020B0604030504040204" pitchFamily="34" charset="-120"/>
+              <a:ea typeface="Microsoft JhengHei" panose="020B0604030504040204" pitchFamily="34" charset="-120"/>
+            </a:endParaRPr>
+          </a:p>
+          <a:p>
+            <a:pPr>
+              <a:lnSpc>
+                <a:spcPct val="128000"/>
+              </a:lnSpc>
+              <a:spcBef>
+                <a:spcPts val="1600"/>
+              </a:spcBef>
+            </a:pPr>
+            <a:r>
+              <a:rPr lang="zh-TW" altLang="en-US" sz="1400" b="1" dirty="0">
+                <a:solidFill>
+                  <a:srgbClr val="000000"/>
+                </a:solidFill>
+                <a:latin typeface="Microsoft JhengHei" panose="020B0604030504040204" pitchFamily="34" charset="-120"/>
+                <a:ea typeface="Microsoft JhengHei" panose="020B0604030504040204" pitchFamily="34" charset="-120"/>
+              </a:rPr>
+              <a:t>時程</a:t>
+            </a:r>
+            <a:r>
+              <a:rPr lang="zh-TW" altLang="en-US" sz="1400" dirty="0">
+                <a:solidFill>
+                  <a:srgbClr val="000000"/>
+                </a:solidFill>
+                <a:latin typeface="Microsoft JhengHei" panose="020B0604030504040204" pitchFamily="34" charset="-120"/>
+                <a:ea typeface="Microsoft JhengHei" panose="020B0604030504040204" pitchFamily="34" charset="-120"/>
+              </a:rPr>
+              <a:t>｜掃逾期／到期 → </a:t>
+            </a:r>
+            <a:r>
+              <a:rPr lang="zh-TW" altLang="en-US" sz="1400" b="1" dirty="0">
+                <a:solidFill>
+                  <a:schemeClr val="accent2"/>
+                </a:solidFill>
+                <a:latin typeface="Microsoft JhengHei" panose="020B0604030504040204" pitchFamily="34" charset="-120"/>
+                <a:ea typeface="Microsoft JhengHei" panose="020B0604030504040204" pitchFamily="34" charset="-120"/>
+              </a:rPr>
+              <a:t>催辦草稿</a:t>
+            </a:r>
+            <a:r>
+              <a:rPr lang="zh-TW" altLang="en-US" sz="1400" dirty="0">
+                <a:solidFill>
+                  <a:srgbClr val="000000"/>
+                </a:solidFill>
+                <a:latin typeface="Microsoft JhengHei" panose="020B0604030504040204" pitchFamily="34" charset="-120"/>
+                <a:ea typeface="Microsoft JhengHei" panose="020B0604030504040204" pitchFamily="34" charset="-120"/>
+              </a:rPr>
+              <a:t>（</a:t>
+            </a:r>
+            <a:r>
+              <a:rPr lang="en-US" altLang="zh-TW" sz="1400" dirty="0">
+                <a:solidFill>
+                  <a:srgbClr val="000000"/>
+                </a:solidFill>
+                <a:latin typeface="Microsoft JhengHei" panose="020B0604030504040204" pitchFamily="34" charset="-120"/>
+                <a:ea typeface="Microsoft JhengHei" panose="020B0604030504040204" pitchFamily="34" charset="-120"/>
+              </a:rPr>
+              <a:t>PM </a:t>
+            </a:r>
+            <a:r>
+              <a:rPr lang="zh-TW" altLang="en-US" sz="1400" dirty="0">
+                <a:solidFill>
+                  <a:srgbClr val="000000"/>
+                </a:solidFill>
+                <a:latin typeface="Microsoft JhengHei" panose="020B0604030504040204" pitchFamily="34" charset="-120"/>
+                <a:ea typeface="Microsoft JhengHei" panose="020B0604030504040204" pitchFamily="34" charset="-120"/>
+              </a:rPr>
+              <a:t>確認後發）→ </a:t>
+            </a:r>
+            <a:r>
+              <a:rPr lang="en-US" altLang="zh-TW" sz="1400" b="1" dirty="0">
+                <a:solidFill>
+                  <a:schemeClr val="accent2"/>
+                </a:solidFill>
+                <a:latin typeface="Microsoft JhengHei" panose="020B0604030504040204" pitchFamily="34" charset="-120"/>
+                <a:ea typeface="Microsoft JhengHei" panose="020B0604030504040204" pitchFamily="34" charset="-120"/>
+              </a:rPr>
+              <a:t>Power BI </a:t>
+            </a:r>
+            <a:r>
+              <a:rPr lang="zh-TW" altLang="en-US" sz="1400" b="1" dirty="0">
+                <a:solidFill>
+                  <a:schemeClr val="accent2"/>
+                </a:solidFill>
+                <a:latin typeface="Microsoft JhengHei" panose="020B0604030504040204" pitchFamily="34" charset="-120"/>
+                <a:ea typeface="Microsoft JhengHei" panose="020B0604030504040204" pitchFamily="34" charset="-120"/>
+              </a:rPr>
+              <a:t>甘特圖</a:t>
+            </a:r>
+          </a:p>
+          <a:p>
+            <a:pPr>
+              <a:lnSpc>
+                <a:spcPct val="128000"/>
+              </a:lnSpc>
+              <a:spcBef>
+                <a:spcPts val="1600"/>
+              </a:spcBef>
+            </a:pPr>
+            <a:r>
+              <a:rPr lang="zh-TW" altLang="en-US" sz="1400" b="1" dirty="0">
+                <a:solidFill>
+                  <a:srgbClr val="000000"/>
+                </a:solidFill>
+                <a:latin typeface="Microsoft JhengHei" panose="020B0604030504040204" pitchFamily="34" charset="-120"/>
+                <a:ea typeface="Microsoft JhengHei" panose="020B0604030504040204" pitchFamily="34" charset="-120"/>
+              </a:rPr>
+              <a:t>數據</a:t>
+            </a:r>
+            <a:r>
+              <a:rPr lang="zh-TW" altLang="en-US" sz="1400" dirty="0">
+                <a:solidFill>
+                  <a:srgbClr val="000000"/>
+                </a:solidFill>
+                <a:latin typeface="Microsoft JhengHei" panose="020B0604030504040204" pitchFamily="34" charset="-120"/>
+                <a:ea typeface="Microsoft JhengHei" panose="020B0604030504040204" pitchFamily="34" charset="-120"/>
+              </a:rPr>
+              <a:t>｜白名單查 </a:t>
+            </a:r>
+            <a:r>
+              <a:rPr lang="en-US" altLang="zh-TW" sz="1400" dirty="0">
+                <a:solidFill>
+                  <a:srgbClr val="000000"/>
+                </a:solidFill>
+                <a:latin typeface="Microsoft JhengHei" panose="020B0604030504040204" pitchFamily="34" charset="-120"/>
+                <a:ea typeface="Microsoft JhengHei" panose="020B0604030504040204" pitchFamily="34" charset="-120"/>
+              </a:rPr>
+              <a:t>CUBE</a:t>
+            </a:r>
+            <a:r>
+              <a:rPr lang="zh-TW" altLang="en-US" sz="1400" dirty="0">
+                <a:solidFill>
+                  <a:srgbClr val="000000"/>
+                </a:solidFill>
+                <a:latin typeface="Microsoft JhengHei" panose="020B0604030504040204" pitchFamily="34" charset="-120"/>
+                <a:ea typeface="Microsoft JhengHei" panose="020B0604030504040204" pitchFamily="34" charset="-120"/>
+              </a:rPr>
+              <a:t>／神策（只填參數、不生 </a:t>
+            </a:r>
+            <a:r>
+              <a:rPr lang="en-US" altLang="zh-TW" sz="1400" dirty="0">
+                <a:solidFill>
+                  <a:srgbClr val="000000"/>
+                </a:solidFill>
+                <a:latin typeface="Microsoft JhengHei" panose="020B0604030504040204" pitchFamily="34" charset="-120"/>
+                <a:ea typeface="Microsoft JhengHei" panose="020B0604030504040204" pitchFamily="34" charset="-120"/>
+              </a:rPr>
+              <a:t>SQL</a:t>
+            </a:r>
+            <a:r>
+              <a:rPr lang="zh-TW" altLang="en-US" sz="1400" dirty="0">
+                <a:solidFill>
+                  <a:srgbClr val="000000"/>
+                </a:solidFill>
+                <a:latin typeface="Microsoft JhengHei" panose="020B0604030504040204" pitchFamily="34" charset="-120"/>
+                <a:ea typeface="Microsoft JhengHei" panose="020B0604030504040204" pitchFamily="34" charset="-120"/>
+              </a:rPr>
+              <a:t>）→ </a:t>
+            </a:r>
+            <a:r>
+              <a:rPr lang="zh-TW" altLang="en-US" sz="1400" b="1" dirty="0">
+                <a:solidFill>
+                  <a:schemeClr val="accent2"/>
+                </a:solidFill>
+                <a:latin typeface="Microsoft JhengHei" panose="020B0604030504040204" pitchFamily="34" charset="-120"/>
+                <a:ea typeface="Microsoft JhengHei" panose="020B0604030504040204" pitchFamily="34" charset="-120"/>
+              </a:rPr>
+              <a:t>儀錶板摘要</a:t>
+            </a:r>
+          </a:p>
+          <a:p>
+            <a:pPr>
+              <a:lnSpc>
+                <a:spcPct val="128000"/>
+              </a:lnSpc>
+              <a:spcBef>
+                <a:spcPts val="1600"/>
+              </a:spcBef>
+            </a:pPr>
+            <a:r>
+              <a:rPr lang="en-US" altLang="zh-TW" sz="1400" b="1" dirty="0">
+                <a:solidFill>
+                  <a:srgbClr val="000000"/>
+                </a:solidFill>
+                <a:latin typeface="Microsoft JhengHei" panose="020B0604030504040204" pitchFamily="34" charset="-120"/>
+                <a:ea typeface="Microsoft JhengHei" panose="020B0604030504040204" pitchFamily="34" charset="-120"/>
+              </a:rPr>
+              <a:t>KPI</a:t>
+            </a:r>
+            <a:r>
+              <a:rPr lang="zh-TW" altLang="en-US" sz="1400" dirty="0">
+                <a:solidFill>
+                  <a:srgbClr val="000000"/>
+                </a:solidFill>
+                <a:latin typeface="Microsoft JhengHei" panose="020B0604030504040204" pitchFamily="34" charset="-120"/>
+                <a:ea typeface="Microsoft JhengHei" panose="020B0604030504040204" pitchFamily="34" charset="-120"/>
+              </a:rPr>
+              <a:t>｜</a:t>
+            </a:r>
+            <a:r>
+              <a:rPr lang="zh-TW" altLang="en-US" sz="1400" b="1" dirty="0">
+                <a:solidFill>
+                  <a:schemeClr val="accent2"/>
+                </a:solidFill>
+                <a:latin typeface="Microsoft JhengHei" panose="020B0604030504040204" pitchFamily="34" charset="-120"/>
+                <a:ea typeface="Microsoft JhengHei" panose="020B0604030504040204" pitchFamily="34" charset="-120"/>
+              </a:rPr>
+              <a:t>算節點達成率與缺口</a:t>
+            </a:r>
+            <a:r>
+              <a:rPr lang="zh-TW" altLang="en-US" sz="1400" dirty="0">
+                <a:solidFill>
+                  <a:srgbClr val="000000"/>
+                </a:solidFill>
+                <a:latin typeface="Microsoft JhengHei" panose="020B0604030504040204" pitchFamily="34" charset="-120"/>
+                <a:ea typeface="Microsoft JhengHei" panose="020B0604030504040204" pitchFamily="34" charset="-120"/>
+              </a:rPr>
+              <a:t>（純程式計算、建議標「參考」）</a:t>
+            </a:r>
+          </a:p>
+        </p:txBody>
+      </p:sp>
+      <p:sp>
+        <p:nvSpPr>
+          <p:cNvPr id="7" name="文字方塊 6">
+            <a:extLst>
+              <a:ext uri="{FF2B5EF4-FFF2-40B4-BE49-F238E27FC236}">
+                <a16:creationId xmlns:a16="http://schemas.microsoft.com/office/drawing/2014/main" id="{7C1EAB8D-5060-CFF2-DC40-CC447D8CA772}"/>
+              </a:ext>
+            </a:extLst>
+          </p:cNvPr>
+          <p:cNvSpPr txBox="1"/>
+          <p:nvPr/>
+        </p:nvSpPr>
+        <p:spPr>
+          <a:xfrm>
+            <a:off x="6870700" y="1524000"/>
+            <a:ext cx="4953000" cy="3810000"/>
+          </a:xfrm>
+          <a:prstGeom prst="rect">
+            <a:avLst/>
+          </a:prstGeom>
+          <a:noFill/>
+        </p:spPr>
+        <p:txBody>
+          <a:bodyPr vert="horz" wrap="square" lIns="50800" tIns="25400" rIns="50800" bIns="25400" rtlCol="0" anchor="t">
+            <a:noAutofit/>
+          </a:bodyPr>
+          <a:lstStyle/>
+          <a:p>
+            <a:pPr>
+              <a:lnSpc>
+                <a:spcPct val="128000"/>
+              </a:lnSpc>
+              <a:spcBef>
+                <a:spcPts val="400"/>
+              </a:spcBef>
+            </a:pPr>
+            <a:r>
+              <a:rPr lang="zh-TW" altLang="en-US" sz="1400" b="1" dirty="0">
+                <a:solidFill>
+                  <a:srgbClr val="000000"/>
+                </a:solidFill>
+                <a:latin typeface="Microsoft YaHei" panose="020B0503020204020204" pitchFamily="34" charset="-122"/>
+                <a:ea typeface="Microsoft YaHei" panose="020B0503020204020204" pitchFamily="34" charset="-122"/>
+              </a:rPr>
+              <a:t>▌ </a:t>
+            </a:r>
+            <a:r>
+              <a:rPr lang="en-US" altLang="zh-TW" sz="1400" b="1" dirty="0">
+                <a:solidFill>
+                  <a:srgbClr val="000000"/>
+                </a:solidFill>
+                <a:latin typeface="Microsoft YaHei" panose="020B0503020204020204" pitchFamily="34" charset="-122"/>
+                <a:ea typeface="Microsoft YaHei" panose="020B0503020204020204" pitchFamily="34" charset="-122"/>
+              </a:rPr>
+              <a:t>2.</a:t>
+            </a:r>
+            <a:r>
+              <a:rPr lang="zh-TW" altLang="en-US" sz="1400" b="1" dirty="0">
+                <a:solidFill>
+                  <a:srgbClr val="000000"/>
+                </a:solidFill>
+                <a:latin typeface="Microsoft YaHei" panose="020B0503020204020204" pitchFamily="34" charset="-122"/>
+                <a:ea typeface="Microsoft YaHei" panose="020B0503020204020204" pitchFamily="34" charset="-122"/>
+              </a:rPr>
+              <a:t> 協作閉環</a:t>
+            </a:r>
+          </a:p>
+          <a:p>
+            <a:pPr>
+              <a:lnSpc>
+                <a:spcPct val="128000"/>
+              </a:lnSpc>
+              <a:spcBef>
+                <a:spcPts val="400"/>
+              </a:spcBef>
+            </a:pPr>
+            <a:r>
+              <a:rPr lang="zh-TW" altLang="en-US" sz="1400" dirty="0">
+                <a:solidFill>
+                  <a:srgbClr val="000000"/>
+                </a:solidFill>
+                <a:latin typeface="Microsoft JhengHei" panose="020B0604030504040204" pitchFamily="34" charset="-120"/>
+                <a:ea typeface="Microsoft JhengHei" panose="020B0604030504040204" pitchFamily="34" charset="-120"/>
+              </a:rPr>
+              <a:t>共用資料層＝</a:t>
+            </a:r>
+            <a:r>
+              <a:rPr lang="en-US" altLang="zh-TW" sz="1400" dirty="0">
+                <a:solidFill>
+                  <a:srgbClr val="000000"/>
+                </a:solidFill>
+                <a:latin typeface="Microsoft JhengHei" panose="020B0604030504040204" pitchFamily="34" charset="-120"/>
+                <a:ea typeface="Microsoft JhengHei" panose="020B0604030504040204" pitchFamily="34" charset="-120"/>
+              </a:rPr>
+              <a:t>Planner</a:t>
+            </a:r>
+            <a:r>
+              <a:rPr lang="zh-TW" altLang="en-US" sz="1400" dirty="0">
+                <a:solidFill>
+                  <a:srgbClr val="000000"/>
+                </a:solidFill>
+                <a:latin typeface="Microsoft JhengHei" panose="020B0604030504040204" pitchFamily="34" charset="-120"/>
+                <a:ea typeface="Microsoft JhengHei" panose="020B0604030504040204" pitchFamily="34" charset="-120"/>
+              </a:rPr>
+              <a:t>＋</a:t>
+            </a:r>
+            <a:r>
+              <a:rPr lang="en-US" altLang="zh-TW" sz="1400" dirty="0">
+                <a:solidFill>
+                  <a:srgbClr val="000000"/>
+                </a:solidFill>
+                <a:latin typeface="Microsoft JhengHei" panose="020B0604030504040204" pitchFamily="34" charset="-120"/>
+                <a:ea typeface="Microsoft JhengHei" panose="020B0604030504040204" pitchFamily="34" charset="-120"/>
+              </a:rPr>
+              <a:t>SharePoint</a:t>
+            </a:r>
+            <a:r>
+              <a:rPr lang="zh-TW" altLang="en-US" sz="1400" dirty="0">
+                <a:solidFill>
+                  <a:srgbClr val="000000"/>
+                </a:solidFill>
+                <a:latin typeface="Microsoft JhengHei" panose="020B0604030504040204" pitchFamily="34" charset="-120"/>
+                <a:ea typeface="Microsoft JhengHei" panose="020B0604030504040204" pitchFamily="34" charset="-120"/>
+              </a:rPr>
+              <a:t>。</a:t>
+            </a:r>
+            <a:endParaRPr lang="en-US" altLang="zh-TW" sz="1400" dirty="0">
+              <a:solidFill>
+                <a:srgbClr val="000000"/>
+              </a:solidFill>
+              <a:latin typeface="Microsoft JhengHei" panose="020B0604030504040204" pitchFamily="34" charset="-120"/>
+              <a:ea typeface="Microsoft JhengHei" panose="020B0604030504040204" pitchFamily="34" charset="-120"/>
+            </a:endParaRPr>
+          </a:p>
+          <a:p>
+            <a:pPr>
+              <a:lnSpc>
+                <a:spcPct val="128000"/>
+              </a:lnSpc>
+              <a:spcBef>
+                <a:spcPts val="400"/>
+              </a:spcBef>
+            </a:pPr>
+            <a:r>
+              <a:rPr lang="zh-TW" altLang="en-US" sz="1400" dirty="0">
+                <a:solidFill>
+                  <a:srgbClr val="000000"/>
+                </a:solidFill>
+                <a:latin typeface="Microsoft JhengHei" panose="020B0604030504040204" pitchFamily="34" charset="-120"/>
+                <a:ea typeface="Microsoft JhengHei" panose="020B0604030504040204" pitchFamily="34" charset="-120"/>
+              </a:rPr>
+              <a:t>會議記錄開單 → 時程接手追蹤 → </a:t>
+            </a:r>
+            <a:r>
+              <a:rPr lang="en-US" altLang="zh-TW" sz="1400" dirty="0">
+                <a:solidFill>
+                  <a:srgbClr val="000000"/>
+                </a:solidFill>
+                <a:latin typeface="Microsoft JhengHei" panose="020B0604030504040204" pitchFamily="34" charset="-120"/>
+                <a:ea typeface="Microsoft JhengHei" panose="020B0604030504040204" pitchFamily="34" charset="-120"/>
+              </a:rPr>
+              <a:t>KPI </a:t>
+            </a:r>
+            <a:r>
+              <a:rPr lang="zh-TW" altLang="en-US" sz="1400" dirty="0">
+                <a:solidFill>
+                  <a:srgbClr val="000000"/>
+                </a:solidFill>
+                <a:latin typeface="Microsoft JhengHei" panose="020B0604030504040204" pitchFamily="34" charset="-120"/>
+                <a:ea typeface="Microsoft JhengHei" panose="020B0604030504040204" pitchFamily="34" charset="-120"/>
+              </a:rPr>
+              <a:t>算達成率</a:t>
+            </a:r>
+          </a:p>
+          <a:p>
+            <a:pPr>
+              <a:lnSpc>
+                <a:spcPct val="128000"/>
+              </a:lnSpc>
+            </a:pPr>
+            <a:endParaRPr lang="zh-TW" altLang="en-US" sz="600" dirty="0">
+              <a:solidFill>
+                <a:srgbClr val="000000"/>
+              </a:solidFill>
+              <a:latin typeface="Microsoft JhengHei" panose="020B0604030504040204" pitchFamily="34" charset="-120"/>
+              <a:ea typeface="Microsoft JhengHei" panose="020B0604030504040204" pitchFamily="34" charset="-120"/>
+            </a:endParaRPr>
+          </a:p>
+          <a:p>
+            <a:pPr>
+              <a:lnSpc>
+                <a:spcPct val="128000"/>
+              </a:lnSpc>
+              <a:spcBef>
+                <a:spcPts val="400"/>
+              </a:spcBef>
+            </a:pPr>
+            <a:r>
+              <a:rPr lang="zh-TW" altLang="en-US" sz="1400" b="1" dirty="0">
+                <a:solidFill>
+                  <a:srgbClr val="000000"/>
+                </a:solidFill>
+                <a:latin typeface="Microsoft YaHei" panose="020B0503020204020204" pitchFamily="34" charset="-122"/>
+                <a:ea typeface="Microsoft YaHei" panose="020B0503020204020204" pitchFamily="34" charset="-122"/>
+              </a:rPr>
+              <a:t>▌ </a:t>
+            </a:r>
+            <a:r>
+              <a:rPr lang="en-US" altLang="zh-TW" sz="1400" b="1" dirty="0">
+                <a:solidFill>
+                  <a:srgbClr val="000000"/>
+                </a:solidFill>
+                <a:latin typeface="Microsoft YaHei" panose="020B0503020204020204" pitchFamily="34" charset="-122"/>
+                <a:ea typeface="Microsoft YaHei" panose="020B0503020204020204" pitchFamily="34" charset="-122"/>
+              </a:rPr>
+              <a:t>3.</a:t>
+            </a:r>
+            <a:r>
+              <a:rPr lang="zh-TW" altLang="en-US" sz="1400" b="1" dirty="0">
+                <a:solidFill>
+                  <a:srgbClr val="000000"/>
+                </a:solidFill>
+                <a:latin typeface="Microsoft YaHei" panose="020B0503020204020204" pitchFamily="34" charset="-122"/>
+                <a:ea typeface="Microsoft YaHei" panose="020B0503020204020204" pitchFamily="34" charset="-122"/>
+              </a:rPr>
+              <a:t> 安全設計</a:t>
+            </a:r>
+          </a:p>
+          <a:p>
+            <a:pPr>
+              <a:lnSpc>
+                <a:spcPct val="128000"/>
+              </a:lnSpc>
+              <a:spcBef>
+                <a:spcPts val="400"/>
+              </a:spcBef>
+            </a:pPr>
+            <a:r>
+              <a:rPr lang="zh-TW" altLang="en-US" sz="1400" dirty="0">
+                <a:solidFill>
+                  <a:srgbClr val="000000"/>
+                </a:solidFill>
+                <a:latin typeface="Microsoft JhengHei" panose="020B0604030504040204" pitchFamily="34" charset="-120"/>
+                <a:ea typeface="Microsoft JhengHei" panose="020B0604030504040204" pitchFamily="34" charset="-120"/>
+              </a:rPr>
+              <a:t>寫入／外送一律 </a:t>
+            </a:r>
+            <a:r>
+              <a:rPr lang="en-US" altLang="zh-TW" sz="1400" dirty="0">
+                <a:solidFill>
+                  <a:srgbClr val="000000"/>
+                </a:solidFill>
+                <a:latin typeface="Microsoft JhengHei" panose="020B0604030504040204" pitchFamily="34" charset="-120"/>
+                <a:ea typeface="Microsoft JhengHei" panose="020B0604030504040204" pitchFamily="34" charset="-120"/>
+              </a:rPr>
+              <a:t>PM </a:t>
+            </a:r>
+            <a:r>
+              <a:rPr lang="zh-TW" altLang="en-US" sz="1400" dirty="0">
+                <a:solidFill>
+                  <a:srgbClr val="000000"/>
+                </a:solidFill>
+                <a:latin typeface="Microsoft JhengHei" panose="020B0604030504040204" pitchFamily="34" charset="-120"/>
+                <a:ea typeface="Microsoft JhengHei" panose="020B0604030504040204" pitchFamily="34" charset="-120"/>
+              </a:rPr>
+              <a:t>確認、全程稽核 </a:t>
+            </a:r>
+            <a:r>
+              <a:rPr lang="en-US" altLang="zh-TW" sz="1400" dirty="0">
+                <a:solidFill>
+                  <a:srgbClr val="000000"/>
+                </a:solidFill>
+                <a:latin typeface="Microsoft JhengHei" panose="020B0604030504040204" pitchFamily="34" charset="-120"/>
+                <a:ea typeface="Microsoft JhengHei" panose="020B0604030504040204" pitchFamily="34" charset="-120"/>
+              </a:rPr>
+              <a:t>Log</a:t>
+            </a:r>
+            <a:r>
+              <a:rPr lang="zh-TW" altLang="en-US" sz="1400" dirty="0">
+                <a:solidFill>
+                  <a:srgbClr val="000000"/>
+                </a:solidFill>
+                <a:latin typeface="Microsoft JhengHei" panose="020B0604030504040204" pitchFamily="34" charset="-120"/>
+                <a:ea typeface="Microsoft JhengHei" panose="020B0604030504040204" pitchFamily="34" charset="-120"/>
+              </a:rPr>
+              <a:t>；資料存於 </a:t>
+            </a:r>
+            <a:r>
+              <a:rPr lang="en-US" altLang="zh-TW" sz="1400" dirty="0">
+                <a:solidFill>
+                  <a:srgbClr val="000000"/>
+                </a:solidFill>
+                <a:latin typeface="Microsoft JhengHei" panose="020B0604030504040204" pitchFamily="34" charset="-120"/>
+                <a:ea typeface="Microsoft JhengHei" panose="020B0604030504040204" pitchFamily="34" charset="-120"/>
+              </a:rPr>
+              <a:t>Microsoft Cloud </a:t>
+            </a:r>
+            <a:r>
+              <a:rPr lang="zh-TW" altLang="en-US" sz="1400" dirty="0">
+                <a:solidFill>
+                  <a:srgbClr val="000000"/>
+                </a:solidFill>
+                <a:latin typeface="Microsoft JhengHei" panose="020B0604030504040204" pitchFamily="34" charset="-120"/>
+                <a:ea typeface="Microsoft JhengHei" panose="020B0604030504040204" pitchFamily="34" charset="-120"/>
+              </a:rPr>
+              <a:t>信任邊界、不用於模型訓練</a:t>
+            </a:r>
+          </a:p>
+          <a:p>
+            <a:pPr>
+              <a:lnSpc>
+                <a:spcPct val="128000"/>
+              </a:lnSpc>
+            </a:pPr>
+            <a:endParaRPr lang="zh-TW" altLang="en-US" sz="600" dirty="0">
+              <a:solidFill>
+                <a:srgbClr val="000000"/>
+              </a:solidFill>
+              <a:latin typeface="Microsoft JhengHei" panose="020B0604030504040204" pitchFamily="34" charset="-120"/>
+              <a:ea typeface="Microsoft JhengHei" panose="020B0604030504040204" pitchFamily="34" charset="-120"/>
+            </a:endParaRPr>
+          </a:p>
+          <a:p>
+            <a:pPr>
+              <a:lnSpc>
+                <a:spcPct val="128000"/>
+              </a:lnSpc>
+              <a:spcBef>
+                <a:spcPts val="400"/>
+              </a:spcBef>
+            </a:pPr>
+            <a:r>
+              <a:rPr lang="zh-TW" altLang="en-US" sz="1400" b="1" dirty="0">
+                <a:solidFill>
+                  <a:srgbClr val="000000"/>
+                </a:solidFill>
+                <a:latin typeface="Microsoft YaHei" panose="020B0503020204020204" pitchFamily="34" charset="-122"/>
+                <a:ea typeface="Microsoft YaHei" panose="020B0503020204020204" pitchFamily="34" charset="-122"/>
+              </a:rPr>
+              <a:t>▌ </a:t>
+            </a:r>
+            <a:r>
+              <a:rPr lang="en-US" altLang="zh-TW" sz="1400" b="1" dirty="0">
+                <a:solidFill>
+                  <a:srgbClr val="000000"/>
+                </a:solidFill>
+                <a:latin typeface="Microsoft YaHei" panose="020B0503020204020204" pitchFamily="34" charset="-122"/>
+                <a:ea typeface="Microsoft YaHei" panose="020B0503020204020204" pitchFamily="34" charset="-122"/>
+              </a:rPr>
+              <a:t>4.</a:t>
+            </a:r>
+            <a:r>
+              <a:rPr lang="zh-TW" altLang="en-US" sz="1400" b="1" dirty="0">
+                <a:solidFill>
+                  <a:srgbClr val="000000"/>
+                </a:solidFill>
+                <a:latin typeface="Microsoft YaHei" panose="020B0503020204020204" pitchFamily="34" charset="-122"/>
+                <a:ea typeface="Microsoft YaHei" panose="020B0503020204020204" pitchFamily="34" charset="-122"/>
+              </a:rPr>
+              <a:t> 落地規劃</a:t>
+            </a:r>
+          </a:p>
+          <a:p>
+            <a:pPr>
+              <a:lnSpc>
+                <a:spcPct val="128000"/>
+              </a:lnSpc>
+              <a:spcBef>
+                <a:spcPts val="400"/>
+              </a:spcBef>
+            </a:pPr>
+            <a:r>
+              <a:rPr lang="en-US" altLang="zh-TW" sz="1400" dirty="0">
+                <a:solidFill>
+                  <a:srgbClr val="000000"/>
+                </a:solidFill>
+                <a:latin typeface="Microsoft JhengHei" panose="020B0604030504040204" pitchFamily="34" charset="-120"/>
+                <a:ea typeface="Microsoft JhengHei" panose="020B0604030504040204" pitchFamily="34" charset="-120"/>
+              </a:rPr>
+              <a:t>Phase 1</a:t>
+            </a:r>
+            <a:r>
+              <a:rPr lang="zh-TW" altLang="en-US" sz="1400" dirty="0">
+                <a:solidFill>
+                  <a:srgbClr val="000000"/>
+                </a:solidFill>
+                <a:latin typeface="Microsoft JhengHei" panose="020B0604030504040204" pitchFamily="34" charset="-120"/>
+                <a:ea typeface="Microsoft JhengHei" panose="020B0604030504040204" pitchFamily="34" charset="-120"/>
+              </a:rPr>
+              <a:t>（零基建、</a:t>
+            </a:r>
+            <a:r>
+              <a:rPr lang="en-US" altLang="zh-TW" sz="1400" dirty="0">
+                <a:solidFill>
+                  <a:srgbClr val="000000"/>
+                </a:solidFill>
+                <a:latin typeface="Microsoft JhengHei" panose="020B0604030504040204" pitchFamily="34" charset="-120"/>
+                <a:ea typeface="Microsoft JhengHei" panose="020B0604030504040204" pitchFamily="34" charset="-120"/>
+              </a:rPr>
+              <a:t>1–2 </a:t>
+            </a:r>
+            <a:r>
+              <a:rPr lang="zh-TW" altLang="en-US" sz="1400" dirty="0">
+                <a:solidFill>
+                  <a:srgbClr val="000000"/>
+                </a:solidFill>
+                <a:latin typeface="Microsoft JhengHei" panose="020B0604030504040204" pitchFamily="34" charset="-120"/>
+                <a:ea typeface="Microsoft JhengHei" panose="020B0604030504040204" pitchFamily="34" charset="-120"/>
+              </a:rPr>
+              <a:t>週可完成）：會議記錄＋時程</a:t>
+            </a:r>
+          </a:p>
+          <a:p>
+            <a:pPr>
+              <a:lnSpc>
+                <a:spcPct val="128000"/>
+              </a:lnSpc>
+              <a:spcBef>
+                <a:spcPts val="400"/>
+              </a:spcBef>
+            </a:pPr>
+            <a:r>
+              <a:rPr lang="en-US" altLang="zh-TW" sz="1400" dirty="0">
+                <a:solidFill>
+                  <a:srgbClr val="000000"/>
+                </a:solidFill>
+                <a:latin typeface="Microsoft JhengHei" panose="020B0604030504040204" pitchFamily="34" charset="-120"/>
+                <a:ea typeface="Microsoft JhengHei" panose="020B0604030504040204" pitchFamily="34" charset="-120"/>
+              </a:rPr>
+              <a:t>Phase 2</a:t>
+            </a:r>
+            <a:r>
+              <a:rPr lang="zh-TW" altLang="en-US" sz="1400" dirty="0">
+                <a:solidFill>
+                  <a:srgbClr val="000000"/>
+                </a:solidFill>
+                <a:latin typeface="Microsoft JhengHei" panose="020B0604030504040204" pitchFamily="34" charset="-120"/>
+                <a:ea typeface="Microsoft JhengHei" panose="020B0604030504040204" pitchFamily="34" charset="-120"/>
+              </a:rPr>
+              <a:t>（</a:t>
+            </a:r>
+            <a:r>
+              <a:rPr lang="en-US" altLang="zh-TW" sz="1400" dirty="0">
+                <a:solidFill>
+                  <a:srgbClr val="000000"/>
+                </a:solidFill>
+                <a:latin typeface="Microsoft JhengHei" panose="020B0604030504040204" pitchFamily="34" charset="-120"/>
+                <a:ea typeface="Microsoft JhengHei" panose="020B0604030504040204" pitchFamily="34" charset="-120"/>
+              </a:rPr>
+              <a:t>gateway </a:t>
+            </a:r>
+            <a:r>
+              <a:rPr lang="zh-TW" altLang="en-US" sz="1400" dirty="0">
+                <a:solidFill>
+                  <a:srgbClr val="000000"/>
+                </a:solidFill>
+                <a:latin typeface="Microsoft JhengHei" panose="020B0604030504040204" pitchFamily="34" charset="-120"/>
+                <a:ea typeface="Microsoft JhengHei" panose="020B0604030504040204" pitchFamily="34" charset="-120"/>
+              </a:rPr>
+              <a:t>到位）：數據＋</a:t>
+            </a:r>
+            <a:r>
+              <a:rPr lang="en-US" altLang="zh-TW" sz="1400" dirty="0">
+                <a:solidFill>
+                  <a:srgbClr val="000000"/>
+                </a:solidFill>
+                <a:latin typeface="Microsoft JhengHei" panose="020B0604030504040204" pitchFamily="34" charset="-120"/>
+                <a:ea typeface="Microsoft JhengHei" panose="020B0604030504040204" pitchFamily="34" charset="-120"/>
+              </a:rPr>
+              <a:t>KPI </a:t>
+            </a:r>
+            <a:r>
+              <a:rPr lang="zh-TW" altLang="en-US" sz="1400" dirty="0">
+                <a:solidFill>
+                  <a:srgbClr val="000000"/>
+                </a:solidFill>
+                <a:latin typeface="Microsoft JhengHei" panose="020B0604030504040204" pitchFamily="34" charset="-120"/>
+                <a:ea typeface="Microsoft JhengHei" panose="020B0604030504040204" pitchFamily="34" charset="-120"/>
+              </a:rPr>
+              <a:t>業務層</a:t>
+            </a:r>
           </a:p>
         </p:txBody>
       </p:sp>
@@ -8536,6 +10385,42 @@
           </a:p>
         </p:txBody>
       </p:sp>
+      <p:pic>
+        <p:nvPicPr>
+          <p:cNvPr id="5" name="圖片 4">
+            <a:extLst>
+              <a:ext uri="{FF2B5EF4-FFF2-40B4-BE49-F238E27FC236}">
+                <a16:creationId xmlns:a16="http://schemas.microsoft.com/office/drawing/2014/main" id="{CAC8AE35-85B8-0287-3CB0-6CAD64160FB4}"/>
+              </a:ext>
+            </a:extLst>
+          </p:cNvPr>
+          <p:cNvPicPr>
+            <a:picLocks/>
+          </p:cNvPicPr>
+          <p:nvPr/>
+        </p:nvPicPr>
+        <p:blipFill>
+          <a:blip r:embed="rId3">
+            <a:extLst>
+              <a:ext uri="{28A0092B-C50C-407E-A947-70E740481C1C}">
+                <a14:useLocalDpi xmlns:a14="http://schemas.microsoft.com/office/drawing/2010/main" val="0"/>
+              </a:ext>
+            </a:extLst>
+          </a:blip>
+          <a:stretch>
+            <a:fillRect/>
+          </a:stretch>
+        </p:blipFill>
+        <p:spPr>
+          <a:xfrm>
+            <a:off x="1341120" y="960120"/>
+            <a:ext cx="9509760" cy="5349240"/>
+          </a:xfrm>
+          <a:prstGeom prst="rect">
+            <a:avLst/>
+          </a:prstGeom>
+        </p:spPr>
+      </p:pic>
     </p:spTree>
   </p:cSld>
   <p:clrMapOvr>
@@ -8667,6 +10552,56 @@
               <a:tabLst/>
               <a:defRPr/>
             </a:pPr>
+            <a:r>
+              <a:rPr lang="zh-TW" altLang="en-US" sz="1400" b="0">
+                <a:solidFill>
+                  <a:srgbClr val="000000"/>
+                </a:solidFill>
+                <a:latin typeface="Microsoft JhengHei" panose="020B0604030504040204" pitchFamily="34" charset="-120"/>
+                <a:ea typeface="Microsoft JhengHei" panose="020B0604030504040204" pitchFamily="34" charset="-120"/>
+              </a:rPr>
+              <a:t>量化與質化效益（量化為四大 </a:t>
+            </a:r>
+            <a:r>
+              <a:rPr lang="en-US" altLang="zh-TW" sz="1400" b="0">
+                <a:solidFill>
+                  <a:srgbClr val="000000"/>
+                </a:solidFill>
+                <a:latin typeface="Microsoft JhengHei" panose="020B0604030504040204" pitchFamily="34" charset="-120"/>
+                <a:ea typeface="Microsoft JhengHei" panose="020B0604030504040204" pitchFamily="34" charset="-120"/>
+              </a:rPr>
+              <a:t>Agent </a:t>
+            </a:r>
+            <a:r>
+              <a:rPr lang="zh-TW" altLang="en-US" sz="1400" b="0">
+                <a:solidFill>
+                  <a:srgbClr val="000000"/>
+                </a:solidFill>
+                <a:latin typeface="Microsoft JhengHei" panose="020B0604030504040204" pitchFamily="34" charset="-120"/>
+                <a:ea typeface="Microsoft JhengHei" panose="020B0604030504040204" pitchFamily="34" charset="-120"/>
+              </a:rPr>
+              <a:t>推估：頻率 </a:t>
+            </a:r>
+            <a:r>
+              <a:rPr lang="en-US" altLang="zh-TW" sz="1400" b="0">
+                <a:solidFill>
+                  <a:srgbClr val="000000"/>
+                </a:solidFill>
+                <a:latin typeface="Microsoft JhengHei" panose="020B0604030504040204" pitchFamily="34" charset="-120"/>
+                <a:ea typeface="Microsoft JhengHei" panose="020B0604030504040204" pitchFamily="34" charset="-120"/>
+              </a:rPr>
+              <a:t>× </a:t>
+            </a:r>
+            <a:r>
+              <a:rPr lang="zh-TW" altLang="en-US" sz="1400" b="0">
+                <a:solidFill>
+                  <a:srgbClr val="000000"/>
+                </a:solidFill>
+                <a:latin typeface="Microsoft JhengHei" panose="020B0604030504040204" pitchFamily="34" charset="-120"/>
+                <a:ea typeface="Microsoft JhengHei" panose="020B0604030504040204" pitchFamily="34" charset="-120"/>
+              </a:rPr>
+              <a:t>單位省時；數值待部門實際數據校準）</a:t>
+            </a:r>
             <a:endParaRPr kumimoji="0" sz="1400" b="0" i="0" u="none" strike="noStrike" kern="0" cap="none" spc="0" normalizeH="0" baseline="0" noProof="0">
               <a:ln>
                 <a:noFill/>
@@ -8677,8 +10612,8 @@
               <a:effectLst/>
               <a:uLnTx/>
               <a:uFillTx/>
-              <a:latin typeface="Arial"/>
-              <a:ea typeface="Arial"/>
+              <a:latin typeface="Microsoft JhengHei" panose="020B0604030504040204" pitchFamily="34" charset="-120"/>
+              <a:ea typeface="Microsoft JhengHei" panose="020B0604030504040204" pitchFamily="34" charset="-120"/>
               <a:cs typeface="Arial"/>
               <a:sym typeface="Arial"/>
             </a:endParaRPr>
@@ -8693,8 +10628,8 @@
         </p:nvSpPr>
         <p:spPr>
           <a:xfrm>
-            <a:off x="1055850" y="3423025"/>
-            <a:ext cx="10080300" cy="2476200"/>
+            <a:off x="368300" y="4038600"/>
+            <a:ext cx="11455400" cy="2413000"/>
           </a:xfrm>
           <a:prstGeom prst="rect">
             <a:avLst/>
@@ -8730,7 +10665,7 @@
               <a:defRPr/>
             </a:pPr>
             <a:r>
-              <a:rPr kumimoji="0" lang="en-US" altLang="zh-TW" sz="1400" b="0" i="0" u="none" strike="noStrike" kern="0" cap="none" spc="0" normalizeH="0" baseline="0" noProof="0" dirty="0">
+              <a:rPr kumimoji="0" lang="en-US" altLang="zh-TW" sz="1300" b="0" i="0" u="none" strike="noStrike" kern="0" cap="none" spc="0" normalizeH="0" baseline="0" noProof="0" dirty="0">
                 <a:ln>
                   <a:noFill/>
                 </a:ln>
@@ -8745,63 +10680,9 @@
                 <a:cs typeface="Microsoft JhengHei"/>
                 <a:sym typeface="Microsoft JhengHei"/>
               </a:rPr>
-              <a:t>[</a:t>
-            </a:r>
-            <a:r>
-              <a:rPr kumimoji="0" lang="zh-TW" altLang="en-US" sz="1400" b="0" i="0" u="none" strike="noStrike" kern="0" cap="none" spc="0" normalizeH="0" baseline="0" noProof="0" dirty="0">
-                <a:ln>
-                  <a:noFill/>
-                </a:ln>
-                <a:solidFill>
-                  <a:srgbClr val="000000"/>
-                </a:solidFill>
-                <a:effectLst/>
-                <a:uLnTx/>
-                <a:uFillTx/>
-                <a:latin typeface="Microsoft JhengHei"/>
-                <a:ea typeface="Microsoft JhengHei"/>
-                <a:cs typeface="Microsoft JhengHei"/>
-                <a:sym typeface="Microsoft JhengHei"/>
-              </a:rPr>
-              <a:t>質化效益</a:t>
-            </a:r>
-            <a:r>
-              <a:rPr kumimoji="0" lang="en-US" altLang="zh-TW" sz="1400" b="0" i="0" u="none" strike="noStrike" kern="0" cap="none" spc="0" normalizeH="0" baseline="0" noProof="0" dirty="0">
-                <a:ln>
-                  <a:noFill/>
-                </a:ln>
-                <a:solidFill>
-                  <a:srgbClr val="000000"/>
-                </a:solidFill>
-                <a:effectLst/>
-                <a:uLnTx/>
-                <a:uFillTx/>
-                <a:latin typeface="Microsoft JhengHei"/>
-                <a:ea typeface="Microsoft JhengHei"/>
-                <a:cs typeface="Microsoft JhengHei"/>
-                <a:sym typeface="Microsoft JhengHei"/>
-              </a:rPr>
-              <a:t>] </a:t>
-            </a:r>
-            <a:r>
-              <a:rPr kumimoji="0" lang="zh-TW" altLang="en-US" sz="1400" b="0" i="0" u="none" strike="noStrike" kern="0" cap="none" spc="0" normalizeH="0" baseline="0" noProof="0" dirty="0">
-                <a:ln>
-                  <a:noFill/>
-                </a:ln>
-                <a:solidFill>
-                  <a:srgbClr val="000000"/>
-                </a:solidFill>
-                <a:effectLst/>
-                <a:uLnTx/>
-                <a:uFillTx/>
-                <a:latin typeface="Microsoft JhengHei"/>
-                <a:ea typeface="Microsoft JhengHei"/>
-                <a:cs typeface="Microsoft JhengHei"/>
-                <a:sym typeface="Microsoft JhengHei"/>
-              </a:rPr>
-              <a:t>向度說明範例</a:t>
-            </a:r>
-            <a:endParaRPr kumimoji="0" sz="1400" b="0" i="0" u="none" strike="noStrike" kern="0" cap="none" spc="0" normalizeH="0" baseline="0" noProof="0" dirty="0">
+              <a:t>[質化效益]</a:t>
+            </a:r>
+            <a:endParaRPr kumimoji="0" sz="1300" b="0" i="0" u="none" strike="noStrike" kern="0" cap="none" spc="0" normalizeH="0" baseline="0" noProof="0" dirty="0">
               <a:ln>
                 <a:noFill/>
               </a:ln>
@@ -8818,7 +10699,7 @@
             </a:endParaRPr>
           </a:p>
           <a:p>
-            <a:pPr marL="342900" marR="0" lvl="0" indent="-342900" algn="l" defTabSz="914400" rtl="0" eaLnBrk="1" fontAlgn="auto" latinLnBrk="0" hangingPunct="1">
+            <a:pPr marL="0" marR="0" lvl="0" indent="0" algn="l" defTabSz="914400" rtl="0" eaLnBrk="1" fontAlgn="auto" latinLnBrk="0" hangingPunct="1">
               <a:lnSpc>
                 <a:spcPct val="150000"/>
               </a:lnSpc>
@@ -8832,13 +10713,13 @@
                 <a:srgbClr val="000000"/>
               </a:buClr>
               <a:buSzPts val="1400"/>
-              <a:buFont typeface="Noto Sans TC"/>
-              <a:buAutoNum type="arabicPeriod"/>
+              <a:buFont typeface="Arial"/>
+              <a:buNone/>
               <a:tabLst/>
               <a:defRPr/>
             </a:pPr>
             <a:r>
-              <a:rPr kumimoji="0" lang="zh-TW" altLang="en-US" sz="1400" b="0" i="0" u="none" strike="noStrike" kern="0" cap="none" spc="0" normalizeH="0" baseline="0" noProof="0" dirty="0">
+              <a:rPr kumimoji="0" lang="en-US" altLang="zh-TW" sz="1300" b="0" i="0" u="none" strike="noStrike" kern="0" cap="none" spc="0" normalizeH="0" baseline="0" noProof="0" dirty="0">
                 <a:ln>
                   <a:noFill/>
                 </a:ln>
@@ -8853,15 +10734,36 @@
                 <a:cs typeface="Microsoft JhengHei"/>
                 <a:sym typeface="Microsoft JhengHei"/>
               </a:rPr>
-              <a:t>品質控管：</a:t>
-            </a:r>
-            <a:r>
-              <a:rPr kumimoji="0" lang="zh-TW" altLang="en-US" sz="1400" b="0" i="0" u="none" strike="noStrike" kern="0" cap="none" spc="0" normalizeH="0" baseline="0" noProof="0" dirty="0">
+              <a:t>• 品質控管：逾期、漏派、漏催變少，重要待辦與 KPI 缺口不漏接</a:t>
+            </a:r>
+          </a:p>
+          <a:p>
+            <a:pPr marL="0" marR="0" lvl="0" indent="0" algn="l" defTabSz="914400" rtl="0" eaLnBrk="1" fontAlgn="auto" latinLnBrk="0" hangingPunct="1">
+              <a:lnSpc>
+                <a:spcPct val="150000"/>
+              </a:lnSpc>
+              <a:spcBef>
+                <a:spcPts val="0"/>
+              </a:spcBef>
+              <a:spcAft>
+                <a:spcPts val="0"/>
+              </a:spcAft>
+              <a:buClr>
+                <a:srgbClr val="000000"/>
+              </a:buClr>
+              <a:buSzPts val="1400"/>
+              <a:buFont typeface="Arial"/>
+              <a:buNone/>
+              <a:tabLst/>
+              <a:defRPr/>
+            </a:pPr>
+            <a:r>
+              <a:rPr kumimoji="0" lang="en-US" altLang="zh-TW" sz="1300" b="0" i="0" u="none" strike="noStrike" kern="0" cap="none" spc="0" normalizeH="0" baseline="0" noProof="0" dirty="0">
                 <a:ln>
                   <a:noFill/>
                 </a:ln>
                 <a:solidFill>
-                  <a:srgbClr val="1E1E1D"/>
+                  <a:srgbClr val="000000"/>
                 </a:solidFill>
                 <a:effectLst/>
                 <a:uLnTx/>
@@ -8871,26 +10773,11 @@
                 <a:cs typeface="Microsoft JhengHei"/>
                 <a:sym typeface="Microsoft JhengHei"/>
               </a:rPr>
-              <a:t>偵測異常、提前警示、減少人工疏忽</a:t>
-            </a:r>
-            <a:endParaRPr kumimoji="0" sz="1400" b="0" i="0" u="none" strike="noStrike" kern="0" cap="none" spc="0" normalizeH="0" baseline="0" noProof="0" dirty="0">
-              <a:ln>
-                <a:noFill/>
-              </a:ln>
-              <a:solidFill>
-                <a:srgbClr val="000000"/>
-              </a:solidFill>
-              <a:effectLst/>
-              <a:uLnTx/>
-              <a:uFillTx/>
-              <a:latin typeface="Microsoft JhengHei"/>
-              <a:ea typeface="Microsoft JhengHei"/>
-              <a:cs typeface="Microsoft JhengHei"/>
-              <a:sym typeface="Microsoft JhengHei"/>
-            </a:endParaRPr>
+              <a:t>• 效率提升：會議整理、催辦、查數、算缺口由人工改為「PM 確認為主」，大幅省時</a:t>
+            </a:r>
           </a:p>
           <a:p>
-            <a:pPr marL="342900" marR="0" lvl="0" indent="-342900" algn="l" defTabSz="914400" rtl="0" eaLnBrk="1" fontAlgn="auto" latinLnBrk="0" hangingPunct="1">
+            <a:pPr marL="0" marR="0" lvl="0" indent="0" algn="l" defTabSz="914400" rtl="0" eaLnBrk="1" fontAlgn="auto" latinLnBrk="0" hangingPunct="1">
               <a:lnSpc>
                 <a:spcPct val="150000"/>
               </a:lnSpc>
@@ -8904,13 +10791,13 @@
                 <a:srgbClr val="000000"/>
               </a:buClr>
               <a:buSzPts val="1400"/>
-              <a:buFont typeface="Noto Sans TC"/>
-              <a:buAutoNum type="arabicPeriod"/>
+              <a:buFont typeface="Arial"/>
+              <a:buNone/>
               <a:tabLst/>
               <a:defRPr/>
             </a:pPr>
             <a:r>
-              <a:rPr kumimoji="0" lang="zh-TW" altLang="en-US" sz="1400" b="0" i="0" u="none" strike="noStrike" kern="0" cap="none" spc="0" normalizeH="0" baseline="0" noProof="0" dirty="0">
+              <a:rPr kumimoji="0" lang="en-US" altLang="zh-TW" sz="1300" b="0" i="0" u="none" strike="noStrike" kern="0" cap="none" spc="0" normalizeH="0" baseline="0" noProof="0" dirty="0">
                 <a:ln>
                   <a:noFill/>
                 </a:ln>
@@ -8925,15 +10812,15 @@
                 <a:cs typeface="Microsoft JhengHei"/>
                 <a:sym typeface="Microsoft JhengHei"/>
               </a:rPr>
-              <a:t>作業成長量：</a:t>
-            </a:r>
-            <a:r>
-              <a:rPr kumimoji="0" lang="zh-TW" altLang="en-US" sz="1400" b="0" i="0" u="none" strike="noStrike" kern="0" cap="none" spc="0" normalizeH="0" baseline="0" noProof="0" dirty="0">
+              <a:t>• </a:t>
+            </a:r>
+            <a:r>
+              <a:rPr kumimoji="0" lang="en-US" altLang="zh-TW" sz="1300" b="0" i="0" u="none" strike="noStrike" kern="0" cap="none" spc="0" normalizeH="0" baseline="0" noProof="0" dirty="0" err="1">
                 <a:ln>
                   <a:noFill/>
                 </a:ln>
                 <a:solidFill>
-                  <a:srgbClr val="1E1E1D"/>
+                  <a:srgbClr val="000000"/>
                 </a:solidFill>
                 <a:effectLst/>
                 <a:uLnTx/>
@@ -8943,46 +10830,10 @@
                 <a:cs typeface="Microsoft JhengHei"/>
                 <a:sym typeface="Microsoft JhengHei"/>
               </a:rPr>
-              <a:t>預期作業量將上升</a:t>
-            </a:r>
-            <a:endParaRPr kumimoji="0" sz="1400" b="0" i="0" u="none" strike="noStrike" kern="0" cap="none" spc="0" normalizeH="0" baseline="0" noProof="0" dirty="0">
-              <a:ln>
-                <a:noFill/>
-              </a:ln>
-              <a:solidFill>
-                <a:srgbClr val="000000"/>
-              </a:solidFill>
-              <a:effectLst/>
-              <a:uLnTx/>
-              <a:uFillTx/>
-              <a:latin typeface="Microsoft JhengHei"/>
-              <a:ea typeface="Microsoft JhengHei"/>
-              <a:cs typeface="Microsoft JhengHei"/>
-              <a:sym typeface="Microsoft JhengHei"/>
-            </a:endParaRPr>
-          </a:p>
-          <a:p>
-            <a:pPr marL="342900" marR="0" lvl="0" indent="-342900" algn="l" defTabSz="914400" rtl="0" eaLnBrk="1" fontAlgn="auto" latinLnBrk="0" hangingPunct="1">
-              <a:lnSpc>
-                <a:spcPct val="150000"/>
-              </a:lnSpc>
-              <a:spcBef>
-                <a:spcPts val="0"/>
-              </a:spcBef>
-              <a:spcAft>
-                <a:spcPts val="0"/>
-              </a:spcAft>
-              <a:buClr>
-                <a:srgbClr val="000000"/>
-              </a:buClr>
-              <a:buSzPts val="1400"/>
-              <a:buFont typeface="Noto Sans TC"/>
-              <a:buAutoNum type="arabicPeriod"/>
-              <a:tabLst/>
-              <a:defRPr/>
-            </a:pPr>
-            <a:r>
-              <a:rPr kumimoji="0" lang="zh-TW" altLang="en-US" sz="1400" b="0" i="0" u="none" strike="noStrike" kern="0" cap="none" spc="0" normalizeH="0" baseline="0" noProof="0" dirty="0">
+              <a:t>法遵／稽核：決策、派單、查詢全程留痕可回溯</a:t>
+            </a:r>
+            <a:r>
+              <a:rPr kumimoji="0" lang="en-US" altLang="zh-TW" sz="1300" b="0" i="0" u="none" strike="noStrike" kern="0" cap="none" spc="0" normalizeH="0" baseline="0" noProof="0" dirty="0">
                 <a:ln>
                   <a:noFill/>
                 </a:ln>
@@ -8997,15 +10848,15 @@
                 <a:cs typeface="Microsoft JhengHei"/>
                 <a:sym typeface="Microsoft JhengHei"/>
               </a:rPr>
-              <a:t>客戶滿意度：</a:t>
-            </a:r>
-            <a:r>
-              <a:rPr kumimoji="0" lang="zh-TW" altLang="en-US" sz="1400" b="0" i="0" u="none" strike="noStrike" kern="0" cap="none" spc="0" normalizeH="0" baseline="0" noProof="0" dirty="0">
+              <a:t>，</a:t>
+            </a:r>
+            <a:r>
+              <a:rPr kumimoji="0" lang="zh-TW" altLang="en-US" sz="1300" b="0" i="0" u="none" strike="noStrike" kern="0" cap="none" spc="0" normalizeH="0" baseline="0" noProof="0" dirty="0">
                 <a:ln>
                   <a:noFill/>
                 </a:ln>
                 <a:solidFill>
-                  <a:srgbClr val="1E1E1D"/>
+                  <a:srgbClr val="000000"/>
                 </a:solidFill>
                 <a:effectLst/>
                 <a:uLnTx/>
@@ -9015,46 +10866,10 @@
                 <a:cs typeface="Microsoft JhengHei"/>
                 <a:sym typeface="Microsoft JhengHei"/>
               </a:rPr>
-              <a:t>有助於提升回覆效率、服務品質、準確性，進而改善滿意度</a:t>
-            </a:r>
-            <a:endParaRPr kumimoji="0" sz="1400" b="0" i="0" u="none" strike="noStrike" kern="0" cap="none" spc="0" normalizeH="0" baseline="0" noProof="0" dirty="0">
-              <a:ln>
-                <a:noFill/>
-              </a:ln>
-              <a:solidFill>
-                <a:srgbClr val="000000"/>
-              </a:solidFill>
-              <a:effectLst/>
-              <a:uLnTx/>
-              <a:uFillTx/>
-              <a:latin typeface="Microsoft JhengHei"/>
-              <a:ea typeface="Microsoft JhengHei"/>
-              <a:cs typeface="Microsoft JhengHei"/>
-              <a:sym typeface="Microsoft JhengHei"/>
-            </a:endParaRPr>
-          </a:p>
-          <a:p>
-            <a:pPr marL="342900" marR="0" lvl="0" indent="-342900" algn="l" defTabSz="914400" rtl="0" eaLnBrk="1" fontAlgn="auto" latinLnBrk="0" hangingPunct="1">
-              <a:lnSpc>
-                <a:spcPct val="150000"/>
-              </a:lnSpc>
-              <a:spcBef>
-                <a:spcPts val="0"/>
-              </a:spcBef>
-              <a:spcAft>
-                <a:spcPts val="0"/>
-              </a:spcAft>
-              <a:buClr>
-                <a:srgbClr val="000000"/>
-              </a:buClr>
-              <a:buSzPts val="1400"/>
-              <a:buFont typeface="Noto Sans TC"/>
-              <a:buAutoNum type="arabicPeriod"/>
-              <a:tabLst/>
-              <a:defRPr/>
-            </a:pPr>
-            <a:r>
-              <a:rPr kumimoji="0" lang="zh-TW" altLang="en-US" sz="1400" b="0" i="0" u="none" strike="noStrike" kern="0" cap="none" spc="0" normalizeH="0" baseline="0" noProof="0" dirty="0">
+              <a:t>資料存於 </a:t>
+            </a:r>
+            <a:r>
+              <a:rPr kumimoji="0" lang="en-US" altLang="zh-TW" sz="1300" b="0" i="0" u="none" strike="noStrike" kern="0" cap="none" spc="0" normalizeH="0" baseline="0" noProof="0" dirty="0">
                 <a:ln>
                   <a:noFill/>
                 </a:ln>
@@ -9069,10 +10884,10 @@
                 <a:cs typeface="Microsoft JhengHei"/>
                 <a:sym typeface="Microsoft JhengHei"/>
               </a:rPr>
-              <a:t>可規模化</a:t>
-            </a:r>
-            <a:r>
-              <a:rPr kumimoji="0" lang="en-US" altLang="zh-TW" sz="1400" b="0" i="0" u="none" strike="noStrike" kern="0" cap="none" spc="0" normalizeH="0" baseline="0" noProof="0" dirty="0">
+              <a:t>Microsoft Cloud </a:t>
+            </a:r>
+            <a:r>
+              <a:rPr kumimoji="0" lang="zh-TW" altLang="en-US" sz="1300" b="0" i="0" u="none" strike="noStrike" kern="0" cap="none" spc="0" normalizeH="0" baseline="0" noProof="0" dirty="0">
                 <a:ln>
                   <a:noFill/>
                 </a:ln>
@@ -9087,10 +10902,10 @@
                 <a:cs typeface="Microsoft JhengHei"/>
                 <a:sym typeface="Microsoft JhengHei"/>
               </a:rPr>
-              <a:t>/</a:t>
-            </a:r>
-            <a:r>
-              <a:rPr kumimoji="0" lang="zh-TW" altLang="en-US" sz="1400" b="0" i="0" u="none" strike="noStrike" kern="0" cap="none" spc="0" normalizeH="0" baseline="0" noProof="0" dirty="0">
+              <a:t>信任邊界</a:t>
+            </a:r>
+            <a:r>
+              <a:rPr kumimoji="0" lang="en-US" altLang="zh-TW" sz="1300" b="0" i="0" u="none" strike="noStrike" kern="0" cap="none" spc="0" normalizeH="0" baseline="0" noProof="0" dirty="0">
                 <a:ln>
                   <a:noFill/>
                 </a:ln>
@@ -9105,10 +10920,31 @@
                 <a:cs typeface="Microsoft JhengHei"/>
                 <a:sym typeface="Microsoft JhengHei"/>
               </a:rPr>
-              <a:t>複製彈性：其餘共有 </a:t>
-            </a:r>
-            <a:r>
-              <a:rPr kumimoji="0" lang="en-US" altLang="zh-TW" sz="1400" b="0" i="0" u="none" strike="noStrike" kern="0" cap="none" spc="0" normalizeH="0" baseline="0" noProof="0" dirty="0">
+              <a:t>，符合金融業要求</a:t>
+            </a:r>
+          </a:p>
+          <a:p>
+            <a:pPr marL="0" marR="0" lvl="0" indent="0" algn="l" defTabSz="914400" rtl="0" eaLnBrk="1" fontAlgn="auto" latinLnBrk="0" hangingPunct="1">
+              <a:lnSpc>
+                <a:spcPct val="150000"/>
+              </a:lnSpc>
+              <a:spcBef>
+                <a:spcPts val="0"/>
+              </a:spcBef>
+              <a:spcAft>
+                <a:spcPts val="0"/>
+              </a:spcAft>
+              <a:buClr>
+                <a:srgbClr val="000000"/>
+              </a:buClr>
+              <a:buSzPts val="1400"/>
+              <a:buFont typeface="Arial"/>
+              <a:buNone/>
+              <a:tabLst/>
+              <a:defRPr/>
+            </a:pPr>
+            <a:r>
+              <a:rPr kumimoji="0" lang="en-US" altLang="zh-TW" sz="1300" b="0" i="0" u="none" strike="noStrike" kern="0" cap="none" spc="0" normalizeH="0" baseline="0" noProof="0" dirty="0">
                 <a:ln>
                   <a:noFill/>
                 </a:ln>
@@ -9123,10 +10959,31 @@
                 <a:cs typeface="Microsoft JhengHei"/>
                 <a:sym typeface="Microsoft JhengHei"/>
               </a:rPr>
-              <a:t>5 </a:t>
-            </a:r>
-            <a:r>
-              <a:rPr kumimoji="0" lang="zh-TW" altLang="en-US" sz="1400" b="0" i="0" u="none" strike="noStrike" kern="0" cap="none" spc="0" normalizeH="0" baseline="0" noProof="0" dirty="0">
+              <a:t>• 可規模化：數位經營部約 5 位同性質 PM 可沿用，一次建置、多專案共用</a:t>
+            </a:r>
+          </a:p>
+          <a:p>
+            <a:pPr marL="0" marR="0" lvl="0" indent="0" algn="l" defTabSz="914400" rtl="0" eaLnBrk="1" fontAlgn="auto" latinLnBrk="0" hangingPunct="1">
+              <a:lnSpc>
+                <a:spcPct val="150000"/>
+              </a:lnSpc>
+              <a:spcBef>
+                <a:spcPts val="0"/>
+              </a:spcBef>
+              <a:spcAft>
+                <a:spcPts val="0"/>
+              </a:spcAft>
+              <a:buClr>
+                <a:srgbClr val="000000"/>
+              </a:buClr>
+              <a:buSzPts val="1400"/>
+              <a:buFont typeface="Arial"/>
+              <a:buNone/>
+              <a:tabLst/>
+              <a:defRPr/>
+            </a:pPr>
+            <a:r>
+              <a:rPr kumimoji="0" lang="en-US" altLang="zh-TW" sz="1300" b="0" i="0" u="none" strike="noStrike" kern="0" cap="none" spc="0" normalizeH="0" baseline="0" noProof="0" dirty="0">
                 <a:ln>
                   <a:noFill/>
                 </a:ln>
@@ -9141,802 +10998,1232 @@
                 <a:cs typeface="Microsoft JhengHei"/>
                 <a:sym typeface="Microsoft JhengHei"/>
               </a:rPr>
-              <a:t>位同工作屬性之同仁可直接沿用此 </a:t>
-            </a:r>
-            <a:r>
-              <a:rPr kumimoji="0" lang="en-US" altLang="zh-TW" sz="1400" b="0" i="0" u="none" strike="noStrike" kern="0" cap="none" spc="0" normalizeH="0" baseline="0" noProof="0" dirty="0">
-                <a:ln>
-                  <a:noFill/>
-                </a:ln>
-                <a:solidFill>
-                  <a:srgbClr val="000000"/>
-                </a:solidFill>
-                <a:effectLst/>
-                <a:uLnTx/>
-                <a:uFillTx/>
-                <a:latin typeface="Microsoft JhengHei"/>
-                <a:ea typeface="Microsoft JhengHei"/>
-                <a:cs typeface="Microsoft JhengHei"/>
-                <a:sym typeface="Microsoft JhengHei"/>
-              </a:rPr>
-              <a:t>Agent</a:t>
-            </a:r>
-            <a:endParaRPr kumimoji="0" sz="1400" b="0" i="0" u="none" strike="noStrike" kern="0" cap="none" spc="0" normalizeH="0" baseline="0" noProof="0" dirty="0">
-              <a:ln>
-                <a:noFill/>
-              </a:ln>
-              <a:solidFill>
-                <a:srgbClr val="000000"/>
-              </a:solidFill>
-              <a:effectLst/>
-              <a:uLnTx/>
-              <a:uFillTx/>
-              <a:latin typeface="Microsoft JhengHei"/>
-              <a:ea typeface="Microsoft JhengHei"/>
-              <a:cs typeface="Microsoft JhengHei"/>
-              <a:sym typeface="Microsoft JhengHei"/>
-            </a:endParaRPr>
-          </a:p>
-          <a:p>
-            <a:pPr marL="342900" marR="0" lvl="0" indent="-342900" algn="l" defTabSz="914400" rtl="0" eaLnBrk="1" fontAlgn="auto" latinLnBrk="0" hangingPunct="1">
-              <a:lnSpc>
-                <a:spcPct val="150000"/>
-              </a:lnSpc>
-              <a:spcBef>
-                <a:spcPts val="0"/>
-              </a:spcBef>
-              <a:spcAft>
-                <a:spcPts val="0"/>
-              </a:spcAft>
-              <a:buClr>
-                <a:srgbClr val="000000"/>
-              </a:buClr>
-              <a:buSzPts val="1400"/>
-              <a:buFont typeface="Noto Sans TC"/>
-              <a:buAutoNum type="arabicPeriod"/>
-              <a:tabLst/>
-              <a:defRPr/>
-            </a:pPr>
-            <a:r>
-              <a:rPr kumimoji="0" lang="zh-TW" altLang="en-US" sz="1400" b="0" i="0" u="none" strike="noStrike" kern="0" cap="none" spc="0" normalizeH="0" baseline="0" noProof="0" dirty="0">
-                <a:ln>
-                  <a:noFill/>
-                </a:ln>
-                <a:solidFill>
-                  <a:srgbClr val="000000"/>
-                </a:solidFill>
-                <a:effectLst/>
-                <a:uLnTx/>
-                <a:uFillTx/>
-                <a:latin typeface="Microsoft JhengHei"/>
-                <a:ea typeface="Microsoft JhengHei"/>
-                <a:cs typeface="Microsoft JhengHei"/>
-                <a:sym typeface="Microsoft JhengHei"/>
-              </a:rPr>
-              <a:t>法遵</a:t>
-            </a:r>
-            <a:r>
-              <a:rPr kumimoji="0" lang="en-US" altLang="zh-TW" sz="1400" b="0" i="0" u="none" strike="noStrike" kern="0" cap="none" spc="0" normalizeH="0" baseline="0" noProof="0" dirty="0">
-                <a:ln>
-                  <a:noFill/>
-                </a:ln>
-                <a:solidFill>
-                  <a:srgbClr val="000000"/>
-                </a:solidFill>
-                <a:effectLst/>
-                <a:uLnTx/>
-                <a:uFillTx/>
-                <a:latin typeface="Microsoft JhengHei"/>
-                <a:ea typeface="Microsoft JhengHei"/>
-                <a:cs typeface="Microsoft JhengHei"/>
-                <a:sym typeface="Microsoft JhengHei"/>
-              </a:rPr>
-              <a:t>/</a:t>
-            </a:r>
-            <a:r>
-              <a:rPr kumimoji="0" lang="zh-TW" altLang="en-US" sz="1400" b="0" i="0" u="none" strike="noStrike" kern="0" cap="none" spc="0" normalizeH="0" baseline="0" noProof="0" dirty="0">
-                <a:ln>
-                  <a:noFill/>
-                </a:ln>
-                <a:solidFill>
-                  <a:srgbClr val="000000"/>
-                </a:solidFill>
-                <a:effectLst/>
-                <a:uLnTx/>
-                <a:uFillTx/>
-                <a:latin typeface="Microsoft JhengHei"/>
-                <a:ea typeface="Microsoft JhengHei"/>
-                <a:cs typeface="Microsoft JhengHei"/>
-                <a:sym typeface="Microsoft JhengHei"/>
-              </a:rPr>
-              <a:t>稽核：該流程與金融業法規相關，可節省人力處理對照稽核之項目</a:t>
-            </a:r>
-            <a:endParaRPr kumimoji="0" sz="1400" b="0" i="0" u="none" strike="noStrike" kern="0" cap="none" spc="0" normalizeH="0" baseline="0" noProof="0" dirty="0">
-              <a:ln>
-                <a:noFill/>
-              </a:ln>
-              <a:solidFill>
-                <a:srgbClr val="000000"/>
-              </a:solidFill>
-              <a:effectLst/>
-              <a:uLnTx/>
-              <a:uFillTx/>
-              <a:latin typeface="Microsoft JhengHei"/>
-              <a:ea typeface="Microsoft JhengHei"/>
-              <a:cs typeface="Microsoft JhengHei"/>
-              <a:sym typeface="Microsoft JhengHei"/>
-            </a:endParaRPr>
-          </a:p>
-          <a:p>
-            <a:pPr marL="342900" marR="0" lvl="0" indent="-342900" algn="l" defTabSz="914400" rtl="0" eaLnBrk="1" fontAlgn="auto" latinLnBrk="0" hangingPunct="1">
-              <a:lnSpc>
-                <a:spcPct val="150000"/>
-              </a:lnSpc>
-              <a:spcBef>
-                <a:spcPts val="0"/>
-              </a:spcBef>
-              <a:spcAft>
-                <a:spcPts val="0"/>
-              </a:spcAft>
-              <a:buClr>
-                <a:srgbClr val="000000"/>
-              </a:buClr>
-              <a:buSzPts val="1400"/>
-              <a:buFont typeface="Noto Sans TC"/>
-              <a:buAutoNum type="arabicPeriod"/>
-              <a:tabLst/>
-              <a:defRPr/>
-            </a:pPr>
-            <a:r>
-              <a:rPr kumimoji="0" lang="zh-TW" altLang="en-US" sz="1400" b="0" i="0" u="none" strike="noStrike" kern="0" cap="none" spc="0" normalizeH="0" baseline="0" noProof="0" dirty="0">
-                <a:ln>
-                  <a:noFill/>
-                </a:ln>
-                <a:solidFill>
-                  <a:srgbClr val="000000"/>
-                </a:solidFill>
-                <a:effectLst/>
-                <a:uLnTx/>
-                <a:uFillTx/>
-                <a:latin typeface="Microsoft JhengHei"/>
-                <a:ea typeface="Microsoft JhengHei"/>
-                <a:cs typeface="Microsoft JhengHei"/>
-                <a:sym typeface="Microsoft JhengHei"/>
-              </a:rPr>
-              <a:t>可能風險損失預防：可避免公司因重大疏失而賠償巨額</a:t>
-            </a:r>
-            <a:endParaRPr kumimoji="0" sz="1400" b="0" i="0" u="none" strike="noStrike" kern="0" cap="none" spc="0" normalizeH="0" baseline="0" noProof="0" dirty="0">
-              <a:ln>
-                <a:noFill/>
-              </a:ln>
-              <a:solidFill>
-                <a:srgbClr val="000000"/>
-              </a:solidFill>
-              <a:effectLst/>
-              <a:uLnTx/>
-              <a:uFillTx/>
-              <a:latin typeface="Microsoft JhengHei"/>
-              <a:ea typeface="Microsoft JhengHei"/>
-              <a:cs typeface="Microsoft JhengHei"/>
-              <a:sym typeface="Microsoft JhengHei"/>
-            </a:endParaRPr>
+              <a:t>• 風險預防：關鍵事項不漏辦、數據口徑受控（白名單），降低因疏失造成的損失</a:t>
+            </a:r>
           </a:p>
         </p:txBody>
       </p:sp>
       <p:graphicFrame>
         <p:nvGraphicFramePr>
-          <p:cNvPr id="87" name="Google Shape;87;g3e9888fc26a_0_5"/>
-          <p:cNvGraphicFramePr/>
-          <p:nvPr/>
+          <p:cNvPr id="2" name="表格 1">
+            <a:extLst>
+              <a:ext uri="{FF2B5EF4-FFF2-40B4-BE49-F238E27FC236}">
+                <a16:creationId xmlns:a16="http://schemas.microsoft.com/office/drawing/2014/main" id="{3E0355A8-9D93-E87D-80AD-AF4B413A3B53}"/>
+              </a:ext>
+            </a:extLst>
+          </p:cNvPr>
+          <p:cNvGraphicFramePr>
+            <a:graphicFrameLocks noGrp="1"/>
+          </p:cNvGraphicFramePr>
+          <p:nvPr>
+            <p:extLst>
+              <p:ext uri="{D42A27DB-BD31-4B8C-83A1-F6EECF244321}">
+                <p14:modId xmlns:p14="http://schemas.microsoft.com/office/powerpoint/2010/main" val="3083688454"/>
+              </p:ext>
+            </p:extLst>
+          </p:nvPr>
         </p:nvGraphicFramePr>
         <p:xfrm>
-          <a:off x="1178806" y="1852648"/>
-          <a:ext cx="9107250" cy="1112550"/>
+          <a:off x="368300" y="1371600"/>
+          <a:ext cx="11455400" cy="2057400"/>
         </p:xfrm>
         <a:graphic>
           <a:graphicData uri="http://schemas.openxmlformats.org/drawingml/2006/table">
             <a:tbl>
-              <a:tblPr firstRow="1" bandRow="1">
-                <a:noFill/>
+              <a:tblPr>
+                <a:tableStyleId>{5C22544A-7EE6-4342-B048-85BDC9FD1C3A}</a:tableStyleId>
               </a:tblPr>
               <a:tblGrid>
-                <a:gridCol w="1821450">
+                <a:gridCol w="3175000">
                   <a:extLst>
                     <a:ext uri="{9D8B030D-6E8A-4147-A177-3AD203B41FA5}">
-                      <a16:colId xmlns:a16="http://schemas.microsoft.com/office/drawing/2014/main" val="20000"/>
+                      <a16:colId xmlns:a16="http://schemas.microsoft.com/office/drawing/2014/main" val="2292066143"/>
                     </a:ext>
                   </a:extLst>
                 </a:gridCol>
-                <a:gridCol w="2093600">
+                <a:gridCol w="1905000">
                   <a:extLst>
                     <a:ext uri="{9D8B030D-6E8A-4147-A177-3AD203B41FA5}">
-                      <a16:colId xmlns:a16="http://schemas.microsoft.com/office/drawing/2014/main" val="20001"/>
+                      <a16:colId xmlns:a16="http://schemas.microsoft.com/office/drawing/2014/main" val="3415940792"/>
                     </a:ext>
                   </a:extLst>
                 </a:gridCol>
-                <a:gridCol w="1549300">
+                <a:gridCol w="1905000">
                   <a:extLst>
                     <a:ext uri="{9D8B030D-6E8A-4147-A177-3AD203B41FA5}">
-                      <a16:colId xmlns:a16="http://schemas.microsoft.com/office/drawing/2014/main" val="20002"/>
+                      <a16:colId xmlns:a16="http://schemas.microsoft.com/office/drawing/2014/main" val="1566066609"/>
                     </a:ext>
                   </a:extLst>
                 </a:gridCol>
-                <a:gridCol w="1821450">
+                <a:gridCol w="2260600">
                   <a:extLst>
                     <a:ext uri="{9D8B030D-6E8A-4147-A177-3AD203B41FA5}">
-                      <a16:colId xmlns:a16="http://schemas.microsoft.com/office/drawing/2014/main" val="20003"/>
+                      <a16:colId xmlns:a16="http://schemas.microsoft.com/office/drawing/2014/main" val="3417087923"/>
                     </a:ext>
                   </a:extLst>
                 </a:gridCol>
-                <a:gridCol w="1821450">
+                <a:gridCol w="2209800">
                   <a:extLst>
                     <a:ext uri="{9D8B030D-6E8A-4147-A177-3AD203B41FA5}">
-                      <a16:colId xmlns:a16="http://schemas.microsoft.com/office/drawing/2014/main" val="20004"/>
+                      <a16:colId xmlns:a16="http://schemas.microsoft.com/office/drawing/2014/main" val="2066184170"/>
                     </a:ext>
                   </a:extLst>
                 </a:gridCol>
               </a:tblGrid>
-              <a:tr h="370850">
+              <a:tr h="342900">
                 <a:tc>
                   <a:txBody>
                     <a:bodyPr/>
                     <a:lstStyle/>
                     <a:p>
-                      <a:pPr marL="0" marR="0" lvl="0" indent="0" algn="l" rtl="0">
-                        <a:lnSpc>
-                          <a:spcPct val="100000"/>
-                        </a:lnSpc>
-                        <a:spcBef>
-                          <a:spcPts val="0"/>
-                        </a:spcBef>
-                        <a:spcAft>
-                          <a:spcPts val="0"/>
-                        </a:spcAft>
-                        <a:buClr>
-                          <a:srgbClr val="000000"/>
-                        </a:buClr>
-                        <a:buSzPts val="1400"/>
-                        <a:buFont typeface="Arial"/>
-                        <a:buNone/>
-                      </a:pPr>
+                      <a:pPr algn="l"/>
                       <a:r>
-                        <a:rPr lang="zh-TW" sz="1400" u="none" strike="noStrike" cap="none">
-                          <a:latin typeface="Microsoft JhengHei"/>
-                          <a:ea typeface="Microsoft JhengHei"/>
-                          <a:cs typeface="Microsoft JhengHei"/>
-                          <a:sym typeface="Microsoft JhengHei"/>
+                        <a:rPr lang="zh-TW" altLang="en-US" sz="1200" b="1">
+                          <a:solidFill>
+                            <a:srgbClr val="FFFFFF"/>
+                          </a:solidFill>
+                          <a:latin typeface="Microsoft JhengHei" panose="020B0604030504040204" pitchFamily="34" charset="-120"/>
+                          <a:ea typeface="Microsoft JhengHei" panose="020B0604030504040204" pitchFamily="34" charset="-120"/>
                         </a:rPr>
-                        <a:t>[量化效益]</a:t>
+                        <a:t>任務（</a:t>
                       </a:r>
-                      <a:endParaRPr sz="1400" u="none" strike="noStrike" cap="none">
-                        <a:latin typeface="Microsoft JhengHei"/>
-                        <a:ea typeface="Microsoft JhengHei"/>
-                        <a:cs typeface="Microsoft JhengHei"/>
-                        <a:sym typeface="Microsoft JhengHei"/>
-                      </a:endParaRPr>
+                      <a:r>
+                        <a:rPr lang="en-US" altLang="zh-TW" sz="1200" b="1">
+                          <a:solidFill>
+                            <a:srgbClr val="FFFFFF"/>
+                          </a:solidFill>
+                          <a:latin typeface="Microsoft JhengHei" panose="020B0604030504040204" pitchFamily="34" charset="-120"/>
+                          <a:ea typeface="Microsoft JhengHei" panose="020B0604030504040204" pitchFamily="34" charset="-120"/>
+                        </a:rPr>
+                        <a:t>Agent</a:t>
+                      </a:r>
+                      <a:r>
+                        <a:rPr lang="zh-TW" altLang="en-US" sz="1200" b="1">
+                          <a:solidFill>
+                            <a:srgbClr val="FFFFFF"/>
+                          </a:solidFill>
+                          <a:latin typeface="Microsoft JhengHei" panose="020B0604030504040204" pitchFamily="34" charset="-120"/>
+                          <a:ea typeface="Microsoft JhengHei" panose="020B0604030504040204" pitchFamily="34" charset="-120"/>
+                        </a:rPr>
+                        <a:t>）</a:t>
+                      </a:r>
                     </a:p>
                   </a:txBody>
-                  <a:tcPr marL="91450" marR="91450" marT="45725" marB="45725" anchor="ctr"/>
+                  <a:tcPr anchor="ctr">
+                    <a:solidFill>
+                      <a:srgbClr val="CC492B"/>
+                    </a:solidFill>
+                  </a:tcPr>
                 </a:tc>
                 <a:tc>
                   <a:txBody>
                     <a:bodyPr/>
                     <a:lstStyle/>
                     <a:p>
-                      <a:pPr marL="0" marR="0" lvl="0" indent="0" algn="l" rtl="0">
-                        <a:lnSpc>
-                          <a:spcPct val="100000"/>
-                        </a:lnSpc>
-                        <a:spcBef>
-                          <a:spcPts val="0"/>
-                        </a:spcBef>
-                        <a:spcAft>
-                          <a:spcPts val="0"/>
-                        </a:spcAft>
-                        <a:buClr>
-                          <a:srgbClr val="000000"/>
-                        </a:buClr>
-                        <a:buSzPts val="1400"/>
-                        <a:buFont typeface="Arial"/>
-                        <a:buNone/>
-                      </a:pPr>
+                      <a:pPr algn="ctr"/>
                       <a:r>
-                        <a:rPr lang="zh-TW" sz="1400" u="none" strike="noStrike" cap="none">
-                          <a:latin typeface="Microsoft JhengHei"/>
-                          <a:ea typeface="Microsoft JhengHei"/>
-                          <a:cs typeface="Microsoft JhengHei"/>
-                          <a:sym typeface="Microsoft JhengHei"/>
+                        <a:rPr lang="zh-TW" altLang="en-US" sz="1200" b="1">
+                          <a:solidFill>
+                            <a:srgbClr val="FFFFFF"/>
+                          </a:solidFill>
+                          <a:latin typeface="Microsoft JhengHei" panose="020B0604030504040204" pitchFamily="34" charset="-120"/>
+                          <a:ea typeface="Microsoft JhengHei" panose="020B0604030504040204" pitchFamily="34" charset="-120"/>
                         </a:rPr>
-                        <a:t>頻率（一年處理幾次）</a:t>
+                        <a:t>頻率（次</a:t>
                       </a:r>
-                      <a:endParaRPr sz="1400" u="none" strike="noStrike" cap="none">
-                        <a:latin typeface="Microsoft JhengHei"/>
-                        <a:ea typeface="Microsoft JhengHei"/>
-                        <a:cs typeface="Microsoft JhengHei"/>
-                        <a:sym typeface="Microsoft JhengHei"/>
-                      </a:endParaRPr>
+                      <a:r>
+                        <a:rPr lang="en-US" altLang="zh-TW" sz="1200" b="1">
+                          <a:solidFill>
+                            <a:srgbClr val="FFFFFF"/>
+                          </a:solidFill>
+                          <a:latin typeface="Microsoft JhengHei" panose="020B0604030504040204" pitchFamily="34" charset="-120"/>
+                          <a:ea typeface="Microsoft JhengHei" panose="020B0604030504040204" pitchFamily="34" charset="-120"/>
+                        </a:rPr>
+                        <a:t>/</a:t>
+                      </a:r>
+                      <a:r>
+                        <a:rPr lang="zh-TW" altLang="en-US" sz="1200" b="1">
+                          <a:solidFill>
+                            <a:srgbClr val="FFFFFF"/>
+                          </a:solidFill>
+                          <a:latin typeface="Microsoft JhengHei" panose="020B0604030504040204" pitchFamily="34" charset="-120"/>
+                          <a:ea typeface="Microsoft JhengHei" panose="020B0604030504040204" pitchFamily="34" charset="-120"/>
+                        </a:rPr>
+                        <a:t>年）</a:t>
+                      </a:r>
                     </a:p>
                   </a:txBody>
-                  <a:tcPr marL="91450" marR="91450" marT="45725" marB="45725" anchor="ctr"/>
+                  <a:tcPr anchor="ctr">
+                    <a:solidFill>
+                      <a:srgbClr val="CC492B"/>
+                    </a:solidFill>
+                  </a:tcPr>
                 </a:tc>
                 <a:tc>
                   <a:txBody>
                     <a:bodyPr/>
                     <a:lstStyle/>
                     <a:p>
-                      <a:pPr marL="0" marR="0" lvl="0" indent="0" algn="l" rtl="0">
-                        <a:lnSpc>
-                          <a:spcPct val="100000"/>
-                        </a:lnSpc>
-                        <a:spcBef>
-                          <a:spcPts val="0"/>
-                        </a:spcBef>
-                        <a:spcAft>
-                          <a:spcPts val="0"/>
-                        </a:spcAft>
-                        <a:buClr>
-                          <a:srgbClr val="000000"/>
-                        </a:buClr>
-                        <a:buSzPts val="1400"/>
-                        <a:buFont typeface="Arial"/>
-                        <a:buNone/>
-                      </a:pPr>
+                      <a:pPr algn="ctr"/>
                       <a:r>
-                        <a:rPr lang="zh-TW" sz="1400" u="none" strike="noStrike" cap="none">
-                          <a:latin typeface="Microsoft JhengHei"/>
-                          <a:ea typeface="Microsoft JhengHei"/>
-                          <a:cs typeface="Microsoft JhengHei"/>
-                          <a:sym typeface="Microsoft JhengHei"/>
+                        <a:rPr lang="zh-TW" altLang="en-US" sz="1200" b="1">
+                          <a:solidFill>
+                            <a:srgbClr val="FFFFFF"/>
+                          </a:solidFill>
+                          <a:latin typeface="Microsoft JhengHei" panose="020B0604030504040204" pitchFamily="34" charset="-120"/>
+                          <a:ea typeface="Microsoft JhengHei" panose="020B0604030504040204" pitchFamily="34" charset="-120"/>
                         </a:rPr>
-                        <a:t>資料筆數</a:t>
+                        <a:t>原本（分</a:t>
                       </a:r>
-                      <a:endParaRPr sz="1400" u="none" strike="noStrike" cap="none">
-                        <a:latin typeface="Microsoft JhengHei"/>
-                        <a:ea typeface="Microsoft JhengHei"/>
-                        <a:cs typeface="Microsoft JhengHei"/>
-                        <a:sym typeface="Microsoft JhengHei"/>
-                      </a:endParaRPr>
+                      <a:r>
+                        <a:rPr lang="en-US" altLang="zh-TW" sz="1200" b="1">
+                          <a:solidFill>
+                            <a:srgbClr val="FFFFFF"/>
+                          </a:solidFill>
+                          <a:latin typeface="Microsoft JhengHei" panose="020B0604030504040204" pitchFamily="34" charset="-120"/>
+                          <a:ea typeface="Microsoft JhengHei" panose="020B0604030504040204" pitchFamily="34" charset="-120"/>
+                        </a:rPr>
+                        <a:t>/</a:t>
+                      </a:r>
+                      <a:r>
+                        <a:rPr lang="zh-TW" altLang="en-US" sz="1200" b="1">
+                          <a:solidFill>
+                            <a:srgbClr val="FFFFFF"/>
+                          </a:solidFill>
+                          <a:latin typeface="Microsoft JhengHei" panose="020B0604030504040204" pitchFamily="34" charset="-120"/>
+                          <a:ea typeface="Microsoft JhengHei" panose="020B0604030504040204" pitchFamily="34" charset="-120"/>
+                        </a:rPr>
+                        <a:t>次）</a:t>
+                      </a:r>
                     </a:p>
                   </a:txBody>
-                  <a:tcPr marL="91450" marR="91450" marT="45725" marB="45725" anchor="ctr"/>
+                  <a:tcPr anchor="ctr">
+                    <a:solidFill>
+                      <a:srgbClr val="CC492B"/>
+                    </a:solidFill>
+                  </a:tcPr>
                 </a:tc>
                 <a:tc>
                   <a:txBody>
                     <a:bodyPr/>
                     <a:lstStyle/>
                     <a:p>
-                      <a:pPr marL="0" marR="0" lvl="0" indent="0" algn="l" rtl="0">
-                        <a:lnSpc>
-                          <a:spcPct val="100000"/>
-                        </a:lnSpc>
-                        <a:spcBef>
-                          <a:spcPts val="0"/>
-                        </a:spcBef>
-                        <a:spcAft>
-                          <a:spcPts val="0"/>
-                        </a:spcAft>
-                        <a:buClr>
-                          <a:srgbClr val="000000"/>
-                        </a:buClr>
-                        <a:buSzPts val="1400"/>
-                        <a:buFont typeface="Arial"/>
-                        <a:buNone/>
-                      </a:pPr>
+                      <a:pPr algn="ctr"/>
                       <a:r>
-                        <a:rPr lang="zh-TW" sz="1400" u="none" strike="noStrike" cap="none">
-                          <a:latin typeface="Microsoft JhengHei"/>
-                          <a:ea typeface="Microsoft JhengHei"/>
-                          <a:cs typeface="Microsoft JhengHei"/>
-                          <a:sym typeface="Microsoft JhengHei"/>
+                        <a:rPr lang="zh-TW" altLang="en-US" sz="1200" b="1">
+                          <a:solidFill>
+                            <a:srgbClr val="FFFFFF"/>
+                          </a:solidFill>
+                          <a:latin typeface="Microsoft JhengHei" panose="020B0604030504040204" pitchFamily="34" charset="-120"/>
+                          <a:ea typeface="Microsoft JhengHei" panose="020B0604030504040204" pitchFamily="34" charset="-120"/>
                         </a:rPr>
-                        <a:t>時間 (分鐘/單筆)</a:t>
+                        <a:t>透過 </a:t>
                       </a:r>
-                      <a:endParaRPr sz="1400" u="none" strike="noStrike" cap="none">
-                        <a:latin typeface="Microsoft JhengHei"/>
-                        <a:ea typeface="Microsoft JhengHei"/>
-                        <a:cs typeface="Microsoft JhengHei"/>
-                        <a:sym typeface="Microsoft JhengHei"/>
-                      </a:endParaRPr>
+                      <a:r>
+                        <a:rPr lang="en-US" altLang="zh-TW" sz="1200" b="1">
+                          <a:solidFill>
+                            <a:srgbClr val="FFFFFF"/>
+                          </a:solidFill>
+                          <a:latin typeface="Microsoft JhengHei" panose="020B0604030504040204" pitchFamily="34" charset="-120"/>
+                          <a:ea typeface="Microsoft JhengHei" panose="020B0604030504040204" pitchFamily="34" charset="-120"/>
+                        </a:rPr>
+                        <a:t>Agent</a:t>
+                      </a:r>
+                      <a:r>
+                        <a:rPr lang="zh-TW" altLang="en-US" sz="1200" b="1">
+                          <a:solidFill>
+                            <a:srgbClr val="FFFFFF"/>
+                          </a:solidFill>
+                          <a:latin typeface="Microsoft JhengHei" panose="020B0604030504040204" pitchFamily="34" charset="-120"/>
+                          <a:ea typeface="Microsoft JhengHei" panose="020B0604030504040204" pitchFamily="34" charset="-120"/>
+                        </a:rPr>
+                        <a:t>（分</a:t>
+                      </a:r>
+                      <a:r>
+                        <a:rPr lang="en-US" altLang="zh-TW" sz="1200" b="1">
+                          <a:solidFill>
+                            <a:srgbClr val="FFFFFF"/>
+                          </a:solidFill>
+                          <a:latin typeface="Microsoft JhengHei" panose="020B0604030504040204" pitchFamily="34" charset="-120"/>
+                          <a:ea typeface="Microsoft JhengHei" panose="020B0604030504040204" pitchFamily="34" charset="-120"/>
+                        </a:rPr>
+                        <a:t>/</a:t>
+                      </a:r>
+                      <a:r>
+                        <a:rPr lang="zh-TW" altLang="en-US" sz="1200" b="1">
+                          <a:solidFill>
+                            <a:srgbClr val="FFFFFF"/>
+                          </a:solidFill>
+                          <a:latin typeface="Microsoft JhengHei" panose="020B0604030504040204" pitchFamily="34" charset="-120"/>
+                          <a:ea typeface="Microsoft JhengHei" panose="020B0604030504040204" pitchFamily="34" charset="-120"/>
+                        </a:rPr>
+                        <a:t>次）</a:t>
+                      </a:r>
                     </a:p>
                   </a:txBody>
-                  <a:tcPr marL="91450" marR="91450" marT="45725" marB="45725" anchor="ctr"/>
+                  <a:tcPr anchor="ctr">
+                    <a:solidFill>
+                      <a:srgbClr val="CC492B"/>
+                    </a:solidFill>
+                  </a:tcPr>
                 </a:tc>
                 <a:tc>
                   <a:txBody>
                     <a:bodyPr/>
                     <a:lstStyle/>
                     <a:p>
-                      <a:pPr marL="0" marR="0" lvl="0" indent="0" algn="l" rtl="0">
-                        <a:lnSpc>
-                          <a:spcPct val="100000"/>
-                        </a:lnSpc>
-                        <a:spcBef>
-                          <a:spcPts val="0"/>
-                        </a:spcBef>
-                        <a:spcAft>
-                          <a:spcPts val="0"/>
-                        </a:spcAft>
-                        <a:buClr>
-                          <a:srgbClr val="000000"/>
-                        </a:buClr>
-                        <a:buSzPts val="1400"/>
-                        <a:buFont typeface="Arial"/>
-                        <a:buNone/>
-                      </a:pPr>
+                      <a:pPr algn="ctr"/>
                       <a:r>
-                        <a:rPr lang="zh-TW">
-                          <a:latin typeface="Microsoft JhengHei"/>
-                          <a:ea typeface="Microsoft JhengHei"/>
-                          <a:cs typeface="Microsoft JhengHei"/>
-                          <a:sym typeface="Microsoft JhengHei"/>
+                        <a:rPr lang="zh-TW" altLang="en-US" sz="1200" b="1">
+                          <a:solidFill>
+                            <a:srgbClr val="FFFFFF"/>
+                          </a:solidFill>
+                          <a:latin typeface="Microsoft JhengHei" panose="020B0604030504040204" pitchFamily="34" charset="-120"/>
+                          <a:ea typeface="Microsoft JhengHei" panose="020B0604030504040204" pitchFamily="34" charset="-120"/>
                         </a:rPr>
-                        <a:t>其他補充</a:t>
+                        <a:t>年省工時</a:t>
                       </a:r>
-                      <a:endParaRPr>
-                        <a:latin typeface="Microsoft JhengHei"/>
-                        <a:ea typeface="Microsoft JhengHei"/>
-                        <a:cs typeface="Microsoft JhengHei"/>
-                        <a:sym typeface="Microsoft JhengHei"/>
-                      </a:endParaRPr>
                     </a:p>
                   </a:txBody>
-                  <a:tcPr marL="91450" marR="91450" marT="45725" marB="45725" anchor="ctr"/>
+                  <a:tcPr anchor="ctr">
+                    <a:solidFill>
+                      <a:srgbClr val="CC492B"/>
+                    </a:solidFill>
+                  </a:tcPr>
                 </a:tc>
                 <a:extLst>
                   <a:ext uri="{0D108BD9-81ED-4DB2-BD59-A6C34878D82A}">
-                    <a16:rowId xmlns:a16="http://schemas.microsoft.com/office/drawing/2014/main" val="10000"/>
+                    <a16:rowId xmlns:a16="http://schemas.microsoft.com/office/drawing/2014/main" val="1345542854"/>
                   </a:ext>
                 </a:extLst>
               </a:tr>
-              <a:tr h="370850">
+              <a:tr h="342900">
                 <a:tc>
                   <a:txBody>
                     <a:bodyPr/>
                     <a:lstStyle/>
                     <a:p>
-                      <a:pPr marL="0" marR="0" lvl="0" indent="0" algn="l" rtl="0">
-                        <a:lnSpc>
-                          <a:spcPct val="100000"/>
-                        </a:lnSpc>
-                        <a:spcBef>
-                          <a:spcPts val="0"/>
-                        </a:spcBef>
-                        <a:spcAft>
-                          <a:spcPts val="0"/>
-                        </a:spcAft>
-                        <a:buClr>
-                          <a:srgbClr val="000000"/>
-                        </a:buClr>
-                        <a:buSzPts val="1400"/>
-                        <a:buFont typeface="Arial"/>
-                        <a:buNone/>
-                      </a:pPr>
+                      <a:pPr algn="l"/>
                       <a:r>
-                        <a:rPr lang="zh-TW" sz="1400" u="none" strike="noStrike" cap="none" dirty="0">
-                          <a:latin typeface="Microsoft JhengHei"/>
-                          <a:ea typeface="Microsoft JhengHei"/>
-                          <a:cs typeface="Microsoft JhengHei"/>
-                          <a:sym typeface="Microsoft JhengHei"/>
+                        <a:rPr lang="zh-TW" altLang="en-US" sz="1200">
+                          <a:solidFill>
+                            <a:srgbClr val="000000"/>
+                          </a:solidFill>
+                          <a:latin typeface="Microsoft JhengHei" panose="020B0604030504040204" pitchFamily="34" charset="-120"/>
+                          <a:ea typeface="Microsoft JhengHei" panose="020B0604030504040204" pitchFamily="34" charset="-120"/>
                         </a:rPr>
-                        <a:t>原本</a:t>
+                        <a:t>會議記錄｜結論待辦整理</a:t>
                       </a:r>
-                      <a:endParaRPr sz="1400" u="none" strike="noStrike" cap="none" dirty="0">
-                        <a:latin typeface="Microsoft JhengHei"/>
-                        <a:ea typeface="Microsoft JhengHei"/>
-                        <a:cs typeface="Microsoft JhengHei"/>
-                        <a:sym typeface="Microsoft JhengHei"/>
-                      </a:endParaRPr>
                     </a:p>
                   </a:txBody>
-                  <a:tcPr marL="91450" marR="91450" marT="45725" marB="45725" anchor="ctr"/>
+                  <a:tcPr anchor="ctr">
+                    <a:solidFill>
+                      <a:srgbClr val="FFFFFF"/>
+                    </a:solidFill>
+                  </a:tcPr>
                 </a:tc>
                 <a:tc>
                   <a:txBody>
                     <a:bodyPr/>
                     <a:lstStyle/>
                     <a:p>
-                      <a:pPr marL="0" marR="0" lvl="0" indent="0" algn="l" rtl="0">
-                        <a:lnSpc>
-                          <a:spcPct val="100000"/>
-                        </a:lnSpc>
-                        <a:spcBef>
-                          <a:spcPts val="0"/>
-                        </a:spcBef>
-                        <a:spcAft>
-                          <a:spcPts val="0"/>
-                        </a:spcAft>
-                        <a:buClr>
+                      <a:pPr algn="ctr"/>
+                      <a:r>
+                        <a:rPr lang="en-US" altLang="zh-TW" sz="1200" b="0">
+                          <a:solidFill>
+                            <a:srgbClr val="000000"/>
+                          </a:solidFill>
+                          <a:latin typeface="Microsoft JhengHei" panose="020B0604030504040204" pitchFamily="34" charset="-120"/>
+                          <a:ea typeface="Microsoft JhengHei" panose="020B0604030504040204" pitchFamily="34" charset="-120"/>
+                        </a:rPr>
+                        <a:t>100</a:t>
+                      </a:r>
+                      <a:endParaRPr lang="zh-TW" altLang="en-US" sz="1200" b="0">
+                        <a:solidFill>
                           <a:srgbClr val="000000"/>
-                        </a:buClr>
-                        <a:buSzPts val="1400"/>
-                        <a:buFont typeface="Arial"/>
-                        <a:buNone/>
-                      </a:pPr>
-                      <a:endParaRPr sz="1400" u="none" strike="noStrike" cap="none">
-                        <a:latin typeface="Microsoft JhengHei"/>
-                        <a:ea typeface="Microsoft JhengHei"/>
-                        <a:cs typeface="Microsoft JhengHei"/>
-                        <a:sym typeface="Microsoft JhengHei"/>
+                        </a:solidFill>
+                        <a:latin typeface="Microsoft JhengHei" panose="020B0604030504040204" pitchFamily="34" charset="-120"/>
+                        <a:ea typeface="Microsoft JhengHei" panose="020B0604030504040204" pitchFamily="34" charset="-120"/>
                       </a:endParaRPr>
                     </a:p>
                   </a:txBody>
-                  <a:tcPr marL="91450" marR="91450" marT="45725" marB="45725" anchor="ctr"/>
+                  <a:tcPr anchor="ctr">
+                    <a:solidFill>
+                      <a:srgbClr val="FFFFFF"/>
+                    </a:solidFill>
+                  </a:tcPr>
                 </a:tc>
                 <a:tc>
                   <a:txBody>
                     <a:bodyPr/>
                     <a:lstStyle/>
                     <a:p>
-                      <a:pPr marL="0" marR="0" lvl="0" indent="0" algn="l" rtl="0">
-                        <a:lnSpc>
-                          <a:spcPct val="100000"/>
-                        </a:lnSpc>
-                        <a:spcBef>
-                          <a:spcPts val="0"/>
-                        </a:spcBef>
-                        <a:spcAft>
-                          <a:spcPts val="0"/>
-                        </a:spcAft>
-                        <a:buClr>
+                      <a:pPr algn="ctr"/>
+                      <a:r>
+                        <a:rPr lang="en-US" altLang="zh-TW" sz="1200" b="0">
+                          <a:solidFill>
+                            <a:srgbClr val="000000"/>
+                          </a:solidFill>
+                          <a:latin typeface="Microsoft JhengHei" panose="020B0604030504040204" pitchFamily="34" charset="-120"/>
+                          <a:ea typeface="Microsoft JhengHei" panose="020B0604030504040204" pitchFamily="34" charset="-120"/>
+                        </a:rPr>
+                        <a:t>10</a:t>
+                      </a:r>
+                      <a:endParaRPr lang="zh-TW" altLang="en-US" sz="1200" b="0">
+                        <a:solidFill>
                           <a:srgbClr val="000000"/>
-                        </a:buClr>
-                        <a:buSzPts val="1400"/>
-                        <a:buFont typeface="Arial"/>
-                        <a:buNone/>
-                      </a:pPr>
-                      <a:endParaRPr sz="1400" u="none" strike="noStrike" cap="none">
-                        <a:latin typeface="Microsoft JhengHei"/>
-                        <a:ea typeface="Microsoft JhengHei"/>
-                        <a:cs typeface="Microsoft JhengHei"/>
-                        <a:sym typeface="Microsoft JhengHei"/>
+                        </a:solidFill>
+                        <a:latin typeface="Microsoft JhengHei" panose="020B0604030504040204" pitchFamily="34" charset="-120"/>
+                        <a:ea typeface="Microsoft JhengHei" panose="020B0604030504040204" pitchFamily="34" charset="-120"/>
                       </a:endParaRPr>
                     </a:p>
                   </a:txBody>
-                  <a:tcPr marL="91450" marR="91450" marT="45725" marB="45725" anchor="ctr"/>
+                  <a:tcPr anchor="ctr">
+                    <a:solidFill>
+                      <a:srgbClr val="FFFFFF"/>
+                    </a:solidFill>
+                  </a:tcPr>
                 </a:tc>
                 <a:tc>
                   <a:txBody>
                     <a:bodyPr/>
                     <a:lstStyle/>
                     <a:p>
-                      <a:pPr marL="0" marR="0" lvl="0" indent="0" algn="l" rtl="0">
-                        <a:lnSpc>
-                          <a:spcPct val="100000"/>
-                        </a:lnSpc>
-                        <a:spcBef>
-                          <a:spcPts val="0"/>
-                        </a:spcBef>
-                        <a:spcAft>
-                          <a:spcPts val="0"/>
-                        </a:spcAft>
-                        <a:buClr>
+                      <a:pPr algn="ctr"/>
+                      <a:r>
+                        <a:rPr lang="en-US" altLang="zh-TW" sz="1200" b="0">
+                          <a:solidFill>
+                            <a:srgbClr val="000000"/>
+                          </a:solidFill>
+                          <a:latin typeface="Microsoft JhengHei" panose="020B0604030504040204" pitchFamily="34" charset="-120"/>
+                          <a:ea typeface="Microsoft JhengHei" panose="020B0604030504040204" pitchFamily="34" charset="-120"/>
+                        </a:rPr>
+                        <a:t>2</a:t>
+                      </a:r>
+                      <a:endParaRPr lang="zh-TW" altLang="en-US" sz="1200" b="0">
+                        <a:solidFill>
                           <a:srgbClr val="000000"/>
-                        </a:buClr>
-                        <a:buSzPts val="1400"/>
-                        <a:buFont typeface="Arial"/>
-                        <a:buNone/>
-                      </a:pPr>
-                      <a:endParaRPr sz="1400" u="none" strike="noStrike" cap="none">
-                        <a:latin typeface="Microsoft JhengHei"/>
-                        <a:ea typeface="Microsoft JhengHei"/>
-                        <a:cs typeface="Microsoft JhengHei"/>
-                        <a:sym typeface="Microsoft JhengHei"/>
+                        </a:solidFill>
+                        <a:latin typeface="Microsoft JhengHei" panose="020B0604030504040204" pitchFamily="34" charset="-120"/>
+                        <a:ea typeface="Microsoft JhengHei" panose="020B0604030504040204" pitchFamily="34" charset="-120"/>
                       </a:endParaRPr>
                     </a:p>
                   </a:txBody>
-                  <a:tcPr marL="91450" marR="91450" marT="45725" marB="45725" anchor="ctr"/>
+                  <a:tcPr anchor="ctr">
+                    <a:solidFill>
+                      <a:srgbClr val="FFFFFF"/>
+                    </a:solidFill>
+                  </a:tcPr>
                 </a:tc>
                 <a:tc>
                   <a:txBody>
                     <a:bodyPr/>
                     <a:lstStyle/>
                     <a:p>
-                      <a:pPr marL="0" marR="0" lvl="0" indent="0" algn="l" rtl="0">
-                        <a:lnSpc>
-                          <a:spcPct val="100000"/>
-                        </a:lnSpc>
-                        <a:spcBef>
-                          <a:spcPts val="0"/>
-                        </a:spcBef>
-                        <a:spcAft>
-                          <a:spcPts val="0"/>
-                        </a:spcAft>
-                        <a:buClr>
-                          <a:srgbClr val="000000"/>
-                        </a:buClr>
-                        <a:buSzPts val="1400"/>
-                        <a:buFont typeface="Arial"/>
-                        <a:buNone/>
-                      </a:pPr>
-                      <a:endParaRPr sz="1400" u="none" strike="noStrike" cap="none">
-                        <a:latin typeface="Microsoft JhengHei"/>
-                        <a:ea typeface="Microsoft JhengHei"/>
-                        <a:cs typeface="Microsoft JhengHei"/>
-                        <a:sym typeface="Microsoft JhengHei"/>
-                      </a:endParaRPr>
+                      <a:pPr algn="ctr"/>
+                      <a:r>
+                        <a:rPr lang="zh-TW" altLang="en-US" sz="1200" b="1">
+                          <a:solidFill>
+                            <a:srgbClr val="000000"/>
+                          </a:solidFill>
+                          <a:latin typeface="Microsoft JhengHei" panose="020B0604030504040204" pitchFamily="34" charset="-120"/>
+                          <a:ea typeface="Microsoft JhengHei" panose="020B0604030504040204" pitchFamily="34" charset="-120"/>
+                        </a:rPr>
+                        <a:t>約 </a:t>
+                      </a:r>
+                      <a:r>
+                        <a:rPr lang="en-US" altLang="zh-TW" sz="1200" b="1">
+                          <a:solidFill>
+                            <a:srgbClr val="000000"/>
+                          </a:solidFill>
+                          <a:latin typeface="Microsoft JhengHei" panose="020B0604030504040204" pitchFamily="34" charset="-120"/>
+                          <a:ea typeface="Microsoft JhengHei" panose="020B0604030504040204" pitchFamily="34" charset="-120"/>
+                        </a:rPr>
+                        <a:t>13 </a:t>
+                      </a:r>
+                      <a:r>
+                        <a:rPr lang="zh-TW" altLang="en-US" sz="1200" b="1">
+                          <a:solidFill>
+                            <a:srgbClr val="000000"/>
+                          </a:solidFill>
+                          <a:latin typeface="Microsoft JhengHei" panose="020B0604030504040204" pitchFamily="34" charset="-120"/>
+                          <a:ea typeface="Microsoft JhengHei" panose="020B0604030504040204" pitchFamily="34" charset="-120"/>
+                        </a:rPr>
+                        <a:t>小時</a:t>
+                      </a:r>
                     </a:p>
                   </a:txBody>
-                  <a:tcPr marL="91450" marR="91450" marT="45725" marB="45725" anchor="ctr"/>
+                  <a:tcPr anchor="ctr">
+                    <a:solidFill>
+                      <a:srgbClr val="FFFFFF"/>
+                    </a:solidFill>
+                  </a:tcPr>
                 </a:tc>
                 <a:extLst>
                   <a:ext uri="{0D108BD9-81ED-4DB2-BD59-A6C34878D82A}">
-                    <a16:rowId xmlns:a16="http://schemas.microsoft.com/office/drawing/2014/main" val="10001"/>
+                    <a16:rowId xmlns:a16="http://schemas.microsoft.com/office/drawing/2014/main" val="2266531253"/>
                   </a:ext>
                 </a:extLst>
               </a:tr>
-              <a:tr h="370850">
+              <a:tr h="342900">
                 <a:tc>
                   <a:txBody>
                     <a:bodyPr/>
                     <a:lstStyle/>
                     <a:p>
-                      <a:pPr marL="0" marR="0" lvl="0" indent="0" algn="l" rtl="0">
-                        <a:lnSpc>
-                          <a:spcPct val="100000"/>
-                        </a:lnSpc>
-                        <a:spcBef>
-                          <a:spcPts val="0"/>
-                        </a:spcBef>
-                        <a:spcAft>
-                          <a:spcPts val="0"/>
-                        </a:spcAft>
-                        <a:buClr>
-                          <a:srgbClr val="000000"/>
-                        </a:buClr>
-                        <a:buSzPts val="1400"/>
-                        <a:buFont typeface="Arial"/>
-                        <a:buNone/>
-                      </a:pPr>
+                      <a:pPr algn="l"/>
                       <a:r>
-                        <a:rPr lang="zh-TW" sz="1400" u="none" strike="noStrike" cap="none">
-                          <a:latin typeface="Microsoft JhengHei"/>
-                          <a:ea typeface="Microsoft JhengHei"/>
-                          <a:cs typeface="Microsoft JhengHei"/>
-                          <a:sym typeface="Microsoft JhengHei"/>
+                        <a:rPr lang="zh-TW" altLang="en-US" sz="1200">
+                          <a:solidFill>
+                            <a:srgbClr val="000000"/>
+                          </a:solidFill>
+                          <a:latin typeface="Microsoft JhengHei" panose="020B0604030504040204" pitchFamily="34" charset="-120"/>
+                          <a:ea typeface="Microsoft JhengHei" panose="020B0604030504040204" pitchFamily="34" charset="-120"/>
                         </a:rPr>
-                        <a:t>透過 Agent</a:t>
+                        <a:t>時程｜逾期掃描催辦</a:t>
                       </a:r>
-                      <a:endParaRPr sz="1400" u="none" strike="noStrike" cap="none">
-                        <a:latin typeface="Microsoft JhengHei"/>
-                        <a:ea typeface="Microsoft JhengHei"/>
-                        <a:cs typeface="Microsoft JhengHei"/>
-                        <a:sym typeface="Microsoft JhengHei"/>
-                      </a:endParaRPr>
                     </a:p>
                   </a:txBody>
-                  <a:tcPr marL="91450" marR="91450" marT="45725" marB="45725" anchor="ctr"/>
+                  <a:tcPr anchor="ctr">
+                    <a:solidFill>
+                      <a:srgbClr val="FFFFFF"/>
+                    </a:solidFill>
+                  </a:tcPr>
                 </a:tc>
                 <a:tc>
                   <a:txBody>
                     <a:bodyPr/>
                     <a:lstStyle/>
                     <a:p>
-                      <a:pPr marL="0" marR="0" lvl="0" indent="0" algn="l" rtl="0">
-                        <a:lnSpc>
-                          <a:spcPct val="100000"/>
-                        </a:lnSpc>
-                        <a:spcBef>
-                          <a:spcPts val="0"/>
-                        </a:spcBef>
-                        <a:spcAft>
-                          <a:spcPts val="0"/>
-                        </a:spcAft>
-                        <a:buClr>
+                      <a:pPr algn="ctr"/>
+                      <a:r>
+                        <a:rPr lang="en-US" altLang="zh-TW" sz="1200" b="0">
+                          <a:solidFill>
+                            <a:srgbClr val="000000"/>
+                          </a:solidFill>
+                          <a:latin typeface="Microsoft JhengHei" panose="020B0604030504040204" pitchFamily="34" charset="-120"/>
+                          <a:ea typeface="Microsoft JhengHei" panose="020B0604030504040204" pitchFamily="34" charset="-120"/>
+                        </a:rPr>
+                        <a:t>250</a:t>
+                      </a:r>
+                      <a:endParaRPr lang="zh-TW" altLang="en-US" sz="1200" b="0">
+                        <a:solidFill>
                           <a:srgbClr val="000000"/>
-                        </a:buClr>
-                        <a:buSzPts val="1400"/>
-                        <a:buFont typeface="Arial"/>
-                        <a:buNone/>
-                      </a:pPr>
-                      <a:endParaRPr sz="1400" u="none" strike="noStrike" cap="none">
-                        <a:latin typeface="Microsoft JhengHei"/>
-                        <a:ea typeface="Microsoft JhengHei"/>
-                        <a:cs typeface="Microsoft JhengHei"/>
-                        <a:sym typeface="Microsoft JhengHei"/>
+                        </a:solidFill>
+                        <a:latin typeface="Microsoft JhengHei" panose="020B0604030504040204" pitchFamily="34" charset="-120"/>
+                        <a:ea typeface="Microsoft JhengHei" panose="020B0604030504040204" pitchFamily="34" charset="-120"/>
                       </a:endParaRPr>
                     </a:p>
                   </a:txBody>
-                  <a:tcPr marL="91450" marR="91450" marT="45725" marB="45725" anchor="ctr"/>
+                  <a:tcPr anchor="ctr">
+                    <a:solidFill>
+                      <a:srgbClr val="FFFFFF"/>
+                    </a:solidFill>
+                  </a:tcPr>
                 </a:tc>
                 <a:tc>
                   <a:txBody>
                     <a:bodyPr/>
                     <a:lstStyle/>
                     <a:p>
-                      <a:pPr marL="0" marR="0" lvl="0" indent="0" algn="l" rtl="0">
-                        <a:lnSpc>
-                          <a:spcPct val="100000"/>
-                        </a:lnSpc>
-                        <a:spcBef>
-                          <a:spcPts val="0"/>
-                        </a:spcBef>
-                        <a:spcAft>
-                          <a:spcPts val="0"/>
-                        </a:spcAft>
-                        <a:buClr>
+                      <a:pPr algn="ctr"/>
+                      <a:r>
+                        <a:rPr lang="en-US" altLang="zh-TW" sz="1200" b="0">
+                          <a:solidFill>
+                            <a:srgbClr val="000000"/>
+                          </a:solidFill>
+                          <a:latin typeface="Microsoft JhengHei" panose="020B0604030504040204" pitchFamily="34" charset="-120"/>
+                          <a:ea typeface="Microsoft JhengHei" panose="020B0604030504040204" pitchFamily="34" charset="-120"/>
+                        </a:rPr>
+                        <a:t>10</a:t>
+                      </a:r>
+                      <a:endParaRPr lang="zh-TW" altLang="en-US" sz="1200" b="0">
+                        <a:solidFill>
                           <a:srgbClr val="000000"/>
-                        </a:buClr>
-                        <a:buSzPts val="1400"/>
-                        <a:buFont typeface="Arial"/>
-                        <a:buNone/>
-                      </a:pPr>
-                      <a:endParaRPr sz="1400" u="none" strike="noStrike" cap="none">
-                        <a:latin typeface="Microsoft JhengHei"/>
-                        <a:ea typeface="Microsoft JhengHei"/>
-                        <a:cs typeface="Microsoft JhengHei"/>
-                        <a:sym typeface="Microsoft JhengHei"/>
+                        </a:solidFill>
+                        <a:latin typeface="Microsoft JhengHei" panose="020B0604030504040204" pitchFamily="34" charset="-120"/>
+                        <a:ea typeface="Microsoft JhengHei" panose="020B0604030504040204" pitchFamily="34" charset="-120"/>
                       </a:endParaRPr>
                     </a:p>
                   </a:txBody>
-                  <a:tcPr marL="91450" marR="91450" marT="45725" marB="45725" anchor="ctr"/>
+                  <a:tcPr anchor="ctr">
+                    <a:solidFill>
+                      <a:srgbClr val="FFFFFF"/>
+                    </a:solidFill>
+                  </a:tcPr>
                 </a:tc>
                 <a:tc>
                   <a:txBody>
                     <a:bodyPr/>
                     <a:lstStyle/>
                     <a:p>
-                      <a:pPr marL="0" marR="0" lvl="0" indent="0" algn="l" rtl="0">
-                        <a:lnSpc>
-                          <a:spcPct val="100000"/>
-                        </a:lnSpc>
-                        <a:spcBef>
-                          <a:spcPts val="0"/>
-                        </a:spcBef>
-                        <a:spcAft>
-                          <a:spcPts val="0"/>
-                        </a:spcAft>
-                        <a:buClr>
+                      <a:pPr algn="ctr"/>
+                      <a:r>
+                        <a:rPr lang="en-US" altLang="zh-TW" sz="1200" b="0">
+                          <a:solidFill>
+                            <a:srgbClr val="000000"/>
+                          </a:solidFill>
+                          <a:latin typeface="Microsoft JhengHei" panose="020B0604030504040204" pitchFamily="34" charset="-120"/>
+                          <a:ea typeface="Microsoft JhengHei" panose="020B0604030504040204" pitchFamily="34" charset="-120"/>
+                        </a:rPr>
+                        <a:t>0</a:t>
+                      </a:r>
+                      <a:endParaRPr lang="zh-TW" altLang="en-US" sz="1200" b="0">
+                        <a:solidFill>
                           <a:srgbClr val="000000"/>
-                        </a:buClr>
-                        <a:buSzPts val="1400"/>
-                        <a:buFont typeface="Arial"/>
-                        <a:buNone/>
-                      </a:pPr>
-                      <a:endParaRPr sz="1400" u="none" strike="noStrike" cap="none">
-                        <a:latin typeface="Microsoft JhengHei"/>
-                        <a:ea typeface="Microsoft JhengHei"/>
-                        <a:cs typeface="Microsoft JhengHei"/>
-                        <a:sym typeface="Microsoft JhengHei"/>
+                        </a:solidFill>
+                        <a:latin typeface="Microsoft JhengHei" panose="020B0604030504040204" pitchFamily="34" charset="-120"/>
+                        <a:ea typeface="Microsoft JhengHei" panose="020B0604030504040204" pitchFamily="34" charset="-120"/>
                       </a:endParaRPr>
                     </a:p>
                   </a:txBody>
-                  <a:tcPr marL="91450" marR="91450" marT="45725" marB="45725" anchor="ctr"/>
+                  <a:tcPr anchor="ctr">
+                    <a:solidFill>
+                      <a:srgbClr val="FFFFFF"/>
+                    </a:solidFill>
+                  </a:tcPr>
                 </a:tc>
                 <a:tc>
                   <a:txBody>
                     <a:bodyPr/>
                     <a:lstStyle/>
                     <a:p>
-                      <a:pPr marL="0" marR="0" lvl="0" indent="0" algn="l" rtl="0">
-                        <a:lnSpc>
-                          <a:spcPct val="100000"/>
-                        </a:lnSpc>
-                        <a:spcBef>
-                          <a:spcPts val="0"/>
-                        </a:spcBef>
-                        <a:spcAft>
-                          <a:spcPts val="0"/>
-                        </a:spcAft>
-                        <a:buClr>
+                      <a:pPr algn="ctr"/>
+                      <a:r>
+                        <a:rPr lang="zh-TW" altLang="en-US" sz="1200" b="1">
+                          <a:solidFill>
+                            <a:srgbClr val="000000"/>
+                          </a:solidFill>
+                          <a:latin typeface="Microsoft JhengHei" panose="020B0604030504040204" pitchFamily="34" charset="-120"/>
+                          <a:ea typeface="Microsoft JhengHei" panose="020B0604030504040204" pitchFamily="34" charset="-120"/>
+                        </a:rPr>
+                        <a:t>約 </a:t>
+                      </a:r>
+                      <a:r>
+                        <a:rPr lang="en-US" altLang="zh-TW" sz="1200" b="1">
+                          <a:solidFill>
+                            <a:srgbClr val="000000"/>
+                          </a:solidFill>
+                          <a:latin typeface="Microsoft JhengHei" panose="020B0604030504040204" pitchFamily="34" charset="-120"/>
+                          <a:ea typeface="Microsoft JhengHei" panose="020B0604030504040204" pitchFamily="34" charset="-120"/>
+                        </a:rPr>
+                        <a:t>42 </a:t>
+                      </a:r>
+                      <a:r>
+                        <a:rPr lang="zh-TW" altLang="en-US" sz="1200" b="1">
+                          <a:solidFill>
+                            <a:srgbClr val="000000"/>
+                          </a:solidFill>
+                          <a:latin typeface="Microsoft JhengHei" panose="020B0604030504040204" pitchFamily="34" charset="-120"/>
+                          <a:ea typeface="Microsoft JhengHei" panose="020B0604030504040204" pitchFamily="34" charset="-120"/>
+                        </a:rPr>
+                        <a:t>小時</a:t>
+                      </a:r>
+                    </a:p>
+                  </a:txBody>
+                  <a:tcPr anchor="ctr">
+                    <a:solidFill>
+                      <a:srgbClr val="FFFFFF"/>
+                    </a:solidFill>
+                  </a:tcPr>
+                </a:tc>
+                <a:extLst>
+                  <a:ext uri="{0D108BD9-81ED-4DB2-BD59-A6C34878D82A}">
+                    <a16:rowId xmlns:a16="http://schemas.microsoft.com/office/drawing/2014/main" val="239300170"/>
+                  </a:ext>
+                </a:extLst>
+              </a:tr>
+              <a:tr h="342900">
+                <a:tc>
+                  <a:txBody>
+                    <a:bodyPr/>
+                    <a:lstStyle/>
+                    <a:p>
+                      <a:pPr algn="l"/>
+                      <a:r>
+                        <a:rPr lang="zh-TW" altLang="en-US" sz="1200">
+                          <a:solidFill>
+                            <a:srgbClr val="000000"/>
+                          </a:solidFill>
+                          <a:latin typeface="Microsoft JhengHei" panose="020B0604030504040204" pitchFamily="34" charset="-120"/>
+                          <a:ea typeface="Microsoft JhengHei" panose="020B0604030504040204" pitchFamily="34" charset="-120"/>
+                        </a:rPr>
+                        <a:t>數據｜</a:t>
+                      </a:r>
+                      <a:r>
+                        <a:rPr lang="en-US" altLang="zh-TW" sz="1200">
+                          <a:solidFill>
+                            <a:srgbClr val="000000"/>
+                          </a:solidFill>
+                          <a:latin typeface="Microsoft JhengHei" panose="020B0604030504040204" pitchFamily="34" charset="-120"/>
+                          <a:ea typeface="Microsoft JhengHei" panose="020B0604030504040204" pitchFamily="34" charset="-120"/>
+                        </a:rPr>
+                        <a:t>CUBE</a:t>
+                      </a:r>
+                      <a:r>
+                        <a:rPr lang="zh-TW" altLang="en-US" sz="1200">
+                          <a:solidFill>
+                            <a:srgbClr val="000000"/>
+                          </a:solidFill>
+                          <a:latin typeface="Microsoft JhengHei" panose="020B0604030504040204" pitchFamily="34" charset="-120"/>
+                          <a:ea typeface="Microsoft JhengHei" panose="020B0604030504040204" pitchFamily="34" charset="-120"/>
+                        </a:rPr>
+                        <a:t>／神策查詢（</a:t>
+                      </a:r>
+                      <a:r>
+                        <a:rPr lang="en-US" altLang="zh-TW" sz="1200">
+                          <a:solidFill>
+                            <a:srgbClr val="000000"/>
+                          </a:solidFill>
+                          <a:latin typeface="Microsoft JhengHei" panose="020B0604030504040204" pitchFamily="34" charset="-120"/>
+                          <a:ea typeface="Microsoft JhengHei" panose="020B0604030504040204" pitchFamily="34" charset="-120"/>
+                        </a:rPr>
+                        <a:t>P2</a:t>
+                      </a:r>
+                      <a:r>
+                        <a:rPr lang="zh-TW" altLang="en-US" sz="1200">
+                          <a:solidFill>
+                            <a:srgbClr val="000000"/>
+                          </a:solidFill>
+                          <a:latin typeface="Microsoft JhengHei" panose="020B0604030504040204" pitchFamily="34" charset="-120"/>
+                          <a:ea typeface="Microsoft JhengHei" panose="020B0604030504040204" pitchFamily="34" charset="-120"/>
+                        </a:rPr>
+                        <a:t>）</a:t>
+                      </a:r>
+                    </a:p>
+                  </a:txBody>
+                  <a:tcPr anchor="ctr">
+                    <a:solidFill>
+                      <a:srgbClr val="FFFFFF"/>
+                    </a:solidFill>
+                  </a:tcPr>
+                </a:tc>
+                <a:tc>
+                  <a:txBody>
+                    <a:bodyPr/>
+                    <a:lstStyle/>
+                    <a:p>
+                      <a:pPr algn="ctr"/>
+                      <a:r>
+                        <a:rPr lang="en-US" altLang="zh-TW" sz="1200" b="0">
+                          <a:solidFill>
+                            <a:srgbClr val="000000"/>
+                          </a:solidFill>
+                          <a:latin typeface="Microsoft JhengHei" panose="020B0604030504040204" pitchFamily="34" charset="-120"/>
+                          <a:ea typeface="Microsoft JhengHei" panose="020B0604030504040204" pitchFamily="34" charset="-120"/>
+                        </a:rPr>
+                        <a:t>200</a:t>
+                      </a:r>
+                      <a:endParaRPr lang="zh-TW" altLang="en-US" sz="1200" b="0">
+                        <a:solidFill>
                           <a:srgbClr val="000000"/>
-                        </a:buClr>
-                        <a:buSzPts val="1400"/>
-                        <a:buFont typeface="Arial"/>
-                        <a:buNone/>
-                      </a:pPr>
-                      <a:endParaRPr sz="1400" u="none" strike="noStrike" cap="none" dirty="0">
-                        <a:latin typeface="Microsoft JhengHei"/>
-                        <a:ea typeface="Microsoft JhengHei"/>
-                        <a:cs typeface="Microsoft JhengHei"/>
-                        <a:sym typeface="Microsoft JhengHei"/>
+                        </a:solidFill>
+                        <a:latin typeface="Microsoft JhengHei" panose="020B0604030504040204" pitchFamily="34" charset="-120"/>
+                        <a:ea typeface="Microsoft JhengHei" panose="020B0604030504040204" pitchFamily="34" charset="-120"/>
                       </a:endParaRPr>
                     </a:p>
                   </a:txBody>
-                  <a:tcPr marL="91450" marR="91450" marT="45725" marB="45725" anchor="ctr"/>
+                  <a:tcPr anchor="ctr">
+                    <a:solidFill>
+                      <a:srgbClr val="FFFFFF"/>
+                    </a:solidFill>
+                  </a:tcPr>
+                </a:tc>
+                <a:tc>
+                  <a:txBody>
+                    <a:bodyPr/>
+                    <a:lstStyle/>
+                    <a:p>
+                      <a:pPr algn="ctr"/>
+                      <a:r>
+                        <a:rPr lang="en-US" altLang="zh-TW" sz="1200" b="0">
+                          <a:solidFill>
+                            <a:srgbClr val="000000"/>
+                          </a:solidFill>
+                          <a:latin typeface="Microsoft JhengHei" panose="020B0604030504040204" pitchFamily="34" charset="-120"/>
+                          <a:ea typeface="Microsoft JhengHei" panose="020B0604030504040204" pitchFamily="34" charset="-120"/>
+                        </a:rPr>
+                        <a:t>10</a:t>
+                      </a:r>
+                      <a:endParaRPr lang="zh-TW" altLang="en-US" sz="1200" b="0">
+                        <a:solidFill>
+                          <a:srgbClr val="000000"/>
+                        </a:solidFill>
+                        <a:latin typeface="Microsoft JhengHei" panose="020B0604030504040204" pitchFamily="34" charset="-120"/>
+                        <a:ea typeface="Microsoft JhengHei" panose="020B0604030504040204" pitchFamily="34" charset="-120"/>
+                      </a:endParaRPr>
+                    </a:p>
+                  </a:txBody>
+                  <a:tcPr anchor="ctr">
+                    <a:solidFill>
+                      <a:srgbClr val="FFFFFF"/>
+                    </a:solidFill>
+                  </a:tcPr>
+                </a:tc>
+                <a:tc>
+                  <a:txBody>
+                    <a:bodyPr/>
+                    <a:lstStyle/>
+                    <a:p>
+                      <a:pPr algn="ctr"/>
+                      <a:r>
+                        <a:rPr lang="en-US" altLang="zh-TW" sz="1200" b="0">
+                          <a:solidFill>
+                            <a:srgbClr val="000000"/>
+                          </a:solidFill>
+                          <a:latin typeface="Microsoft JhengHei" panose="020B0604030504040204" pitchFamily="34" charset="-120"/>
+                          <a:ea typeface="Microsoft JhengHei" panose="020B0604030504040204" pitchFamily="34" charset="-120"/>
+                        </a:rPr>
+                        <a:t>1</a:t>
+                      </a:r>
+                      <a:endParaRPr lang="zh-TW" altLang="en-US" sz="1200" b="0">
+                        <a:solidFill>
+                          <a:srgbClr val="000000"/>
+                        </a:solidFill>
+                        <a:latin typeface="Microsoft JhengHei" panose="020B0604030504040204" pitchFamily="34" charset="-120"/>
+                        <a:ea typeface="Microsoft JhengHei" panose="020B0604030504040204" pitchFamily="34" charset="-120"/>
+                      </a:endParaRPr>
+                    </a:p>
+                  </a:txBody>
+                  <a:tcPr anchor="ctr">
+                    <a:solidFill>
+                      <a:srgbClr val="FFFFFF"/>
+                    </a:solidFill>
+                  </a:tcPr>
+                </a:tc>
+                <a:tc>
+                  <a:txBody>
+                    <a:bodyPr/>
+                    <a:lstStyle/>
+                    <a:p>
+                      <a:pPr algn="ctr"/>
+                      <a:r>
+                        <a:rPr lang="zh-TW" altLang="en-US" sz="1200" b="1">
+                          <a:solidFill>
+                            <a:srgbClr val="000000"/>
+                          </a:solidFill>
+                          <a:latin typeface="Microsoft JhengHei" panose="020B0604030504040204" pitchFamily="34" charset="-120"/>
+                          <a:ea typeface="Microsoft JhengHei" panose="020B0604030504040204" pitchFamily="34" charset="-120"/>
+                        </a:rPr>
+                        <a:t>約 </a:t>
+                      </a:r>
+                      <a:r>
+                        <a:rPr lang="en-US" altLang="zh-TW" sz="1200" b="1">
+                          <a:solidFill>
+                            <a:srgbClr val="000000"/>
+                          </a:solidFill>
+                          <a:latin typeface="Microsoft JhengHei" panose="020B0604030504040204" pitchFamily="34" charset="-120"/>
+                          <a:ea typeface="Microsoft JhengHei" panose="020B0604030504040204" pitchFamily="34" charset="-120"/>
+                        </a:rPr>
+                        <a:t>30 </a:t>
+                      </a:r>
+                      <a:r>
+                        <a:rPr lang="zh-TW" altLang="en-US" sz="1200" b="1">
+                          <a:solidFill>
+                            <a:srgbClr val="000000"/>
+                          </a:solidFill>
+                          <a:latin typeface="Microsoft JhengHei" panose="020B0604030504040204" pitchFamily="34" charset="-120"/>
+                          <a:ea typeface="Microsoft JhengHei" panose="020B0604030504040204" pitchFamily="34" charset="-120"/>
+                        </a:rPr>
+                        <a:t>小時</a:t>
+                      </a:r>
+                    </a:p>
+                  </a:txBody>
+                  <a:tcPr anchor="ctr">
+                    <a:solidFill>
+                      <a:srgbClr val="FFFFFF"/>
+                    </a:solidFill>
+                  </a:tcPr>
                 </a:tc>
                 <a:extLst>
                   <a:ext uri="{0D108BD9-81ED-4DB2-BD59-A6C34878D82A}">
-                    <a16:rowId xmlns:a16="http://schemas.microsoft.com/office/drawing/2014/main" val="10002"/>
+                    <a16:rowId xmlns:a16="http://schemas.microsoft.com/office/drawing/2014/main" val="225234016"/>
+                  </a:ext>
+                </a:extLst>
+              </a:tr>
+              <a:tr h="342900">
+                <a:tc>
+                  <a:txBody>
+                    <a:bodyPr/>
+                    <a:lstStyle/>
+                    <a:p>
+                      <a:pPr algn="l"/>
+                      <a:r>
+                        <a:rPr lang="en-US" altLang="zh-TW" sz="1200">
+                          <a:solidFill>
+                            <a:srgbClr val="000000"/>
+                          </a:solidFill>
+                          <a:latin typeface="Microsoft JhengHei" panose="020B0604030504040204" pitchFamily="34" charset="-120"/>
+                          <a:ea typeface="Microsoft JhengHei" panose="020B0604030504040204" pitchFamily="34" charset="-120"/>
+                        </a:rPr>
+                        <a:t>KPI</a:t>
+                      </a:r>
+                      <a:r>
+                        <a:rPr lang="zh-TW" altLang="en-US" sz="1200">
+                          <a:solidFill>
+                            <a:srgbClr val="000000"/>
+                          </a:solidFill>
+                          <a:latin typeface="Microsoft JhengHei" panose="020B0604030504040204" pitchFamily="34" charset="-120"/>
+                          <a:ea typeface="Microsoft JhengHei" panose="020B0604030504040204" pitchFamily="34" charset="-120"/>
+                        </a:rPr>
+                        <a:t>｜節點缺口對照（</a:t>
+                      </a:r>
+                      <a:r>
+                        <a:rPr lang="en-US" altLang="zh-TW" sz="1200">
+                          <a:solidFill>
+                            <a:srgbClr val="000000"/>
+                          </a:solidFill>
+                          <a:latin typeface="Microsoft JhengHei" panose="020B0604030504040204" pitchFamily="34" charset="-120"/>
+                          <a:ea typeface="Microsoft JhengHei" panose="020B0604030504040204" pitchFamily="34" charset="-120"/>
+                        </a:rPr>
+                        <a:t>P2</a:t>
+                      </a:r>
+                      <a:r>
+                        <a:rPr lang="zh-TW" altLang="en-US" sz="1200">
+                          <a:solidFill>
+                            <a:srgbClr val="000000"/>
+                          </a:solidFill>
+                          <a:latin typeface="Microsoft JhengHei" panose="020B0604030504040204" pitchFamily="34" charset="-120"/>
+                          <a:ea typeface="Microsoft JhengHei" panose="020B0604030504040204" pitchFamily="34" charset="-120"/>
+                        </a:rPr>
+                        <a:t>）</a:t>
+                      </a:r>
+                    </a:p>
+                  </a:txBody>
+                  <a:tcPr anchor="ctr">
+                    <a:solidFill>
+                      <a:srgbClr val="FFFFFF"/>
+                    </a:solidFill>
+                  </a:tcPr>
+                </a:tc>
+                <a:tc>
+                  <a:txBody>
+                    <a:bodyPr/>
+                    <a:lstStyle/>
+                    <a:p>
+                      <a:pPr algn="ctr"/>
+                      <a:r>
+                        <a:rPr lang="en-US" altLang="zh-TW" sz="1200" b="0">
+                          <a:solidFill>
+                            <a:srgbClr val="000000"/>
+                          </a:solidFill>
+                          <a:latin typeface="Microsoft JhengHei" panose="020B0604030504040204" pitchFamily="34" charset="-120"/>
+                          <a:ea typeface="Microsoft JhengHei" panose="020B0604030504040204" pitchFamily="34" charset="-120"/>
+                        </a:rPr>
+                        <a:t>50</a:t>
+                      </a:r>
+                      <a:endParaRPr lang="zh-TW" altLang="en-US" sz="1200" b="0">
+                        <a:solidFill>
+                          <a:srgbClr val="000000"/>
+                        </a:solidFill>
+                        <a:latin typeface="Microsoft JhengHei" panose="020B0604030504040204" pitchFamily="34" charset="-120"/>
+                        <a:ea typeface="Microsoft JhengHei" panose="020B0604030504040204" pitchFamily="34" charset="-120"/>
+                      </a:endParaRPr>
+                    </a:p>
+                  </a:txBody>
+                  <a:tcPr anchor="ctr">
+                    <a:solidFill>
+                      <a:srgbClr val="FFFFFF"/>
+                    </a:solidFill>
+                  </a:tcPr>
+                </a:tc>
+                <a:tc>
+                  <a:txBody>
+                    <a:bodyPr/>
+                    <a:lstStyle/>
+                    <a:p>
+                      <a:pPr algn="ctr"/>
+                      <a:r>
+                        <a:rPr lang="en-US" altLang="zh-TW" sz="1200" b="0">
+                          <a:solidFill>
+                            <a:srgbClr val="000000"/>
+                          </a:solidFill>
+                          <a:latin typeface="Microsoft JhengHei" panose="020B0604030504040204" pitchFamily="34" charset="-120"/>
+                          <a:ea typeface="Microsoft JhengHei" panose="020B0604030504040204" pitchFamily="34" charset="-120"/>
+                        </a:rPr>
+                        <a:t>20</a:t>
+                      </a:r>
+                      <a:endParaRPr lang="zh-TW" altLang="en-US" sz="1200" b="0">
+                        <a:solidFill>
+                          <a:srgbClr val="000000"/>
+                        </a:solidFill>
+                        <a:latin typeface="Microsoft JhengHei" panose="020B0604030504040204" pitchFamily="34" charset="-120"/>
+                        <a:ea typeface="Microsoft JhengHei" panose="020B0604030504040204" pitchFamily="34" charset="-120"/>
+                      </a:endParaRPr>
+                    </a:p>
+                  </a:txBody>
+                  <a:tcPr anchor="ctr">
+                    <a:solidFill>
+                      <a:srgbClr val="FFFFFF"/>
+                    </a:solidFill>
+                  </a:tcPr>
+                </a:tc>
+                <a:tc>
+                  <a:txBody>
+                    <a:bodyPr/>
+                    <a:lstStyle/>
+                    <a:p>
+                      <a:pPr algn="ctr"/>
+                      <a:r>
+                        <a:rPr lang="en-US" altLang="zh-TW" sz="1200" b="0">
+                          <a:solidFill>
+                            <a:srgbClr val="000000"/>
+                          </a:solidFill>
+                          <a:latin typeface="Microsoft JhengHei" panose="020B0604030504040204" pitchFamily="34" charset="-120"/>
+                          <a:ea typeface="Microsoft JhengHei" panose="020B0604030504040204" pitchFamily="34" charset="-120"/>
+                        </a:rPr>
+                        <a:t>0</a:t>
+                      </a:r>
+                      <a:endParaRPr lang="zh-TW" altLang="en-US" sz="1200" b="0">
+                        <a:solidFill>
+                          <a:srgbClr val="000000"/>
+                        </a:solidFill>
+                        <a:latin typeface="Microsoft JhengHei" panose="020B0604030504040204" pitchFamily="34" charset="-120"/>
+                        <a:ea typeface="Microsoft JhengHei" panose="020B0604030504040204" pitchFamily="34" charset="-120"/>
+                      </a:endParaRPr>
+                    </a:p>
+                  </a:txBody>
+                  <a:tcPr anchor="ctr">
+                    <a:solidFill>
+                      <a:srgbClr val="FFFFFF"/>
+                    </a:solidFill>
+                  </a:tcPr>
+                </a:tc>
+                <a:tc>
+                  <a:txBody>
+                    <a:bodyPr/>
+                    <a:lstStyle/>
+                    <a:p>
+                      <a:pPr algn="ctr"/>
+                      <a:r>
+                        <a:rPr lang="zh-TW" altLang="en-US" sz="1200" b="1">
+                          <a:solidFill>
+                            <a:srgbClr val="000000"/>
+                          </a:solidFill>
+                          <a:latin typeface="Microsoft JhengHei" panose="020B0604030504040204" pitchFamily="34" charset="-120"/>
+                          <a:ea typeface="Microsoft JhengHei" panose="020B0604030504040204" pitchFamily="34" charset="-120"/>
+                        </a:rPr>
+                        <a:t>約 </a:t>
+                      </a:r>
+                      <a:r>
+                        <a:rPr lang="en-US" altLang="zh-TW" sz="1200" b="1">
+                          <a:solidFill>
+                            <a:srgbClr val="000000"/>
+                          </a:solidFill>
+                          <a:latin typeface="Microsoft JhengHei" panose="020B0604030504040204" pitchFamily="34" charset="-120"/>
+                          <a:ea typeface="Microsoft JhengHei" panose="020B0604030504040204" pitchFamily="34" charset="-120"/>
+                        </a:rPr>
+                        <a:t>17 </a:t>
+                      </a:r>
+                      <a:r>
+                        <a:rPr lang="zh-TW" altLang="en-US" sz="1200" b="1">
+                          <a:solidFill>
+                            <a:srgbClr val="000000"/>
+                          </a:solidFill>
+                          <a:latin typeface="Microsoft JhengHei" panose="020B0604030504040204" pitchFamily="34" charset="-120"/>
+                          <a:ea typeface="Microsoft JhengHei" panose="020B0604030504040204" pitchFamily="34" charset="-120"/>
+                        </a:rPr>
+                        <a:t>小時</a:t>
+                      </a:r>
+                    </a:p>
+                  </a:txBody>
+                  <a:tcPr anchor="ctr">
+                    <a:solidFill>
+                      <a:srgbClr val="FFFFFF"/>
+                    </a:solidFill>
+                  </a:tcPr>
+                </a:tc>
+                <a:extLst>
+                  <a:ext uri="{0D108BD9-81ED-4DB2-BD59-A6C34878D82A}">
+                    <a16:rowId xmlns:a16="http://schemas.microsoft.com/office/drawing/2014/main" val="864234838"/>
+                  </a:ext>
+                </a:extLst>
+              </a:tr>
+              <a:tr h="342900">
+                <a:tc>
+                  <a:txBody>
+                    <a:bodyPr/>
+                    <a:lstStyle/>
+                    <a:p>
+                      <a:pPr algn="l"/>
+                      <a:r>
+                        <a:rPr lang="zh-TW" altLang="en-US" sz="1200" b="1">
+                          <a:solidFill>
+                            <a:srgbClr val="000000"/>
+                          </a:solidFill>
+                          <a:latin typeface="Microsoft JhengHei" panose="020B0604030504040204" pitchFamily="34" charset="-120"/>
+                          <a:ea typeface="Microsoft JhengHei" panose="020B0604030504040204" pitchFamily="34" charset="-120"/>
+                        </a:rPr>
+                        <a:t>合計（單一 </a:t>
+                      </a:r>
+                      <a:r>
+                        <a:rPr lang="en-US" altLang="zh-TW" sz="1200" b="1">
+                          <a:solidFill>
+                            <a:srgbClr val="000000"/>
+                          </a:solidFill>
+                          <a:latin typeface="Microsoft JhengHei" panose="020B0604030504040204" pitchFamily="34" charset="-120"/>
+                          <a:ea typeface="Microsoft JhengHei" panose="020B0604030504040204" pitchFamily="34" charset="-120"/>
+                        </a:rPr>
+                        <a:t>PM</a:t>
+                      </a:r>
+                      <a:r>
+                        <a:rPr lang="zh-TW" altLang="en-US" sz="1200" b="1">
+                          <a:solidFill>
+                            <a:srgbClr val="000000"/>
+                          </a:solidFill>
+                          <a:latin typeface="Microsoft JhengHei" panose="020B0604030504040204" pitchFamily="34" charset="-120"/>
+                          <a:ea typeface="Microsoft JhengHei" panose="020B0604030504040204" pitchFamily="34" charset="-120"/>
+                        </a:rPr>
+                        <a:t>／年）</a:t>
+                      </a:r>
+                    </a:p>
+                  </a:txBody>
+                  <a:tcPr anchor="ctr">
+                    <a:solidFill>
+                      <a:srgbClr val="F2F2F2"/>
+                    </a:solidFill>
+                  </a:tcPr>
+                </a:tc>
+                <a:tc>
+                  <a:txBody>
+                    <a:bodyPr/>
+                    <a:lstStyle/>
+                    <a:p>
+                      <a:pPr algn="ctr"/>
+                      <a:r>
+                        <a:rPr lang="en-US" altLang="zh-TW" sz="1200" b="1">
+                          <a:solidFill>
+                            <a:srgbClr val="000000"/>
+                          </a:solidFill>
+                          <a:latin typeface="Microsoft JhengHei" panose="020B0604030504040204" pitchFamily="34" charset="-120"/>
+                          <a:ea typeface="Microsoft JhengHei" panose="020B0604030504040204" pitchFamily="34" charset="-120"/>
+                        </a:rPr>
+                        <a:t>—</a:t>
+                      </a:r>
+                      <a:endParaRPr lang="zh-TW" altLang="en-US" sz="1200" b="1">
+                        <a:solidFill>
+                          <a:srgbClr val="000000"/>
+                        </a:solidFill>
+                        <a:latin typeface="Microsoft JhengHei" panose="020B0604030504040204" pitchFamily="34" charset="-120"/>
+                        <a:ea typeface="Microsoft JhengHei" panose="020B0604030504040204" pitchFamily="34" charset="-120"/>
+                      </a:endParaRPr>
+                    </a:p>
+                  </a:txBody>
+                  <a:tcPr anchor="ctr">
+                    <a:solidFill>
+                      <a:srgbClr val="F2F2F2"/>
+                    </a:solidFill>
+                  </a:tcPr>
+                </a:tc>
+                <a:tc>
+                  <a:txBody>
+                    <a:bodyPr/>
+                    <a:lstStyle/>
+                    <a:p>
+                      <a:pPr algn="ctr"/>
+                      <a:r>
+                        <a:rPr lang="en-US" altLang="zh-TW" sz="1200" b="1">
+                          <a:solidFill>
+                            <a:srgbClr val="000000"/>
+                          </a:solidFill>
+                          <a:latin typeface="Microsoft JhengHei" panose="020B0604030504040204" pitchFamily="34" charset="-120"/>
+                          <a:ea typeface="Microsoft JhengHei" panose="020B0604030504040204" pitchFamily="34" charset="-120"/>
+                        </a:rPr>
+                        <a:t>—</a:t>
+                      </a:r>
+                      <a:endParaRPr lang="zh-TW" altLang="en-US" sz="1200" b="1">
+                        <a:solidFill>
+                          <a:srgbClr val="000000"/>
+                        </a:solidFill>
+                        <a:latin typeface="Microsoft JhengHei" panose="020B0604030504040204" pitchFamily="34" charset="-120"/>
+                        <a:ea typeface="Microsoft JhengHei" panose="020B0604030504040204" pitchFamily="34" charset="-120"/>
+                      </a:endParaRPr>
+                    </a:p>
+                  </a:txBody>
+                  <a:tcPr anchor="ctr">
+                    <a:solidFill>
+                      <a:srgbClr val="F2F2F2"/>
+                    </a:solidFill>
+                  </a:tcPr>
+                </a:tc>
+                <a:tc>
+                  <a:txBody>
+                    <a:bodyPr/>
+                    <a:lstStyle/>
+                    <a:p>
+                      <a:pPr algn="ctr"/>
+                      <a:r>
+                        <a:rPr lang="en-US" altLang="zh-TW" sz="1200" b="1">
+                          <a:solidFill>
+                            <a:srgbClr val="000000"/>
+                          </a:solidFill>
+                          <a:latin typeface="Microsoft JhengHei" panose="020B0604030504040204" pitchFamily="34" charset="-120"/>
+                          <a:ea typeface="Microsoft JhengHei" panose="020B0604030504040204" pitchFamily="34" charset="-120"/>
+                        </a:rPr>
+                        <a:t>—</a:t>
+                      </a:r>
+                      <a:endParaRPr lang="zh-TW" altLang="en-US" sz="1200" b="1">
+                        <a:solidFill>
+                          <a:srgbClr val="000000"/>
+                        </a:solidFill>
+                        <a:latin typeface="Microsoft JhengHei" panose="020B0604030504040204" pitchFamily="34" charset="-120"/>
+                        <a:ea typeface="Microsoft JhengHei" panose="020B0604030504040204" pitchFamily="34" charset="-120"/>
+                      </a:endParaRPr>
+                    </a:p>
+                  </a:txBody>
+                  <a:tcPr anchor="ctr">
+                    <a:solidFill>
+                      <a:srgbClr val="F2F2F2"/>
+                    </a:solidFill>
+                  </a:tcPr>
+                </a:tc>
+                <a:tc>
+                  <a:txBody>
+                    <a:bodyPr/>
+                    <a:lstStyle/>
+                    <a:p>
+                      <a:pPr algn="ctr"/>
+                      <a:r>
+                        <a:rPr lang="zh-TW" altLang="en-US" sz="1200" b="1">
+                          <a:solidFill>
+                            <a:srgbClr val="CC492B"/>
+                          </a:solidFill>
+                          <a:latin typeface="Microsoft JhengHei" panose="020B0604030504040204" pitchFamily="34" charset="-120"/>
+                          <a:ea typeface="Microsoft JhengHei" panose="020B0604030504040204" pitchFamily="34" charset="-120"/>
+                        </a:rPr>
+                        <a:t>約 </a:t>
+                      </a:r>
+                      <a:r>
+                        <a:rPr lang="en-US" altLang="zh-TW" sz="1200" b="1">
+                          <a:solidFill>
+                            <a:srgbClr val="CC492B"/>
+                          </a:solidFill>
+                          <a:latin typeface="Microsoft JhengHei" panose="020B0604030504040204" pitchFamily="34" charset="-120"/>
+                          <a:ea typeface="Microsoft JhengHei" panose="020B0604030504040204" pitchFamily="34" charset="-120"/>
+                        </a:rPr>
+                        <a:t>102 </a:t>
+                      </a:r>
+                      <a:r>
+                        <a:rPr lang="zh-TW" altLang="en-US" sz="1200" b="1">
+                          <a:solidFill>
+                            <a:srgbClr val="CC492B"/>
+                          </a:solidFill>
+                          <a:latin typeface="Microsoft JhengHei" panose="020B0604030504040204" pitchFamily="34" charset="-120"/>
+                          <a:ea typeface="Microsoft JhengHei" panose="020B0604030504040204" pitchFamily="34" charset="-120"/>
+                        </a:rPr>
+                        <a:t>小時</a:t>
+                      </a:r>
+                    </a:p>
+                  </a:txBody>
+                  <a:tcPr anchor="ctr">
+                    <a:solidFill>
+                      <a:srgbClr val="F2F2F2"/>
+                    </a:solidFill>
+                  </a:tcPr>
+                </a:tc>
+                <a:extLst>
+                  <a:ext uri="{0D108BD9-81ED-4DB2-BD59-A6C34878D82A}">
+                    <a16:rowId xmlns:a16="http://schemas.microsoft.com/office/drawing/2014/main" val="3502281815"/>
                   </a:ext>
                 </a:extLst>
               </a:tr>
@@ -9944,6 +12231,127 @@
           </a:graphicData>
         </a:graphic>
       </p:graphicFrame>
+      <p:sp>
+        <p:nvSpPr>
+          <p:cNvPr id="3" name="文字方塊 2">
+            <a:extLst>
+              <a:ext uri="{FF2B5EF4-FFF2-40B4-BE49-F238E27FC236}">
+                <a16:creationId xmlns:a16="http://schemas.microsoft.com/office/drawing/2014/main" id="{C61512A1-1763-8480-3EA1-20EDCC258513}"/>
+              </a:ext>
+            </a:extLst>
+          </p:cNvPr>
+          <p:cNvSpPr txBox="1"/>
+          <p:nvPr/>
+        </p:nvSpPr>
+        <p:spPr>
+          <a:xfrm>
+            <a:off x="368300" y="3606800"/>
+            <a:ext cx="11455400" cy="225703"/>
+          </a:xfrm>
+          <a:prstGeom prst="rect">
+            <a:avLst/>
+          </a:prstGeom>
+          <a:noFill/>
+        </p:spPr>
+        <p:txBody>
+          <a:bodyPr vert="horz" wrap="square" lIns="25400" tIns="12700" bIns="12700" rtlCol="0">
+            <a:spAutoFit/>
+          </a:bodyPr>
+          <a:lstStyle/>
+          <a:p>
+            <a:r>
+              <a:rPr lang="zh-TW" altLang="en-US" sz="1300" b="1">
+                <a:solidFill>
+                  <a:srgbClr val="CC492B"/>
+                </a:solidFill>
+                <a:latin typeface="Microsoft JhengHei" panose="020B0604030504040204" pitchFamily="34" charset="-120"/>
+                <a:ea typeface="Microsoft JhengHei" panose="020B0604030504040204" pitchFamily="34" charset="-120"/>
+              </a:rPr>
+              <a:t>▶ 以數位經營部約 </a:t>
+            </a:r>
+            <a:r>
+              <a:rPr lang="en-US" altLang="zh-TW" sz="1300" b="1">
+                <a:solidFill>
+                  <a:srgbClr val="CC492B"/>
+                </a:solidFill>
+                <a:latin typeface="Microsoft JhengHei" panose="020B0604030504040204" pitchFamily="34" charset="-120"/>
+                <a:ea typeface="Microsoft JhengHei" panose="020B0604030504040204" pitchFamily="34" charset="-120"/>
+              </a:rPr>
+              <a:t>5 </a:t>
+            </a:r>
+            <a:r>
+              <a:rPr lang="zh-TW" altLang="en-US" sz="1300" b="1">
+                <a:solidFill>
+                  <a:srgbClr val="CC492B"/>
+                </a:solidFill>
+                <a:latin typeface="Microsoft JhengHei" panose="020B0604030504040204" pitchFamily="34" charset="-120"/>
+                <a:ea typeface="Microsoft JhengHei" panose="020B0604030504040204" pitchFamily="34" charset="-120"/>
+              </a:rPr>
+              <a:t>位同性質 </a:t>
+            </a:r>
+            <a:r>
+              <a:rPr lang="en-US" altLang="zh-TW" sz="1300" b="1">
+                <a:solidFill>
+                  <a:srgbClr val="CC492B"/>
+                </a:solidFill>
+                <a:latin typeface="Microsoft JhengHei" panose="020B0604030504040204" pitchFamily="34" charset="-120"/>
+                <a:ea typeface="Microsoft JhengHei" panose="020B0604030504040204" pitchFamily="34" charset="-120"/>
+              </a:rPr>
+              <a:t>PM </a:t>
+            </a:r>
+            <a:r>
+              <a:rPr lang="zh-TW" altLang="en-US" sz="1300" b="1">
+                <a:solidFill>
+                  <a:srgbClr val="CC492B"/>
+                </a:solidFill>
+                <a:latin typeface="Microsoft JhengHei" panose="020B0604030504040204" pitchFamily="34" charset="-120"/>
+                <a:ea typeface="Microsoft JhengHei" panose="020B0604030504040204" pitchFamily="34" charset="-120"/>
+              </a:rPr>
+              <a:t>計，全部門年省約 </a:t>
+            </a:r>
+            <a:r>
+              <a:rPr lang="en-US" altLang="zh-TW" sz="1300" b="1">
+                <a:solidFill>
+                  <a:srgbClr val="CC492B"/>
+                </a:solidFill>
+                <a:latin typeface="Microsoft JhengHei" panose="020B0604030504040204" pitchFamily="34" charset="-120"/>
+                <a:ea typeface="Microsoft JhengHei" panose="020B0604030504040204" pitchFamily="34" charset="-120"/>
+              </a:rPr>
+              <a:t>510 </a:t>
+            </a:r>
+            <a:r>
+              <a:rPr lang="zh-TW" altLang="en-US" sz="1300" b="1">
+                <a:solidFill>
+                  <a:srgbClr val="CC492B"/>
+                </a:solidFill>
+                <a:latin typeface="Microsoft JhengHei" panose="020B0604030504040204" pitchFamily="34" charset="-120"/>
+                <a:ea typeface="Microsoft JhengHei" panose="020B0604030504040204" pitchFamily="34" charset="-120"/>
+              </a:rPr>
+              <a:t>小時 ≈ </a:t>
+            </a:r>
+            <a:r>
+              <a:rPr lang="en-US" altLang="zh-TW" sz="1300" b="1">
+                <a:solidFill>
+                  <a:srgbClr val="CC492B"/>
+                </a:solidFill>
+                <a:latin typeface="Microsoft JhengHei" panose="020B0604030504040204" pitchFamily="34" charset="-120"/>
+                <a:ea typeface="Microsoft JhengHei" panose="020B0604030504040204" pitchFamily="34" charset="-120"/>
+              </a:rPr>
+              <a:t>64 </a:t>
+            </a:r>
+            <a:r>
+              <a:rPr lang="zh-TW" altLang="en-US" sz="1300" b="1">
+                <a:solidFill>
+                  <a:srgbClr val="CC492B"/>
+                </a:solidFill>
+                <a:latin typeface="Microsoft JhengHei" panose="020B0604030504040204" pitchFamily="34" charset="-120"/>
+                <a:ea typeface="Microsoft JhengHei" panose="020B0604030504040204" pitchFamily="34" charset="-120"/>
+              </a:rPr>
+              <a:t>個工作天；一次建置、多專案共用。</a:t>
+            </a:r>
+          </a:p>
+        </p:txBody>
+      </p:sp>
     </p:spTree>
   </p:cSld>
   <p:clrMapOvr>
@@ -10024,10 +12432,10 @@
               <a:buNone/>
             </a:pPr>
             <a:r>
-              <a:rPr lang="zh-TW" sz="2800" b="1"/>
+              <a:rPr lang="zh-TW" sz="2800" b="1" dirty="0"/>
               <a:t>Copilot Studio 功能設定截圖與相關資料</a:t>
             </a:r>
-            <a:endParaRPr/>
+            <a:endParaRPr dirty="0"/>
           </a:p>
         </p:txBody>
       </p:sp>
@@ -10149,144 +12557,233 @@
       </p:sp>
       <p:pic>
         <p:nvPicPr>
-          <p:cNvPr id="95" name="Google Shape;95;p9"/>
-          <p:cNvPicPr preferRelativeResize="0"/>
+          <p:cNvPr id="95" name="Picture 94" descr="image.png"/>
+          <p:cNvPicPr>
+            <a:picLocks noChangeAspect="1"/>
+          </p:cNvPicPr>
           <p:nvPr/>
         </p:nvPicPr>
-        <p:blipFill rotWithShape="1">
-          <a:blip r:embed="rId3">
-            <a:alphaModFix/>
-          </a:blip>
-          <a:srcRect/>
-          <a:stretch/>
+        <p:blipFill>
+          <a:blip r:embed="rId4"/>
+          <a:stretch>
+            <a:fillRect/>
+          </a:stretch>
         </p:blipFill>
         <p:spPr>
           <a:xfrm>
-            <a:off x="365896" y="1959689"/>
-            <a:ext cx="8293074" cy="4410015"/>
+            <a:off x="2308859" y="1463040"/>
+            <a:ext cx="3648456" cy="2052828"/>
+          </a:xfrm>
+          <a:prstGeom prst="rect">
+            <a:avLst/>
+          </a:prstGeom>
+        </p:spPr>
+      </p:pic>
+      <p:sp>
+        <p:nvSpPr>
+          <p:cNvPr id="96" name="TextBox 95"/>
+          <p:cNvSpPr txBox="1"/>
+          <p:nvPr/>
+        </p:nvSpPr>
+        <p:spPr>
+          <a:xfrm>
+            <a:off x="2308859" y="3534156"/>
+            <a:ext cx="3648456" cy="237744"/>
           </a:xfrm>
           <a:prstGeom prst="rect">
             <a:avLst/>
           </a:prstGeom>
           <a:noFill/>
-          <a:ln>
-            <a:noFill/>
-          </a:ln>
+        </p:spPr>
+        <p:txBody>
+          <a:bodyPr wrap="square">
+            <a:spAutoFit/>
+          </a:bodyPr>
+          <a:lstStyle/>
+          <a:p>
+            <a:pPr algn="ctr"/>
+            <a:r>
+              <a:rPr sz="1100" b="1">
+                <a:solidFill>
+                  <a:srgbClr val="333333"/>
+                </a:solidFill>
+              </a:rPr>
+              <a:t>① Agent Instructions 設定</a:t>
+            </a:r>
+          </a:p>
+        </p:txBody>
+      </p:sp>
+      <p:pic>
+        <p:nvPicPr>
+          <p:cNvPr id="97" name="Picture 96" descr="image.png"/>
+          <p:cNvPicPr>
+            <a:picLocks noChangeAspect="1"/>
+          </p:cNvPicPr>
+          <p:nvPr/>
+        </p:nvPicPr>
+        <p:blipFill>
+          <a:blip r:embed="rId5"/>
+          <a:stretch>
+            <a:fillRect/>
+          </a:stretch>
+        </p:blipFill>
+        <p:spPr>
+          <a:xfrm>
+            <a:off x="6231636" y="1463040"/>
+            <a:ext cx="3648456" cy="2052828"/>
+          </a:xfrm>
+          <a:prstGeom prst="rect">
+            <a:avLst/>
+          </a:prstGeom>
         </p:spPr>
       </p:pic>
       <p:sp>
         <p:nvSpPr>
-          <p:cNvPr id="96" name="Google Shape;96;p9"/>
+          <p:cNvPr id="98" name="TextBox 97"/>
           <p:cNvSpPr txBox="1"/>
           <p:nvPr/>
         </p:nvSpPr>
         <p:spPr>
           <a:xfrm>
-            <a:off x="365895" y="1324463"/>
-            <a:ext cx="11342693" cy="635226"/>
+            <a:off x="6231636" y="3534156"/>
+            <a:ext cx="3648456" cy="237744"/>
           </a:xfrm>
           <a:prstGeom prst="rect">
             <a:avLst/>
           </a:prstGeom>
           <a:noFill/>
-          <a:ln>
-            <a:noFill/>
-          </a:ln>
         </p:spPr>
         <p:txBody>
-          <a:bodyPr spcFirstLastPara="1" wrap="square" lIns="91425" tIns="91425" rIns="91425" bIns="91425" anchor="t" anchorCtr="0">
-            <a:noAutofit/>
+          <a:bodyPr wrap="square">
+            <a:spAutoFit/>
           </a:bodyPr>
           <a:lstStyle/>
           <a:p>
-            <a:pPr marL="0" marR="0" lvl="0" indent="0" algn="l" defTabSz="914400" rtl="0" eaLnBrk="1" fontAlgn="auto" latinLnBrk="0" hangingPunct="1">
-              <a:lnSpc>
-                <a:spcPct val="150000"/>
-              </a:lnSpc>
-              <a:spcBef>
-                <a:spcPts val="0"/>
-              </a:spcBef>
-              <a:spcAft>
-                <a:spcPts val="0"/>
-              </a:spcAft>
-              <a:buClr>
-                <a:srgbClr val="000000"/>
-              </a:buClr>
-              <a:buSzTx/>
-              <a:buFont typeface="Arial"/>
-              <a:buNone/>
-              <a:tabLst/>
-              <a:defRPr/>
-            </a:pPr>
-            <a:r>
-              <a:rPr kumimoji="0" lang="zh-TW" altLang="en-US" sz="1400" b="0" i="0" u="none" strike="noStrike" kern="0" cap="none" spc="0" normalizeH="0" baseline="0" noProof="0" dirty="0">
-                <a:ln>
-                  <a:noFill/>
-                </a:ln>
-                <a:solidFill>
-                  <a:srgbClr val="000000"/>
-                </a:solidFill>
-                <a:effectLst/>
-                <a:uLnTx/>
-                <a:uFillTx/>
-                <a:latin typeface="Microsoft JhengHei"/>
-                <a:ea typeface="Microsoft JhengHei"/>
-                <a:cs typeface="Microsoft JhengHei"/>
-                <a:sym typeface="Microsoft JhengHei"/>
-              </a:rPr>
-              <a:t>請提供「各種關鍵功能」的設計截圖，必要時，請提供程式碼（例如：將「主題」 的程式碼匯出並另存一份 </a:t>
-            </a:r>
-            <a:r>
-              <a:rPr kumimoji="0" lang="en-US" altLang="zh-TW" sz="1400" b="0" i="0" u="none" strike="noStrike" kern="0" cap="none" spc="0" normalizeH="0" baseline="0" noProof="0" dirty="0">
-                <a:ln>
-                  <a:noFill/>
-                </a:ln>
-                <a:solidFill>
-                  <a:srgbClr val="000000"/>
-                </a:solidFill>
-                <a:effectLst/>
-                <a:uLnTx/>
-                <a:uFillTx/>
-                <a:latin typeface="Microsoft JhengHei"/>
-                <a:ea typeface="Microsoft JhengHei"/>
-                <a:cs typeface="Microsoft JhengHei"/>
-                <a:sym typeface="Microsoft JhengHei"/>
-              </a:rPr>
-              <a:t>.txt </a:t>
-            </a:r>
-            <a:r>
-              <a:rPr kumimoji="0" lang="zh-TW" altLang="en-US" sz="1400" b="0" i="0" u="none" strike="noStrike" kern="0" cap="none" spc="0" normalizeH="0" baseline="0" noProof="0" dirty="0">
-                <a:ln>
-                  <a:noFill/>
-                </a:ln>
-                <a:solidFill>
-                  <a:srgbClr val="000000"/>
-                </a:solidFill>
-                <a:effectLst/>
-                <a:uLnTx/>
-                <a:uFillTx/>
-                <a:latin typeface="Microsoft JhengHei"/>
-                <a:ea typeface="Microsoft JhengHei"/>
-                <a:cs typeface="Microsoft JhengHei"/>
-                <a:sym typeface="Microsoft JhengHei"/>
-              </a:rPr>
-              <a:t>檔案）。</a:t>
-            </a:r>
-            <a:endParaRPr kumimoji="0" sz="1400" b="0" i="0" u="none" strike="noStrike" kern="0" cap="none" spc="0" normalizeH="0" baseline="0" noProof="0" dirty="0">
-              <a:ln>
-                <a:noFill/>
-              </a:ln>
-              <a:solidFill>
-                <a:srgbClr val="000000"/>
-              </a:solidFill>
-              <a:effectLst/>
-              <a:uLnTx/>
-              <a:uFillTx/>
-              <a:latin typeface="Microsoft JhengHei"/>
-              <a:ea typeface="Microsoft JhengHei"/>
-              <a:cs typeface="Microsoft JhengHei"/>
-              <a:sym typeface="Microsoft JhengHei"/>
-            </a:endParaRPr>
+            <a:pPr algn="ctr"/>
+            <a:r>
+              <a:rPr sz="1100" b="1">
+                <a:solidFill>
+                  <a:srgbClr val="333333"/>
+                </a:solidFill>
+              </a:rPr>
+              <a:t>② Action：Planner 建立任務</a:t>
+            </a:r>
+          </a:p>
+        </p:txBody>
+      </p:sp>
+      <p:pic>
+        <p:nvPicPr>
+          <p:cNvPr id="99" name="Picture 98" descr="image.png"/>
+          <p:cNvPicPr>
+            <a:picLocks noChangeAspect="1"/>
+          </p:cNvPicPr>
+          <p:nvPr/>
+        </p:nvPicPr>
+        <p:blipFill>
+          <a:blip r:embed="rId6"/>
+          <a:stretch>
+            <a:fillRect/>
+          </a:stretch>
+        </p:blipFill>
+        <p:spPr>
+          <a:xfrm>
+            <a:off x="2308859" y="3973068"/>
+            <a:ext cx="3648456" cy="2052828"/>
+          </a:xfrm>
+          <a:prstGeom prst="rect">
+            <a:avLst/>
+          </a:prstGeom>
+        </p:spPr>
+      </p:pic>
+      <p:sp>
+        <p:nvSpPr>
+          <p:cNvPr id="100" name="TextBox 99"/>
+          <p:cNvSpPr txBox="1"/>
+          <p:nvPr/>
+        </p:nvSpPr>
+        <p:spPr>
+          <a:xfrm>
+            <a:off x="2308859" y="6044184"/>
+            <a:ext cx="3648456" cy="237744"/>
+          </a:xfrm>
+          <a:prstGeom prst="rect">
+            <a:avLst/>
+          </a:prstGeom>
+          <a:noFill/>
+        </p:spPr>
+        <p:txBody>
+          <a:bodyPr wrap="square">
+            <a:spAutoFit/>
+          </a:bodyPr>
+          <a:lstStyle/>
+          <a:p>
+            <a:pPr algn="ctr"/>
+            <a:r>
+              <a:rPr sz="1100" b="1">
+                <a:solidFill>
+                  <a:srgbClr val="333333"/>
+                </a:solidFill>
+              </a:rPr>
+              <a:t>③ 開單前 PM 確認關卡</a:t>
+            </a:r>
+          </a:p>
+        </p:txBody>
+      </p:sp>
+      <p:pic>
+        <p:nvPicPr>
+          <p:cNvPr id="101" name="Picture 100" descr="image.png"/>
+          <p:cNvPicPr>
+            <a:picLocks noChangeAspect="1"/>
+          </p:cNvPicPr>
+          <p:nvPr/>
+        </p:nvPicPr>
+        <p:blipFill>
+          <a:blip r:embed="rId7"/>
+          <a:stretch>
+            <a:fillRect/>
+          </a:stretch>
+        </p:blipFill>
+        <p:spPr>
+          <a:xfrm>
+            <a:off x="6231636" y="3973068"/>
+            <a:ext cx="3648456" cy="2052828"/>
+          </a:xfrm>
+          <a:prstGeom prst="rect">
+            <a:avLst/>
+          </a:prstGeom>
+        </p:spPr>
+      </p:pic>
+      <p:sp>
+        <p:nvSpPr>
+          <p:cNvPr id="102" name="TextBox 101"/>
+          <p:cNvSpPr txBox="1"/>
+          <p:nvPr/>
+        </p:nvSpPr>
+        <p:spPr>
+          <a:xfrm>
+            <a:off x="6231636" y="6044184"/>
+            <a:ext cx="3648456" cy="237744"/>
+          </a:xfrm>
+          <a:prstGeom prst="rect">
+            <a:avLst/>
+          </a:prstGeom>
+          <a:noFill/>
+        </p:spPr>
+        <p:txBody>
+          <a:bodyPr wrap="square">
+            <a:spAutoFit/>
+          </a:bodyPr>
+          <a:lstStyle/>
+          <a:p>
+            <a:pPr algn="ctr"/>
+            <a:r>
+              <a:rPr sz="1100" b="1">
+                <a:solidFill>
+                  <a:srgbClr val="333333"/>
+                </a:solidFill>
+              </a:rPr>
+              <a:t>④ Test 面板：貼逐字稿輸出待辦</a:t>
+            </a:r>
           </a:p>
         </p:txBody>
       </p:sp>
@@ -10302,6 +12799,142 @@
       </p:transition>
     </mc:Choice>
     <mc:Fallback xmlns="">
+      <p:transition spd="slow">
+        <p:cut/>
+      </p:transition>
+    </mc:Fallback>
+  </mc:AlternateContent>
+</p:sld>
+</file>
+
+<file path=ppt/slides/slide8.xml><?xml version="1.0" encoding="utf-8"?>
+<p:sld xmlns:a="http://schemas.openxmlformats.org/drawingml/2006/main" xmlns:r="http://schemas.openxmlformats.org/officeDocument/2006/relationships" xmlns:p="http://schemas.openxmlformats.org/presentationml/2006/main">
+  <p:cSld>
+    <p:spTree>
+      <p:nvGrpSpPr>
+        <p:cNvPr id="1" name="Shape 75"/>
+        <p:cNvGrpSpPr/>
+        <p:nvPr/>
+      </p:nvGrpSpPr>
+      <p:grpSpPr>
+        <a:xfrm>
+          <a:off x="0" y="0"/>
+          <a:ext cx="0" cy="0"/>
+          <a:chOff x="0" y="0"/>
+          <a:chExt cx="0" cy="0"/>
+        </a:xfrm>
+      </p:grpSpPr>
+      <p:sp>
+        <p:nvSpPr>
+          <p:cNvPr id="76" name="Google Shape;76;p8"/>
+          <p:cNvSpPr txBox="1">
+            <a:spLocks noGrp="1"/>
+          </p:cNvSpPr>
+          <p:nvPr>
+            <p:ph type="title"/>
+          </p:nvPr>
+        </p:nvSpPr>
+        <p:spPr>
+          <a:xfrm>
+            <a:off x="365895" y="150922"/>
+            <a:ext cx="11342694" cy="635226"/>
+          </a:xfrm>
+          <a:prstGeom prst="rect">
+            <a:avLst/>
+          </a:prstGeom>
+          <a:noFill/>
+          <a:ln>
+            <a:noFill/>
+          </a:ln>
+        </p:spPr>
+        <p:txBody>
+          <a:bodyPr spcFirstLastPara="1" wrap="square" lIns="91425" tIns="45700" rIns="91425" bIns="45700" anchor="ctr" anchorCtr="0">
+            <a:noAutofit/>
+          </a:bodyPr>
+          <a:lstStyle/>
+          <a:p>
+            <a:pPr marL="0" lvl="0" indent="0" algn="l" rtl="0">
+              <a:lnSpc>
+                <a:spcPct val="100000"/>
+              </a:lnSpc>
+              <a:spcBef>
+                <a:spcPts val="0"/>
+              </a:spcBef>
+              <a:spcAft>
+                <a:spcPts val="0"/>
+              </a:spcAft>
+              <a:buSzPts val="1400"/>
+              <a:buNone/>
+            </a:pPr>
+            <a:r>
+              <a:rPr lang="zh-TW" altLang="en-US" sz="2800" b="1"/>
+              <a:t>附錄：四大 </a:t>
+            </a:r>
+            <a:r>
+              <a:rPr lang="en-US" altLang="zh-TW" sz="2800" b="1"/>
+              <a:t>Agent </a:t>
+            </a:r>
+            <a:r>
+              <a:rPr lang="zh-TW" altLang="en-US" sz="2800" b="1"/>
+              <a:t>對話決策詳細流程圖</a:t>
+            </a:r>
+            <a:endParaRPr/>
+          </a:p>
+        </p:txBody>
+      </p:sp>
+      <p:pic>
+        <p:nvPicPr>
+          <p:cNvPr id="3" name="圖片 2">
+            <a:extLst>
+              <a:ext uri="{FF2B5EF4-FFF2-40B4-BE49-F238E27FC236}">
+                <a16:creationId xmlns:a16="http://schemas.microsoft.com/office/drawing/2014/main" id="{DD65562E-76EA-4365-D337-7AA4F57F6E2B}"/>
+              </a:ext>
+            </a:extLst>
+          </p:cNvPr>
+          <p:cNvPicPr>
+            <a:picLocks/>
+          </p:cNvPicPr>
+          <p:nvPr/>
+        </p:nvPicPr>
+        <p:blipFill>
+          <a:blip r:embed="rId3">
+            <a:extLst>
+              <a:ext uri="{28A0092B-C50C-407E-A947-70E740481C1C}">
+                <a14:useLocalDpi xmlns:a14="http://schemas.microsoft.com/office/drawing/2010/main" val="0"/>
+              </a:ext>
+            </a:extLst>
+          </a:blip>
+          <a:stretch>
+            <a:fillRect/>
+          </a:stretch>
+        </p:blipFill>
+        <p:spPr>
+          <a:xfrm>
+            <a:off x="1341120" y="960120"/>
+            <a:ext cx="9509760" cy="5349240"/>
+          </a:xfrm>
+          <a:prstGeom prst="rect">
+            <a:avLst/>
+          </a:prstGeom>
+        </p:spPr>
+      </p:pic>
+    </p:spTree>
+    <p:extLst>
+      <p:ext uri="{BB962C8B-B14F-4D97-AF65-F5344CB8AC3E}">
+        <p14:creationId xmlns:p14="http://schemas.microsoft.com/office/powerpoint/2010/main" val="2521080309"/>
+      </p:ext>
+    </p:extLst>
+  </p:cSld>
+  <p:clrMapOvr>
+    <a:masterClrMapping/>
+  </p:clrMapOvr>
+  <mc:AlternateContent xmlns:mc="http://schemas.openxmlformats.org/markup-compatibility/2006">
+    <mc:Choice xmlns:p14="http://schemas.microsoft.com/office/powerpoint/2010/main" Requires="p14">
+      <p:transition spd="slow" p14:dur="2000">
+        <p:cut/>
+      </p:transition>
+    </mc:Choice>
+    <mc:Fallback>
       <p:transition spd="slow">
         <p:cut/>
       </p:transition>

--- a/AI競賽.pptx
+++ b/AI競賽.pptx
@@ -12555,30 +12555,6 @@
           </a:p>
         </p:txBody>
       </p:sp>
-      <p:pic>
-        <p:nvPicPr>
-          <p:cNvPr id="95" name="Picture 94" descr="image.png"/>
-          <p:cNvPicPr>
-            <a:picLocks noChangeAspect="1"/>
-          </p:cNvPicPr>
-          <p:nvPr/>
-        </p:nvPicPr>
-        <p:blipFill>
-          <a:blip r:embed="rId4"/>
-          <a:stretch>
-            <a:fillRect/>
-          </a:stretch>
-        </p:blipFill>
-        <p:spPr>
-          <a:xfrm>
-            <a:off x="2308859" y="1463040"/>
-            <a:ext cx="3648456" cy="2052828"/>
-          </a:xfrm>
-          <a:prstGeom prst="rect">
-            <a:avLst/>
-          </a:prstGeom>
-        </p:spPr>
-      </p:pic>
       <p:sp>
         <p:nvSpPr>
           <p:cNvPr id="96" name="TextBox 95"/>
@@ -12587,8 +12563,8 @@
         </p:nvSpPr>
         <p:spPr>
           <a:xfrm>
-            <a:off x="2308859" y="3534156"/>
-            <a:ext cx="3648456" cy="237744"/>
+            <a:off x="368503" y="1218895"/>
+            <a:ext cx="11455603" cy="304495"/>
           </a:xfrm>
           <a:prstGeom prst="rect">
             <a:avLst/>
@@ -12601,52 +12577,59 @@
           </a:bodyPr>
           <a:lstStyle/>
           <a:p>
-            <a:pPr algn="ctr"/>
-            <a:r>
-              <a:rPr sz="1100" b="1">
-                <a:solidFill>
-                  <a:srgbClr val="333333"/>
-                </a:solidFill>
-              </a:rPr>
-              <a:t>① Agent Instructions 設定</a:t>
+            <a:pPr algn="l"/>
+            <a:r>
+              <a:rPr sz="1400" b="0">
+                <a:solidFill>
+                  <a:srgbClr val="000000"/>
+                </a:solidFill>
+                <a:latin typeface="Microsoft JhengHei"/>
+                <a:ea typeface="Microsoft JhengHei"/>
+              </a:rPr>
+              <a:t>實例佐證｜本部門已於 Microsoft Copilot Studio 建置並發佈 Agent，下為既有「請假申請（Day-off）Agent」的 Topics 對話決策流程實際畫面。</a:t>
             </a:r>
           </a:p>
         </p:txBody>
       </p:sp>
       <p:pic>
         <p:nvPicPr>
-          <p:cNvPr id="97" name="Picture 96" descr="image.png"/>
+          <p:cNvPr id="103" name="Picture 102" descr="image.png"/>
           <p:cNvPicPr>
             <a:picLocks noChangeAspect="1"/>
           </p:cNvPicPr>
           <p:nvPr/>
         </p:nvPicPr>
         <p:blipFill>
-          <a:blip r:embed="rId5"/>
+          <a:blip r:embed="rId3"/>
           <a:stretch>
             <a:fillRect/>
           </a:stretch>
         </p:blipFill>
         <p:spPr>
           <a:xfrm>
-            <a:off x="6231636" y="1463040"/>
-            <a:ext cx="3648456" cy="2052828"/>
+            <a:off x="2540203" y="1574596"/>
+            <a:ext cx="7112203" cy="3784701"/>
           </a:xfrm>
           <a:prstGeom prst="rect">
             <a:avLst/>
           </a:prstGeom>
+          <a:ln w="9525">
+            <a:solidFill>
+              <a:srgbClr val="AAAAAA"/>
+            </a:solidFill>
+          </a:ln>
         </p:spPr>
       </p:pic>
       <p:sp>
         <p:nvSpPr>
-          <p:cNvPr id="98" name="TextBox 97"/>
+          <p:cNvPr id="104" name="TextBox 103"/>
           <p:cNvSpPr txBox="1"/>
           <p:nvPr/>
         </p:nvSpPr>
         <p:spPr>
           <a:xfrm>
-            <a:off x="6231636" y="3534156"/>
-            <a:ext cx="3648456" cy="237744"/>
+            <a:off x="508406" y="5458968"/>
+            <a:ext cx="11173968" cy="758952"/>
           </a:xfrm>
           <a:prstGeom prst="rect">
             <a:avLst/>
@@ -12659,130 +12642,26 @@
           </a:bodyPr>
           <a:lstStyle/>
           <a:p>
-            <a:pPr algn="ctr"/>
-            <a:r>
-              <a:rPr sz="1100" b="1">
-                <a:solidFill>
-                  <a:srgbClr val="333333"/>
-                </a:solidFill>
-              </a:rPr>
-              <a:t>② Action：Planner 建立任務</a:t>
-            </a:r>
-          </a:p>
-        </p:txBody>
-      </p:sp>
-      <p:pic>
-        <p:nvPicPr>
-          <p:cNvPr id="99" name="Picture 98" descr="image.png"/>
-          <p:cNvPicPr>
-            <a:picLocks noChangeAspect="1"/>
-          </p:cNvPicPr>
-          <p:nvPr/>
-        </p:nvPicPr>
-        <p:blipFill>
-          <a:blip r:embed="rId6"/>
-          <a:stretch>
-            <a:fillRect/>
-          </a:stretch>
-        </p:blipFill>
-        <p:spPr>
-          <a:xfrm>
-            <a:off x="2308859" y="3973068"/>
-            <a:ext cx="3648456" cy="2052828"/>
-          </a:xfrm>
-          <a:prstGeom prst="rect">
-            <a:avLst/>
-          </a:prstGeom>
-        </p:spPr>
-      </p:pic>
-      <p:sp>
-        <p:nvSpPr>
-          <p:cNvPr id="100" name="TextBox 99"/>
-          <p:cNvSpPr txBox="1"/>
-          <p:nvPr/>
-        </p:nvSpPr>
-        <p:spPr>
-          <a:xfrm>
-            <a:off x="2308859" y="6044184"/>
-            <a:ext cx="3648456" cy="237744"/>
-          </a:xfrm>
-          <a:prstGeom prst="rect">
-            <a:avLst/>
-          </a:prstGeom>
-          <a:noFill/>
-        </p:spPr>
-        <p:txBody>
-          <a:bodyPr wrap="square">
-            <a:spAutoFit/>
-          </a:bodyPr>
-          <a:lstStyle/>
-          <a:p>
-            <a:pPr algn="ctr"/>
-            <a:r>
-              <a:rPr sz="1100" b="1">
-                <a:solidFill>
-                  <a:srgbClr val="333333"/>
-                </a:solidFill>
-              </a:rPr>
-              <a:t>③ 開單前 PM 確認關卡</a:t>
-            </a:r>
-          </a:p>
-        </p:txBody>
-      </p:sp>
-      <p:pic>
-        <p:nvPicPr>
-          <p:cNvPr id="101" name="Picture 100" descr="image.png"/>
-          <p:cNvPicPr>
-            <a:picLocks noChangeAspect="1"/>
-          </p:cNvPicPr>
-          <p:nvPr/>
-        </p:nvPicPr>
-        <p:blipFill>
-          <a:blip r:embed="rId7"/>
-          <a:stretch>
-            <a:fillRect/>
-          </a:stretch>
-        </p:blipFill>
-        <p:spPr>
-          <a:xfrm>
-            <a:off x="6231636" y="3973068"/>
-            <a:ext cx="3648456" cy="2052828"/>
-          </a:xfrm>
-          <a:prstGeom prst="rect">
-            <a:avLst/>
-          </a:prstGeom>
-        </p:spPr>
-      </p:pic>
-      <p:sp>
-        <p:nvSpPr>
-          <p:cNvPr id="102" name="TextBox 101"/>
-          <p:cNvSpPr txBox="1"/>
-          <p:nvPr/>
-        </p:nvSpPr>
-        <p:spPr>
-          <a:xfrm>
-            <a:off x="6231636" y="6044184"/>
-            <a:ext cx="3648456" cy="237744"/>
-          </a:xfrm>
-          <a:prstGeom prst="rect">
-            <a:avLst/>
-          </a:prstGeom>
-          <a:noFill/>
-        </p:spPr>
-        <p:txBody>
-          <a:bodyPr wrap="square">
-            <a:spAutoFit/>
-          </a:bodyPr>
-          <a:lstStyle/>
-          <a:p>
-            <a:pPr algn="ctr"/>
-            <a:r>
-              <a:rPr sz="1100" b="1">
-                <a:solidFill>
-                  <a:srgbClr val="333333"/>
-                </a:solidFill>
-              </a:rPr>
-              <a:t>④ Test 面板：貼逐字稿輸出待辦</a:t>
+            <a:pPr algn="l"/>
+            <a:r>
+              <a:rPr sz="1300" b="1">
+                <a:solidFill>
+                  <a:srgbClr val="CC492B"/>
+                </a:solidFill>
+                <a:latin typeface="Microsoft JhengHei"/>
+                <a:ea typeface="Microsoft JhengHei"/>
+              </a:rPr>
+              <a:t>畫面重點  </a:t>
+            </a:r>
+            <a:r>
+              <a:rPr sz="1300">
+                <a:solidFill>
+                  <a:srgbClr val="000000"/>
+                </a:solidFill>
+                <a:latin typeface="Microsoft JhengHei"/>
+                <a:ea typeface="Microsoft JhengHei"/>
+              </a:rPr>
+              <a:t>① Condition 分支自動判斷假別　② Question／Adaptive Card 確認關卡＝寫入前必經使用者確認（人在迴路）　③ 已發佈上線。佐證 Copilot Studio 平台可行、團隊具實作能力；AIPM 各 Agent 沿用同一套 Topics 與確認關卡機制。</a:t>
             </a:r>
           </a:p>
         </p:txBody>
